--- a/ebr/Northstar_EBR_Oct2026.pptx
+++ b/ebr/Northstar_EBR_Oct2026.pptx
@@ -113,21 +113,21 @@
   <p:extLst>
     <p:ext uri="{521415D9-36F7-43E2-AB2F-B90AF26B5E84}">
       <p14:sectionLst xmlns:p14="http://schemas.microsoft.com/office/powerpoint/2010/main">
-        <p14:section name="Results" id="{13af140a-ecca-0042-808a-63e8509fbf8e}">
+        <p14:section name="Results" id="{94b35f01-40dd-06fa-b70f-2b19c4551b67}">
           <p14:sldIdLst>
             <p14:sldId id="256"/>
             <p14:sldId id="257"/>
             <p14:sldId id="258"/>
           </p14:sldIdLst>
         </p14:section>
-        <p14:section name="Expansion" id="{358abec7-103f-5049-5779-517b3509f4dc}">
+        <p14:section name="Expansion" id="{2b3fcfbd-308e-abef-01fe-4664299a3d7b}">
           <p14:sldIdLst>
             <p14:sldId id="259"/>
             <p14:sldId id="260"/>
             <p14:sldId id="261"/>
           </p14:sldIdLst>
         </p14:section>
-        <p14:section name="Decision" id="{55953de3-5269-f434-78cc-a77187941218}">
+        <p14:section name="Decision" id="{eb3d59db-1b5b-ad09-0897-c7d45138365d}">
           <p14:sldIdLst>
             <p14:sldId id="262"/>
           </p14:sldIdLst>
@@ -1117,7 +1117,7 @@
           <a:p>
             <a:r>
               <a:rPr lang="en-US" dirty="0"/>
-              <a:t>Be direct about the trade-off. Atlas scales to zero when quiet, which is why the August bill is low and why the first requests after a lull can fail while capacity spins up. Holding capacity warm for Atlas alone would cost about $5.8k a month, $8.8k with EU-only placement, to gain roughly 22 minutes of availability a month. We don’t recommend that. For now: retune scale-up thresholds and pre-warm before planned promotions. The always-on floor and 99.9% arrive with the shared deployment, where five brands make it about $1.2k to $1.8k each.</a:t>
+              <a:t>Be precise about what we know. Availability averaged 99.85% and missed 99.9% on 27 of 31 days, 25 of them outside the two incidents, so this is not just the burst days. At 19,000 to 31,000 requests a day Atlas is unlikely to sit idle at zero for long, so we should not assume cold starts are the cause. The next step is the deployment telemetry: scale-up events and error codes by hour. Meanwhile we retune scale-up thresholds and pre-warm before planned promotions. Always-on capacity for Atlas alone would cost about $5.8k a month, $8.8k with EU-only placement; we would only recommend it if the telemetry shows scale-up is driving the misses. On the shared deployment the same capacity is about $1.2k to $1.8k per brand.</a:t>
             </a:r>
             <a:endParaRPr lang="en-US" dirty="0"/>
           </a:p>
@@ -1469,7 +1469,7 @@
           <a:p>
             <a:r>
               <a:rPr lang="en-US" dirty="0"/>
-              <a:t>Close on the one risk that matters: if group sponsorship doesn’t happen, the rollout stays with Atlas and the shared capacity never pays for itself, for Northstar or for the 99.9% target. Ask for three things: a named group sponsor, joint agreement on the Ridgeline criteria, and always-on capacity committed alongside a second brand rather than for Atlas alone. Then land the five messages.</a:t>
+              <a:t>Close on the one risk that matters: if group sponsorship doesn’t happen, the rollout stays with Atlas and the shared capacity never pays for itself. Ask for three things: a named group sponsor, joint agreement on the Ridgeline criteria, and shared capacity sized alongside a second brand, based on what the telemetry shows. Then land the five messages.</a:t>
             </a:r>
             <a:endParaRPr lang="en-US" dirty="0"/>
           </a:p>
@@ -3622,7 +3622,7 @@
                   <a:srgbClr val="5A5E63"/>
                 </a:solidFill>
               </a:rPr>
-              <a:t>Met on 4 of 31 days, all in the final week. The fix has a cost (next slide).</a:t>
+              <a:t>Met on 4 of 31 days, all in the final week. Cause under review (next slide).</a:t>
             </a:r>
             <a:endParaRPr lang="en-US" sz="1300" dirty="0"/>
           </a:p>
@@ -3865,7 +3865,7 @@
                   <a:schemeClr val="tx1"/>
                 </a:solidFill>
               </a:rPr>
-              <a:t>99.9% arrives with shared capacity, not a 5x bill</a:t>
+              <a:t>Find the cause before buying capacity</a:t>
             </a:r>
             <a:endParaRPr lang="en-US" sz="3400" dirty="0"/>
           </a:p>
@@ -3901,7 +3901,7 @@
                   <a:schemeClr val="tx1"/>
                 </a:solidFill>
               </a:rPr>
-              <a:t>Atlas scales its capacity down when traffic is quiet. That keeps the bill low, and it explains most of August’s availability misses: after a quiet spell, the first requests wait while capacity comes back up.</a:t>
+              <a:t>Availability averaged 99.85% and fell short of 99.9% on 27 of 31 days, not only on the two incident days. Daily metrics can’t show why, so we diagnose from deployment telemetry before changing capacity.</a:t>
             </a:r>
             <a:endParaRPr lang="en-US" sz="1500" dirty="0"/>
           </a:p>
@@ -4025,7 +4025,7 @@
                   <a:schemeClr val="tx1"/>
                 </a:solidFill>
               </a:rPr>
-              <a:t>Tune what Atlas has</a:t>
+              <a:t>Diagnose and tune</a:t>
             </a:r>
             <a:endParaRPr lang="en-US" sz="1800" dirty="0"/>
           </a:p>
@@ -4065,7 +4065,7 @@
                   <a:schemeClr val="tx1"/>
                 </a:solidFill>
               </a:rPr>
-              <a:t>Retune scale-up thresholds</a:t>
+              <a:t>Review deployment telemetry together</a:t>
             </a:r>
             <a:endParaRPr lang="en-US" sz="1400" dirty="0"/>
           </a:p>
@@ -4083,7 +4083,7 @@
                   <a:schemeClr val="tx1"/>
                 </a:solidFill>
               </a:rPr>
-              <a:t>Pre-warm capacity before planned promotions</a:t>
+              <a:t>Retune scale-up; pre-warm before promotions</a:t>
             </a:r>
             <a:endParaRPr lang="en-US" sz="1400" dirty="0"/>
           </a:p>
@@ -4119,7 +4119,7 @@
                   <a:srgbClr val="5A5E63"/>
                 </a:solidFill>
               </a:rPr>
-              <a:t>Bill stays ~$1.4k/month at current traffic; availability ~99.85%</a:t>
+              <a:t>Bill stays ~$1.4k/month at current traffic</a:t>
             </a:r>
             <a:endParaRPr lang="en-US" sz="1300" dirty="0"/>
           </a:p>
@@ -4207,7 +4207,7 @@
                   <a:srgbClr val="F14539"/>
                 </a:solidFill>
               </a:rPr>
-              <a:t>NOT RECOMMENDED</a:t>
+              <a:t>ONLY IF THE DATA SHOWS IT</a:t>
             </a:r>
             <a:endParaRPr lang="en-US" sz="1100" dirty="0"/>
           </a:p>
@@ -4337,7 +4337,7 @@
                   <a:srgbClr val="5A5E63"/>
                 </a:solidFill>
               </a:rPr>
-              <a:t>Buys about 22 minutes a month of extra availability</a:t>
+              <a:t>Justified only if scale-up is driving the misses</a:t>
             </a:r>
             <a:endParaRPr lang="en-US" sz="1300" dirty="0"/>
           </a:p>
@@ -4555,7 +4555,7 @@
                   <a:srgbClr val="5A5E63"/>
                 </a:solidFill>
               </a:rPr>
-              <a:t>This is where 99.9% becomes efficient</a:t>
+              <a:t>Baseline capacity is affordable once shared</a:t>
             </a:r>
             <a:endParaRPr lang="en-US" sz="1300" dirty="0"/>
           </a:p>
@@ -9094,7 +9094,7 @@
                   <a:schemeClr val="bg1"/>
                 </a:solidFill>
               </a:rPr>
-              <a:t>Without group-level sponsorship the rollout stays with Atlas, and shared capacity never carries enough volume to make 99.9% and per-brand cost efficient.</a:t>
+              <a:t>Without group-level sponsorship the rollout stays with Atlas, and shared capacity never carries enough volume to make per-brand cost efficient.</a:t>
             </a:r>
             <a:endParaRPr lang="en-US" sz="1600" dirty="0"/>
           </a:p>
@@ -9206,7 +9206,7 @@
                   <a:schemeClr val="bg1"/>
                 </a:solidFill>
               </a:rPr>
-              <a:t>Commit always-on capacity alongside a second brand</a:t>
+              <a:t>Size shared capacity alongside a second brand</a:t>
             </a:r>
             <a:endParaRPr lang="en-US" sz="1400" dirty="0"/>
           </a:p>
@@ -9458,7 +9458,7 @@
                   <a:schemeClr val="bg1"/>
                 </a:solidFill>
               </a:rPr>
-              <a:t>99.85% is what Atlas alone buys today; 99.9% comes with shared capacity.</a:t>
+              <a:t>99.85% today: we find the cause in telemetry before buying capacity.</a:t>
             </a:r>
             <a:endParaRPr lang="en-US" sz="1400" dirty="0"/>
           </a:p>

--- a/ebr/Northstar_EBR_Oct2026.pptx
+++ b/ebr/Northstar_EBR_Oct2026.pptx
@@ -113,21 +113,21 @@
   <p:extLst>
     <p:ext uri="{521415D9-36F7-43E2-AB2F-B90AF26B5E84}">
       <p14:sectionLst xmlns:p14="http://schemas.microsoft.com/office/powerpoint/2010/main">
-        <p14:section name="Results" id="{94b35f01-40dd-06fa-b70f-2b19c4551b67}">
+        <p14:section name="Results" id="{957c0f9f-06bf-9ff4-cdc8-91f3ebe4b906}">
           <p14:sldIdLst>
             <p14:sldId id="256"/>
             <p14:sldId id="257"/>
             <p14:sldId id="258"/>
           </p14:sldIdLst>
         </p14:section>
-        <p14:section name="Expansion" id="{2b3fcfbd-308e-abef-01fe-4664299a3d7b}">
+        <p14:section name="Expansion" id="{a67ec4d8-8943-2190-bf69-5ce77bef326a}">
           <p14:sldIdLst>
             <p14:sldId id="259"/>
             <p14:sldId id="260"/>
             <p14:sldId id="261"/>
           </p14:sldIdLst>
         </p14:section>
-        <p14:section name="Decision" id="{eb3d59db-1b5b-ad09-0897-c7d45138365d}">
+        <p14:section name="Decision" id="{281eb9c4-e50f-1c67-56fa-6704c5c6a0d2}">
           <p14:sldIdLst>
             <p14:sldId id="262"/>
           </p14:sldIdLst>
@@ -1205,7 +1205,7 @@
           <a:p>
             <a:r>
               <a:rPr lang="en-US" dirty="0"/>
-              <a:t>The architecture: one open-weight base model on a shared deployment, one adapter per brand for tone and policy, and a separate knowledge index and system prompt per brand. Atlas’s adapter moves over unchanged. Data isolation sits where it matters, in each brand’s index and adapter. Halden, the largest brand, can move to its own deployment once its volume keeps capacity busy. Why not reuse Atlas with a new prompt: its tone and return policies are learned and would leak. Why not five separate models: five deployments to run and retrain, and the smaller brands don’t have enough transcripts.</a:t>
+              <a:t>The architecture: one open-weight base model on a shared deployment, one adapter per brand for tone, workflow and policy-following behaviour, and a separate knowledge index and system prompt per brand. Policy facts such as return windows live in the index, not the weights, so they can change without retraining. Atlas’s adapter moves over unchanged. Data isolation sits where it matters, in each brand’s index and adapter. Halden, the largest brand, can move to its own deployment once its volume keeps capacity busy. Why not reuse Atlas with a new prompt: its tone and policy-handling habits are learned and would leak. Why not five separate models: five deployments to run and retrain, and the smaller brands don’t have enough transcripts.</a:t>
             </a:r>
             <a:endParaRPr lang="en-US" dirty="0"/>
           </a:p>
@@ -6445,7 +6445,7 @@
                   <a:srgbClr val="5A5E63"/>
                 </a:solidFill>
               </a:rPr>
-              <a:t>Atlas’s tone and return policies are learned into its adapter and would leak into other brands.</a:t>
+              <a:t>Atlas’s tone and policy-handling habits are learned into its adapter and would leak into other brands.</a:t>
             </a:r>
             <a:endParaRPr lang="en-US" sz="1400" dirty="0"/>
           </a:p>
@@ -6708,7 +6708,7 @@
                   <a:schemeClr val="tx1"/>
                 </a:solidFill>
               </a:rPr>
-              <a:t>Ridgeline is closest to Atlas in product and customer, uses the same Zendesk tooling and runs at moderate volume, so it tests tone and return-policy transfer with limited exposure.</a:t>
+              <a:t>Ridgeline is closest to Atlas in product and customer, uses the same Zendesk tooling and runs at moderate volume, so it tests tone and return-policy handling with limited exposure.</a:t>
             </a:r>
             <a:endParaRPr lang="en-US" sz="1500" dirty="0"/>
           </a:p>
@@ -6996,7 +6996,7 @@
                   <a:srgbClr val="5A5E63"/>
                 </a:solidFill>
               </a:rPr>
-              <a:t>Tone and policy learned from Ridgeline transcripts.</a:t>
+              <a:t>Tone and policy-following learned from Ridgeline transcripts.</a:t>
             </a:r>
             <a:endParaRPr lang="en-US" sz="1400" dirty="0"/>
           </a:p>

--- a/ebr/Northstar_EBR_Oct2026.pptx
+++ b/ebr/Northstar_EBR_Oct2026.pptx
@@ -134,12 +134,12 @@
   <p:extLst>
     <p:ext uri="{521415D9-36F7-43E2-AB2F-B90AF26B5E84}">
       <p14:sectionLst xmlns:p14="http://schemas.microsoft.com/office/powerpoint/2010/main">
-        <p14:section name="Opening" id="{544AF27C-6BDC-E6B5-CAAD-E879D4E0EF83}">
+        <p14:section name="Opening" id="{C97E9E27-640B-AF24-2EBC-A93587E0356A}">
           <p14:sldIdLst>
             <p14:sldId id="256"/>
           </p14:sldIdLst>
         </p14:section>
-        <p14:section name="Results" id="{BBDE147B-622E-4C0F-93DE-F54F205D475D}">
+        <p14:section name="Results" id="{9F2EF559-D229-BEFA-892A-FA3588F5D4B9}">
           <p14:sldIdLst>
             <p14:sldId id="257"/>
             <p14:sldId id="258"/>
@@ -147,19 +147,19 @@
             <p14:sldId id="260"/>
           </p14:sldIdLst>
         </p14:section>
-        <p14:section name="Expansion" id="{0CBF0593-71F3-64AE-0D62-1EE179539EFD}">
+        <p14:section name="Expansion" id="{096516F7-8E5E-7054-E8EB-DE872B8D2EB8}">
           <p14:sldIdLst>
             <p14:sldId id="261"/>
             <p14:sldId id="262"/>
             <p14:sldId id="263"/>
           </p14:sldIdLst>
         </p14:section>
-        <p14:section name="Decision" id="{F3CB7C93-0F50-24A7-56B7-F2A6B3E87E3C}">
+        <p14:section name="Decision" id="{94B122C4-F1D7-530E-E4BC-549E8A23CA5F}">
           <p14:sldIdLst>
             <p14:sldId id="264"/>
           </p14:sldIdLst>
         </p14:section>
-        <p14:section name="Close" id="{9D0AA227-3B72-A991-CD18-CFFA796E0B8C}">
+        <p14:section name="Close" id="{3ABBE099-792F-CC90-4015-720A2DB27EAD}">
           <p14:sldIdLst>
             <p14:sldId id="265"/>
           </p14:sldIdLst>
@@ -351,7 +351,7 @@
           <c:smooth val="1"/>
           <c:extLst>
             <c:ext xmlns:c16="http://schemas.microsoft.com/office/drawing/2014/chart" uri="{C3380CC4-5D6E-409C-BE32-E72D297353CC}">
-              <c16:uniqueId val="{00000000-FEF2-4954-A073-E8C5FFF4107F}"/>
+              <c16:uniqueId val="{00000000-2583-4CDB-A3B0-57D81481A681}"/>
             </c:ext>
           </c:extLst>
         </c:ser>
@@ -510,7 +510,7 @@
           <c:smooth val="1"/>
           <c:extLst>
             <c:ext xmlns:c16="http://schemas.microsoft.com/office/drawing/2014/chart" uri="{C3380CC4-5D6E-409C-BE32-E72D297353CC}">
-              <c16:uniqueId val="{00000001-FEF2-4954-A073-E8C5FFF4107F}"/>
+              <c16:uniqueId val="{00000001-2583-4CDB-A3B0-57D81481A681}"/>
             </c:ext>
           </c:extLst>
         </c:ser>
@@ -822,7 +822,7 @@
           <c:smooth val="1"/>
           <c:extLst>
             <c:ext xmlns:c16="http://schemas.microsoft.com/office/drawing/2014/chart" uri="{C3380CC4-5D6E-409C-BE32-E72D297353CC}">
-              <c16:uniqueId val="{00000000-8D75-4949-BB7E-62189FF17DA3}"/>
+              <c16:uniqueId val="{00000000-BF6E-4619-824B-CCC8747C5D83}"/>
             </c:ext>
           </c:extLst>
         </c:ser>
@@ -981,7 +981,7 @@
           <c:smooth val="1"/>
           <c:extLst>
             <c:ext xmlns:c16="http://schemas.microsoft.com/office/drawing/2014/chart" uri="{C3380CC4-5D6E-409C-BE32-E72D297353CC}">
-              <c16:uniqueId val="{00000001-8D75-4949-BB7E-62189FF17DA3}"/>
+              <c16:uniqueId val="{00000001-BF6E-4619-824B-CCC8747C5D83}"/>
             </c:ext>
           </c:extLst>
         </c:ser>
@@ -1293,7 +1293,7 @@
           <c:smooth val="1"/>
           <c:extLst>
             <c:ext xmlns:c16="http://schemas.microsoft.com/office/drawing/2014/chart" uri="{C3380CC4-5D6E-409C-BE32-E72D297353CC}">
-              <c16:uniqueId val="{00000000-0F9E-40B3-8C11-9C790402B42F}"/>
+              <c16:uniqueId val="{00000000-5DEA-43FB-801C-1D68EBEB771A}"/>
             </c:ext>
           </c:extLst>
         </c:ser>
@@ -1452,7 +1452,7 @@
           <c:smooth val="1"/>
           <c:extLst>
             <c:ext xmlns:c16="http://schemas.microsoft.com/office/drawing/2014/chart" uri="{C3380CC4-5D6E-409C-BE32-E72D297353CC}">
-              <c16:uniqueId val="{00000001-0F9E-40B3-8C11-9C790402B42F}"/>
+              <c16:uniqueId val="{00000001-5DEA-43FB-801C-1D68EBEB771A}"/>
             </c:ext>
           </c:extLst>
         </c:ser>
@@ -1611,7 +1611,7 @@
     </p:spTree>
     <p:extLst>
       <p:ext uri="{BB962C8B-B14F-4D97-AF65-F5344CB8AC3E}">
-        <p14:creationId xmlns:p14="http://schemas.microsoft.com/office/powerpoint/2010/main" val="2408404908"/>
+        <p14:creationId xmlns:p14="http://schemas.microsoft.com/office/powerpoint/2010/main" val="3363676601"/>
       </p:ext>
     </p:extLst>
   </p:cSld>
@@ -1757,7 +1757,7 @@
           <a:p>
             <a:r>
               <a:rPr lang="en-US" dirty="0"/>
-              <a:t>Welcome and purpose. This review covers Atlas’s first month in production, measured on the same data and the same scoring as the dashboard Northstar already has, and the proposal to bring the four sister brands onto the platform. We want to leave today with a group sponsor and agreement on the Ridgeline pilot.</a:t>
+              <a:t>Welcome and purpose. This review covers Atlas’s first month in production, measured on the same data and the same scoring as the dashboard Northstar already has, and the proposal to bring the four sister brands onto the platform. The five key messages are the whole story in one place; everything that follows is the evidence. One: month one delivered, with automation at 70.1% in the final week and faster, better-rated answers. Two: quality improved every week. Three: availability is 99.85%, and we will find the cause in telemetry before anyone buys capacity. Four: one base model with one adapter per brand keeps each brand’s voice and data separate. Five: we are asking for a group sponsor today and Ridgeline as the pilot.</a:t>
             </a:r>
           </a:p>
         </p:txBody>
@@ -2540,7 +2540,7 @@
           <a:p>
             <a:r>
               <a:rPr lang="en-US" dirty="0"/>
-              <a:t>Close on the one risk that matters: if group sponsorship doesn’t happen, the rollout stays with Atlas and the shared capacity never pays for itself. Ask for three things: a named group sponsor, joint agreement on the Ridgeline criteria, and shared capacity sized alongside a second brand, based on what the telemetry shows. Then land the five messages.</a:t>
+              <a:t>Close on the one risk that matters. The platform worked in month one; the risk is that nobody above brand level owns the rollout, so it stays with Atlas. If that happens, always-on capacity stays a single-brand cost, the sister brands, which carry most of the Tier-1 volume, don’t get the gains, and each brand makes its own tooling decision. The mitigation is three concrete asks: a named group sponsor at this review, the Ridgeline criteria agreed together, and shared capacity sized alongside a second brand from a load benchmark, never for Atlas alone.</a:t>
             </a:r>
           </a:p>
         </p:txBody>
@@ -3622,314 +3622,14 @@
       </p:pic>
       <p:sp>
         <p:nvSpPr>
-          <p:cNvPr id="3" name="Shape 0"/>
-          <p:cNvSpPr/>
-          <p:nvPr/>
-        </p:nvSpPr>
-        <p:spPr>
-          <a:xfrm>
-            <a:off x="10957255" y="841248"/>
-            <a:ext cx="219456" cy="219456"/>
-          </a:xfrm>
-          <a:prstGeom prst="rect">
-            <a:avLst/>
-          </a:prstGeom>
-          <a:solidFill>
-            <a:srgbClr val="6720FF"/>
-          </a:solidFill>
-          <a:ln/>
-        </p:spPr>
-      </p:sp>
-      <p:sp>
-        <p:nvSpPr>
-          <p:cNvPr id="4" name="Shape 1"/>
-          <p:cNvSpPr/>
-          <p:nvPr/>
-        </p:nvSpPr>
-        <p:spPr>
-          <a:xfrm>
-            <a:off x="11240719" y="841248"/>
-            <a:ext cx="219456" cy="219456"/>
-          </a:xfrm>
-          <a:prstGeom prst="rect">
-            <a:avLst/>
-          </a:prstGeom>
-          <a:solidFill>
-            <a:srgbClr val="6720FF"/>
-          </a:solidFill>
-          <a:ln/>
-        </p:spPr>
-      </p:sp>
-      <p:sp>
-        <p:nvSpPr>
-          <p:cNvPr id="5" name="Shape 2"/>
-          <p:cNvSpPr/>
-          <p:nvPr/>
-        </p:nvSpPr>
-        <p:spPr>
-          <a:xfrm>
-            <a:off x="10673791" y="1124712"/>
-            <a:ext cx="219456" cy="219456"/>
-          </a:xfrm>
-          <a:prstGeom prst="rect">
-            <a:avLst/>
-          </a:prstGeom>
-          <a:solidFill>
-            <a:srgbClr val="6720FF"/>
-          </a:solidFill>
-          <a:ln/>
-        </p:spPr>
-      </p:sp>
-      <p:sp>
-        <p:nvSpPr>
-          <p:cNvPr id="6" name="Shape 3"/>
-          <p:cNvSpPr/>
-          <p:nvPr/>
-        </p:nvSpPr>
-        <p:spPr>
-          <a:xfrm>
-            <a:off x="10957255" y="1124712"/>
-            <a:ext cx="219456" cy="219456"/>
-          </a:xfrm>
-          <a:prstGeom prst="rect">
-            <a:avLst/>
-          </a:prstGeom>
-          <a:solidFill>
-            <a:srgbClr val="CEB4FF"/>
-          </a:solidFill>
-          <a:ln/>
-        </p:spPr>
-      </p:sp>
-      <p:sp>
-        <p:nvSpPr>
-          <p:cNvPr id="7" name="Shape 4"/>
-          <p:cNvSpPr/>
-          <p:nvPr/>
-        </p:nvSpPr>
-        <p:spPr>
-          <a:xfrm>
-            <a:off x="11240719" y="1124712"/>
-            <a:ext cx="219456" cy="219456"/>
-          </a:xfrm>
-          <a:prstGeom prst="rect">
-            <a:avLst/>
-          </a:prstGeom>
-          <a:solidFill>
-            <a:srgbClr val="6720FF"/>
-          </a:solidFill>
-          <a:ln/>
-        </p:spPr>
-      </p:sp>
-      <p:sp>
-        <p:nvSpPr>
-          <p:cNvPr id="8" name="Shape 5"/>
-          <p:cNvSpPr/>
-          <p:nvPr/>
-        </p:nvSpPr>
-        <p:spPr>
-          <a:xfrm>
-            <a:off x="10390327" y="1408176"/>
-            <a:ext cx="219456" cy="219456"/>
-          </a:xfrm>
-          <a:prstGeom prst="rect">
-            <a:avLst/>
-          </a:prstGeom>
-          <a:solidFill>
-            <a:srgbClr val="6720FF"/>
-          </a:solidFill>
-          <a:ln/>
-        </p:spPr>
-      </p:sp>
-      <p:sp>
-        <p:nvSpPr>
-          <p:cNvPr id="9" name="Shape 6"/>
-          <p:cNvSpPr/>
-          <p:nvPr/>
-        </p:nvSpPr>
-        <p:spPr>
-          <a:xfrm>
-            <a:off x="10673791" y="1408176"/>
-            <a:ext cx="219456" cy="219456"/>
-          </a:xfrm>
-          <a:prstGeom prst="rect">
-            <a:avLst/>
-          </a:prstGeom>
-          <a:solidFill>
-            <a:srgbClr val="CEB4FF"/>
-          </a:solidFill>
-          <a:ln/>
-        </p:spPr>
-      </p:sp>
-      <p:sp>
-        <p:nvSpPr>
-          <p:cNvPr id="10" name="Shape 7"/>
-          <p:cNvSpPr/>
-          <p:nvPr/>
-        </p:nvSpPr>
-        <p:spPr>
-          <a:xfrm>
-            <a:off x="10957255" y="1408176"/>
-            <a:ext cx="219456" cy="219456"/>
-          </a:xfrm>
-          <a:prstGeom prst="rect">
-            <a:avLst/>
-          </a:prstGeom>
-          <a:solidFill>
-            <a:srgbClr val="E0D2FD"/>
-          </a:solidFill>
-          <a:ln/>
-        </p:spPr>
-      </p:sp>
-      <p:sp>
-        <p:nvSpPr>
-          <p:cNvPr id="11" name="Shape 8"/>
-          <p:cNvSpPr/>
-          <p:nvPr/>
-        </p:nvSpPr>
-        <p:spPr>
-          <a:xfrm>
-            <a:off x="11240719" y="1408176"/>
-            <a:ext cx="219456" cy="219456"/>
-          </a:xfrm>
-          <a:prstGeom prst="rect">
-            <a:avLst/>
-          </a:prstGeom>
-          <a:solidFill>
-            <a:srgbClr val="CEB4FF"/>
-          </a:solidFill>
-          <a:ln/>
-        </p:spPr>
-      </p:sp>
-      <p:sp>
-        <p:nvSpPr>
-          <p:cNvPr id="12" name="Shape 9"/>
-          <p:cNvSpPr/>
-          <p:nvPr/>
-        </p:nvSpPr>
-        <p:spPr>
-          <a:xfrm>
-            <a:off x="10106863" y="1691640"/>
-            <a:ext cx="219456" cy="219456"/>
-          </a:xfrm>
-          <a:prstGeom prst="rect">
-            <a:avLst/>
-          </a:prstGeom>
-          <a:solidFill>
-            <a:srgbClr val="6720FF"/>
-          </a:solidFill>
-          <a:ln/>
-        </p:spPr>
-      </p:sp>
-      <p:sp>
-        <p:nvSpPr>
-          <p:cNvPr id="13" name="Shape 10"/>
-          <p:cNvSpPr/>
-          <p:nvPr/>
-        </p:nvSpPr>
-        <p:spPr>
-          <a:xfrm>
-            <a:off x="10390327" y="1691640"/>
-            <a:ext cx="219456" cy="219456"/>
-          </a:xfrm>
-          <a:prstGeom prst="rect">
-            <a:avLst/>
-          </a:prstGeom>
-          <a:solidFill>
-            <a:srgbClr val="CEB4FF"/>
-          </a:solidFill>
-          <a:ln/>
-        </p:spPr>
-      </p:sp>
-      <p:sp>
-        <p:nvSpPr>
-          <p:cNvPr id="14" name="Shape 11"/>
-          <p:cNvSpPr/>
-          <p:nvPr/>
-        </p:nvSpPr>
-        <p:spPr>
-          <a:xfrm>
-            <a:off x="10673791" y="1691640"/>
-            <a:ext cx="219456" cy="219456"/>
-          </a:xfrm>
-          <a:prstGeom prst="rect">
-            <a:avLst/>
-          </a:prstGeom>
-          <a:solidFill>
-            <a:srgbClr val="E0D2FD"/>
-          </a:solidFill>
-          <a:ln/>
-        </p:spPr>
-      </p:sp>
-      <p:sp>
-        <p:nvSpPr>
-          <p:cNvPr id="15" name="Shape 12"/>
-          <p:cNvSpPr/>
-          <p:nvPr/>
-        </p:nvSpPr>
-        <p:spPr>
-          <a:xfrm>
-            <a:off x="9823399" y="1975104"/>
-            <a:ext cx="219456" cy="219456"/>
-          </a:xfrm>
-          <a:prstGeom prst="rect">
-            <a:avLst/>
-          </a:prstGeom>
-          <a:solidFill>
-            <a:srgbClr val="6720FF"/>
-          </a:solidFill>
-          <a:ln/>
-        </p:spPr>
-      </p:sp>
-      <p:sp>
-        <p:nvSpPr>
-          <p:cNvPr id="16" name="Shape 13"/>
-          <p:cNvSpPr/>
-          <p:nvPr/>
-        </p:nvSpPr>
-        <p:spPr>
-          <a:xfrm>
-            <a:off x="10106863" y="1975104"/>
-            <a:ext cx="219456" cy="219456"/>
-          </a:xfrm>
-          <a:prstGeom prst="rect">
-            <a:avLst/>
-          </a:prstGeom>
-          <a:solidFill>
-            <a:srgbClr val="CEB4FF"/>
-          </a:solidFill>
-          <a:ln/>
-        </p:spPr>
-      </p:sp>
-      <p:sp>
-        <p:nvSpPr>
-          <p:cNvPr id="17" name="Shape 14"/>
-          <p:cNvSpPr/>
-          <p:nvPr/>
-        </p:nvSpPr>
-        <p:spPr>
-          <a:xfrm>
-            <a:off x="10390327" y="1975104"/>
-            <a:ext cx="219456" cy="219456"/>
-          </a:xfrm>
-          <a:prstGeom prst="rect">
-            <a:avLst/>
-          </a:prstGeom>
-          <a:solidFill>
-            <a:srgbClr val="E0D2FD"/>
-          </a:solidFill>
-          <a:ln/>
-        </p:spPr>
-      </p:sp>
-      <p:sp>
-        <p:nvSpPr>
-          <p:cNvPr id="18" name="Text 15"/>
-          <p:cNvSpPr txBox="1"/>
-          <p:nvPr/>
-        </p:nvSpPr>
-        <p:spPr>
-          <a:xfrm>
-            <a:off x="731520" y="2697480"/>
-            <a:ext cx="5486400" cy="274320"/>
+          <p:cNvPr id="3" name="Text 0"/>
+          <p:cNvSpPr txBox="1"/>
+          <p:nvPr/>
+        </p:nvSpPr>
+        <p:spPr>
+          <a:xfrm>
+            <a:off x="731520" y="2331720"/>
+            <a:ext cx="5394960" cy="274320"/>
           </a:xfrm>
           <a:prstGeom prst="rect">
             <a:avLst/>
@@ -3961,14 +3661,14 @@
       </p:sp>
       <p:sp>
         <p:nvSpPr>
-          <p:cNvPr id="19" name="Text 16"/>
-          <p:cNvSpPr txBox="1"/>
-          <p:nvPr/>
-        </p:nvSpPr>
-        <p:spPr>
-          <a:xfrm>
-            <a:off x="731520" y="3017520"/>
-            <a:ext cx="10728655" cy="914400"/>
+          <p:cNvPr id="4" name="Text 1"/>
+          <p:cNvSpPr txBox="1"/>
+          <p:nvPr/>
+        </p:nvSpPr>
+        <p:spPr>
+          <a:xfrm>
+            <a:off x="731520" y="2670048"/>
+            <a:ext cx="5394960" cy="1325880"/>
           </a:xfrm>
           <a:prstGeom prst="rect">
             <a:avLst/>
@@ -3981,10 +3681,13 @@
           <a:lstStyle/>
           <a:p>
             <a:pPr marL="0" indent="0">
-              <a:buNone/>
-            </a:pPr>
-            <a:r>
-              <a:rPr lang="en-US" sz="5000" kern="0" spc="-200" dirty="0">
+              <a:lnSpc>
+                <a:spcPct val="95000"/>
+              </a:lnSpc>
+              <a:buNone/>
+            </a:pPr>
+            <a:r>
+              <a:rPr lang="en-US" sz="4000" kern="0" spc="-160" dirty="0">
                 <a:solidFill>
                   <a:srgbClr val="16181D"/>
                 </a:solidFill>
@@ -3992,22 +3695,42 @@
                 <a:ea typeface="Inter Medium" pitchFamily="34" charset="-122"/>
                 <a:cs typeface="Inter Medium" pitchFamily="34" charset="-120"/>
               </a:rPr>
-              <a:t>Northstar Retail Group — Atlas</a:t>
-            </a:r>
-            <a:endParaRPr lang="en-US" sz="5000" dirty="0"/>
-          </a:p>
-        </p:txBody>
-      </p:sp>
-      <p:sp>
-        <p:nvSpPr>
-          <p:cNvPr id="20" name="Text 17"/>
-          <p:cNvSpPr txBox="1"/>
-          <p:nvPr/>
-        </p:nvSpPr>
-        <p:spPr>
-          <a:xfrm>
-            <a:off x="731520" y="4005072"/>
-            <a:ext cx="10728655" cy="457200"/>
+              <a:t>Northstar Retail Group</a:t>
+            </a:r>
+            <a:endParaRPr lang="en-US" sz="4000" dirty="0"/>
+          </a:p>
+          <a:p>
+            <a:pPr marL="0" indent="0">
+              <a:lnSpc>
+                <a:spcPct val="95000"/>
+              </a:lnSpc>
+              <a:buNone/>
+            </a:pPr>
+            <a:r>
+              <a:rPr lang="en-US" sz="4000" kern="0" spc="-160" dirty="0">
+                <a:solidFill>
+                  <a:srgbClr val="16181D"/>
+                </a:solidFill>
+                <a:latin typeface="Inter Medium" pitchFamily="34" charset="0"/>
+                <a:ea typeface="Inter Medium" pitchFamily="34" charset="-122"/>
+                <a:cs typeface="Inter Medium" pitchFamily="34" charset="-120"/>
+              </a:rPr>
+              <a:t>— Atlas</a:t>
+            </a:r>
+            <a:endParaRPr lang="en-US" sz="4000" dirty="0"/>
+          </a:p>
+        </p:txBody>
+      </p:sp>
+      <p:sp>
+        <p:nvSpPr>
+          <p:cNvPr id="5" name="Text 2"/>
+          <p:cNvSpPr txBox="1"/>
+          <p:nvPr/>
+        </p:nvSpPr>
+        <p:spPr>
+          <a:xfrm>
+            <a:off x="731520" y="4114800"/>
+            <a:ext cx="5029200" cy="731520"/>
           </a:xfrm>
           <a:prstGeom prst="rect">
             <a:avLst/>
@@ -4023,7 +3746,7 @@
               <a:buNone/>
             </a:pPr>
             <a:r>
-              <a:rPr lang="en-US" sz="2000" dirty="0">
+              <a:rPr lang="en-US" sz="1800" dirty="0">
                 <a:solidFill>
                   <a:srgbClr val="5A5E63"/>
                 </a:solidFill>
@@ -4033,25 +3756,29 @@
               </a:rPr>
               <a:t>Month one in production, and the plan for four more brands</a:t>
             </a:r>
-            <a:endParaRPr lang="en-US" sz="2000" dirty="0"/>
-          </a:p>
-        </p:txBody>
-      </p:sp>
-      <p:sp>
-        <p:nvSpPr>
-          <p:cNvPr id="21" name="Shape 18"/>
-          <p:cNvSpPr/>
-          <p:nvPr/>
-        </p:nvSpPr>
-        <p:spPr>
-          <a:xfrm>
-            <a:off x="731520" y="5760720"/>
-            <a:ext cx="10728655" cy="0"/>
-          </a:xfrm>
-          <a:prstGeom prst="line">
-            <a:avLst/>
-          </a:prstGeom>
-          <a:noFill/>
+            <a:endParaRPr lang="en-US" sz="1800" dirty="0"/>
+          </a:p>
+        </p:txBody>
+      </p:sp>
+      <p:sp>
+        <p:nvSpPr>
+          <p:cNvPr id="6" name="key-messages"/>
+          <p:cNvSpPr/>
+          <p:nvPr/>
+        </p:nvSpPr>
+        <p:spPr>
+          <a:xfrm>
+            <a:off x="6537960" y="841248"/>
+            <a:ext cx="4922215" cy="4645152"/>
+          </a:xfrm>
+          <a:prstGeom prst="roundRect">
+            <a:avLst>
+              <a:gd name="adj" fmla="val 2362"/>
+            </a:avLst>
+          </a:prstGeom>
+          <a:solidFill>
+            <a:srgbClr val="FAF7FF"/>
+          </a:solidFill>
           <a:ln w="9525">
             <a:solidFill>
               <a:srgbClr val="E6EAF4"/>
@@ -4062,14 +3789,14 @@
       </p:sp>
       <p:sp>
         <p:nvSpPr>
-          <p:cNvPr id="22" name="Text 19"/>
-          <p:cNvSpPr txBox="1"/>
-          <p:nvPr/>
-        </p:nvSpPr>
-        <p:spPr>
-          <a:xfrm>
-            <a:off x="731520" y="5925312"/>
-            <a:ext cx="5486400" cy="274320"/>
+          <p:cNvPr id="7" name="Text 4"/>
+          <p:cNvSpPr txBox="1"/>
+          <p:nvPr/>
+        </p:nvSpPr>
+        <p:spPr>
+          <a:xfrm>
+            <a:off x="6812280" y="1115568"/>
+            <a:ext cx="2743200" cy="219456"/>
           </a:xfrm>
           <a:prstGeom prst="rect">
             <a:avLst/>
@@ -4087,12 +3814,461 @@
             <a:r>
               <a:rPr lang="en-US" sz="1100" dirty="0">
                 <a:solidFill>
-                  <a:srgbClr val="5A5E63"/>
+                  <a:srgbClr val="501BC4"/>
+                </a:solidFill>
+                <a:latin typeface="Inter Medium" pitchFamily="34" charset="0"/>
+                <a:ea typeface="Inter Medium" pitchFamily="34" charset="-122"/>
+                <a:cs typeface="Inter Medium" pitchFamily="34" charset="-120"/>
+              </a:rPr>
+              <a:t>Key messages</a:t>
+            </a:r>
+            <a:endParaRPr lang="en-US" sz="1100" dirty="0"/>
+          </a:p>
+        </p:txBody>
+      </p:sp>
+      <p:sp>
+        <p:nvSpPr>
+          <p:cNvPr id="8" name="Shape 5"/>
+          <p:cNvSpPr/>
+          <p:nvPr/>
+        </p:nvSpPr>
+        <p:spPr>
+          <a:xfrm>
+            <a:off x="6830568" y="1781251"/>
+            <a:ext cx="118872" cy="118872"/>
+          </a:xfrm>
+          <a:prstGeom prst="rect">
+            <a:avLst/>
+          </a:prstGeom>
+          <a:solidFill>
+            <a:srgbClr val="6720FF"/>
+          </a:solidFill>
+          <a:ln/>
+        </p:spPr>
+      </p:sp>
+      <p:sp>
+        <p:nvSpPr>
+          <p:cNvPr id="9" name="Text 6"/>
+          <p:cNvSpPr txBox="1"/>
+          <p:nvPr/>
+        </p:nvSpPr>
+        <p:spPr>
+          <a:xfrm>
+            <a:off x="7141464" y="1444752"/>
+            <a:ext cx="4044391" cy="791870"/>
+          </a:xfrm>
+          <a:prstGeom prst="rect">
+            <a:avLst/>
+          </a:prstGeom>
+          <a:noFill/>
+          <a:ln/>
+        </p:spPr>
+        <p:txBody>
+          <a:bodyPr wrap="square" lIns="0" tIns="0" rIns="0" bIns="0" rtlCol="0" anchor="ctr"/>
+          <a:lstStyle/>
+          <a:p>
+            <a:pPr marL="0" indent="0">
+              <a:buNone/>
+            </a:pPr>
+            <a:r>
+              <a:rPr lang="en-US" sz="1250" dirty="0">
+                <a:solidFill>
+                  <a:srgbClr val="16181D"/>
                 </a:solidFill>
                 <a:latin typeface="Inter" pitchFamily="34" charset="0"/>
                 <a:ea typeface="Inter" pitchFamily="34" charset="-122"/>
                 <a:cs typeface="Inter" pitchFamily="34" charset="-120"/>
               </a:rPr>
+              <a:t>Month one delivered: Tier-1 automation reached 70.1% in the final week, with faster, better-rated answers.</a:t>
+            </a:r>
+            <a:endParaRPr lang="en-US" sz="1250" dirty="0"/>
+          </a:p>
+        </p:txBody>
+      </p:sp>
+      <p:sp>
+        <p:nvSpPr>
+          <p:cNvPr id="10" name="Shape 7"/>
+          <p:cNvSpPr/>
+          <p:nvPr/>
+        </p:nvSpPr>
+        <p:spPr>
+          <a:xfrm>
+            <a:off x="6812280" y="2236622"/>
+            <a:ext cx="4373575" cy="0"/>
+          </a:xfrm>
+          <a:prstGeom prst="line">
+            <a:avLst/>
+          </a:prstGeom>
+          <a:noFill/>
+          <a:ln w="9525">
+            <a:solidFill>
+              <a:srgbClr val="E6EAF4"/>
+            </a:solidFill>
+            <a:prstDash val="solid"/>
+          </a:ln>
+        </p:spPr>
+      </p:sp>
+      <p:sp>
+        <p:nvSpPr>
+          <p:cNvPr id="11" name="Shape 8"/>
+          <p:cNvSpPr/>
+          <p:nvPr/>
+        </p:nvSpPr>
+        <p:spPr>
+          <a:xfrm>
+            <a:off x="6830568" y="2573122"/>
+            <a:ext cx="118872" cy="118872"/>
+          </a:xfrm>
+          <a:prstGeom prst="rect">
+            <a:avLst/>
+          </a:prstGeom>
+          <a:solidFill>
+            <a:srgbClr val="6720FF"/>
+          </a:solidFill>
+          <a:ln/>
+        </p:spPr>
+      </p:sp>
+      <p:sp>
+        <p:nvSpPr>
+          <p:cNvPr id="12" name="Text 9"/>
+          <p:cNvSpPr txBox="1"/>
+          <p:nvPr/>
+        </p:nvSpPr>
+        <p:spPr>
+          <a:xfrm>
+            <a:off x="7141464" y="2236622"/>
+            <a:ext cx="4044391" cy="791870"/>
+          </a:xfrm>
+          <a:prstGeom prst="rect">
+            <a:avLst/>
+          </a:prstGeom>
+          <a:noFill/>
+          <a:ln/>
+        </p:spPr>
+        <p:txBody>
+          <a:bodyPr wrap="square" lIns="0" tIns="0" rIns="0" bIns="0" rtlCol="0" anchor="ctr"/>
+          <a:lstStyle/>
+          <a:p>
+            <a:pPr marL="0" indent="0">
+              <a:buNone/>
+            </a:pPr>
+            <a:r>
+              <a:rPr lang="en-US" sz="1250" dirty="0">
+                <a:solidFill>
+                  <a:srgbClr val="16181D"/>
+                </a:solidFill>
+                <a:latin typeface="Inter" pitchFamily="34" charset="0"/>
+                <a:ea typeface="Inter" pitchFamily="34" charset="-122"/>
+                <a:cs typeface="Inter" pitchFamily="34" charset="-120"/>
+              </a:rPr>
+              <a:t>Quality improved every week, and the evidence is in your dashboard.</a:t>
+            </a:r>
+            <a:endParaRPr lang="en-US" sz="1250" dirty="0"/>
+          </a:p>
+        </p:txBody>
+      </p:sp>
+      <p:sp>
+        <p:nvSpPr>
+          <p:cNvPr id="13" name="Shape 10"/>
+          <p:cNvSpPr/>
+          <p:nvPr/>
+        </p:nvSpPr>
+        <p:spPr>
+          <a:xfrm>
+            <a:off x="6812280" y="3028493"/>
+            <a:ext cx="4373575" cy="0"/>
+          </a:xfrm>
+          <a:prstGeom prst="line">
+            <a:avLst/>
+          </a:prstGeom>
+          <a:noFill/>
+          <a:ln w="9525">
+            <a:solidFill>
+              <a:srgbClr val="E6EAF4"/>
+            </a:solidFill>
+            <a:prstDash val="solid"/>
+          </a:ln>
+        </p:spPr>
+      </p:sp>
+      <p:sp>
+        <p:nvSpPr>
+          <p:cNvPr id="14" name="Shape 11"/>
+          <p:cNvSpPr/>
+          <p:nvPr/>
+        </p:nvSpPr>
+        <p:spPr>
+          <a:xfrm>
+            <a:off x="6830568" y="3364992"/>
+            <a:ext cx="118872" cy="118872"/>
+          </a:xfrm>
+          <a:prstGeom prst="rect">
+            <a:avLst/>
+          </a:prstGeom>
+          <a:solidFill>
+            <a:srgbClr val="6720FF"/>
+          </a:solidFill>
+          <a:ln/>
+        </p:spPr>
+      </p:sp>
+      <p:sp>
+        <p:nvSpPr>
+          <p:cNvPr id="15" name="Text 12"/>
+          <p:cNvSpPr txBox="1"/>
+          <p:nvPr/>
+        </p:nvSpPr>
+        <p:spPr>
+          <a:xfrm>
+            <a:off x="7141464" y="3028493"/>
+            <a:ext cx="4044391" cy="791870"/>
+          </a:xfrm>
+          <a:prstGeom prst="rect">
+            <a:avLst/>
+          </a:prstGeom>
+          <a:noFill/>
+          <a:ln/>
+        </p:spPr>
+        <p:txBody>
+          <a:bodyPr wrap="square" lIns="0" tIns="0" rIns="0" bIns="0" rtlCol="0" anchor="ctr"/>
+          <a:lstStyle/>
+          <a:p>
+            <a:pPr marL="0" indent="0">
+              <a:buNone/>
+            </a:pPr>
+            <a:r>
+              <a:rPr lang="en-US" sz="1250" dirty="0">
+                <a:solidFill>
+                  <a:srgbClr val="16181D"/>
+                </a:solidFill>
+                <a:latin typeface="Inter" pitchFamily="34" charset="0"/>
+                <a:ea typeface="Inter" pitchFamily="34" charset="-122"/>
+                <a:cs typeface="Inter" pitchFamily="34" charset="-120"/>
+              </a:rPr>
+              <a:t>99.85% availability today: we find the cause in telemetry before buying capacity.</a:t>
+            </a:r>
+            <a:endParaRPr lang="en-US" sz="1250" dirty="0"/>
+          </a:p>
+        </p:txBody>
+      </p:sp>
+      <p:sp>
+        <p:nvSpPr>
+          <p:cNvPr id="16" name="Shape 13"/>
+          <p:cNvSpPr/>
+          <p:nvPr/>
+        </p:nvSpPr>
+        <p:spPr>
+          <a:xfrm>
+            <a:off x="6812280" y="3820363"/>
+            <a:ext cx="4373575" cy="0"/>
+          </a:xfrm>
+          <a:prstGeom prst="line">
+            <a:avLst/>
+          </a:prstGeom>
+          <a:noFill/>
+          <a:ln w="9525">
+            <a:solidFill>
+              <a:srgbClr val="E6EAF4"/>
+            </a:solidFill>
+            <a:prstDash val="solid"/>
+          </a:ln>
+        </p:spPr>
+      </p:sp>
+      <p:sp>
+        <p:nvSpPr>
+          <p:cNvPr id="17" name="Shape 14"/>
+          <p:cNvSpPr/>
+          <p:nvPr/>
+        </p:nvSpPr>
+        <p:spPr>
+          <a:xfrm>
+            <a:off x="6830568" y="4156862"/>
+            <a:ext cx="118872" cy="118872"/>
+          </a:xfrm>
+          <a:prstGeom prst="rect">
+            <a:avLst/>
+          </a:prstGeom>
+          <a:solidFill>
+            <a:srgbClr val="6720FF"/>
+          </a:solidFill>
+          <a:ln/>
+        </p:spPr>
+      </p:sp>
+      <p:sp>
+        <p:nvSpPr>
+          <p:cNvPr id="18" name="Text 15"/>
+          <p:cNvSpPr txBox="1"/>
+          <p:nvPr/>
+        </p:nvSpPr>
+        <p:spPr>
+          <a:xfrm>
+            <a:off x="7141464" y="3820363"/>
+            <a:ext cx="4044391" cy="791870"/>
+          </a:xfrm>
+          <a:prstGeom prst="rect">
+            <a:avLst/>
+          </a:prstGeom>
+          <a:noFill/>
+          <a:ln/>
+        </p:spPr>
+        <p:txBody>
+          <a:bodyPr wrap="square" lIns="0" tIns="0" rIns="0" bIns="0" rtlCol="0" anchor="ctr"/>
+          <a:lstStyle/>
+          <a:p>
+            <a:pPr marL="0" indent="0">
+              <a:buNone/>
+            </a:pPr>
+            <a:r>
+              <a:rPr lang="en-US" sz="1250" dirty="0">
+                <a:solidFill>
+                  <a:srgbClr val="16181D"/>
+                </a:solidFill>
+                <a:latin typeface="Inter" pitchFamily="34" charset="0"/>
+                <a:ea typeface="Inter" pitchFamily="34" charset="-122"/>
+                <a:cs typeface="Inter" pitchFamily="34" charset="-120"/>
+              </a:rPr>
+              <a:t>One base model, one adapter per brand: each brand keeps its voice and its data.</a:t>
+            </a:r>
+            <a:endParaRPr lang="en-US" sz="1250" dirty="0"/>
+          </a:p>
+        </p:txBody>
+      </p:sp>
+      <p:sp>
+        <p:nvSpPr>
+          <p:cNvPr id="19" name="Shape 16"/>
+          <p:cNvSpPr/>
+          <p:nvPr/>
+        </p:nvSpPr>
+        <p:spPr>
+          <a:xfrm>
+            <a:off x="6812280" y="4612234"/>
+            <a:ext cx="4373575" cy="0"/>
+          </a:xfrm>
+          <a:prstGeom prst="line">
+            <a:avLst/>
+          </a:prstGeom>
+          <a:noFill/>
+          <a:ln w="9525">
+            <a:solidFill>
+              <a:srgbClr val="E6EAF4"/>
+            </a:solidFill>
+            <a:prstDash val="solid"/>
+          </a:ln>
+        </p:spPr>
+      </p:sp>
+      <p:sp>
+        <p:nvSpPr>
+          <p:cNvPr id="20" name="Shape 17"/>
+          <p:cNvSpPr/>
+          <p:nvPr/>
+        </p:nvSpPr>
+        <p:spPr>
+          <a:xfrm>
+            <a:off x="6830568" y="4948733"/>
+            <a:ext cx="118872" cy="118872"/>
+          </a:xfrm>
+          <a:prstGeom prst="rect">
+            <a:avLst/>
+          </a:prstGeom>
+          <a:solidFill>
+            <a:srgbClr val="1DA28F"/>
+          </a:solidFill>
+          <a:ln/>
+        </p:spPr>
+      </p:sp>
+      <p:sp>
+        <p:nvSpPr>
+          <p:cNvPr id="21" name="Text 18"/>
+          <p:cNvSpPr txBox="1"/>
+          <p:nvPr/>
+        </p:nvSpPr>
+        <p:spPr>
+          <a:xfrm>
+            <a:off x="7141464" y="4612234"/>
+            <a:ext cx="4044391" cy="791870"/>
+          </a:xfrm>
+          <a:prstGeom prst="rect">
+            <a:avLst/>
+          </a:prstGeom>
+          <a:noFill/>
+          <a:ln/>
+        </p:spPr>
+        <p:txBody>
+          <a:bodyPr wrap="square" lIns="0" tIns="0" rIns="0" bIns="0" rtlCol="0" anchor="ctr"/>
+          <a:lstStyle/>
+          <a:p>
+            <a:pPr marL="0" indent="0">
+              <a:buNone/>
+            </a:pPr>
+            <a:r>
+              <a:rPr lang="en-US" sz="1250" dirty="0">
+                <a:solidFill>
+                  <a:srgbClr val="16181D"/>
+                </a:solidFill>
+                <a:latin typeface="Inter" pitchFamily="34" charset="0"/>
+                <a:ea typeface="Inter" pitchFamily="34" charset="-122"/>
+                <a:cs typeface="Inter" pitchFamily="34" charset="-120"/>
+              </a:rPr>
+              <a:t>We’re asking for a group sponsor today and Ridgeline as the pilot.</a:t>
+            </a:r>
+            <a:endParaRPr lang="en-US" sz="1250" dirty="0"/>
+          </a:p>
+        </p:txBody>
+      </p:sp>
+      <p:sp>
+        <p:nvSpPr>
+          <p:cNvPr id="22" name="Shape 19"/>
+          <p:cNvSpPr/>
+          <p:nvPr/>
+        </p:nvSpPr>
+        <p:spPr>
+          <a:xfrm>
+            <a:off x="731520" y="5760720"/>
+            <a:ext cx="10728655" cy="0"/>
+          </a:xfrm>
+          <a:prstGeom prst="line">
+            <a:avLst/>
+          </a:prstGeom>
+          <a:noFill/>
+          <a:ln w="9525">
+            <a:solidFill>
+              <a:srgbClr val="E6EAF4"/>
+            </a:solidFill>
+            <a:prstDash val="solid"/>
+          </a:ln>
+        </p:spPr>
+      </p:sp>
+      <p:sp>
+        <p:nvSpPr>
+          <p:cNvPr id="23" name="Text 20"/>
+          <p:cNvSpPr txBox="1"/>
+          <p:nvPr/>
+        </p:nvSpPr>
+        <p:spPr>
+          <a:xfrm>
+            <a:off x="731520" y="5925312"/>
+            <a:ext cx="5486400" cy="274320"/>
+          </a:xfrm>
+          <a:prstGeom prst="rect">
+            <a:avLst/>
+          </a:prstGeom>
+          <a:noFill/>
+          <a:ln/>
+        </p:spPr>
+        <p:txBody>
+          <a:bodyPr wrap="square" lIns="0" tIns="0" rIns="0" bIns="0" rtlCol="0" anchor="t"/>
+          <a:lstStyle/>
+          <a:p>
+            <a:pPr marL="0" indent="0">
+              <a:buNone/>
+            </a:pPr>
+            <a:r>
+              <a:rPr lang="en-US" sz="1100" dirty="0">
+                <a:solidFill>
+                  <a:srgbClr val="5A5E63"/>
+                </a:solidFill>
+                <a:latin typeface="Inter" pitchFamily="34" charset="0"/>
+                <a:ea typeface="Inter" pitchFamily="34" charset="-122"/>
+                <a:cs typeface="Inter" pitchFamily="34" charset="-120"/>
+              </a:rPr>
               <a:t>Model ID: </a:t>
             </a:r>
             <a:r>
@@ -4112,7 +4288,7 @@
       </p:sp>
       <p:sp>
         <p:nvSpPr>
-          <p:cNvPr id="23" name="Text 20"/>
+          <p:cNvPr id="24" name="Text 21"/>
           <p:cNvSpPr txBox="1"/>
           <p:nvPr/>
         </p:nvSpPr>
@@ -16356,7 +16532,7 @@
                 <a:ea typeface="Inter Medium" pitchFamily="34" charset="-122"/>
                 <a:cs typeface="Inter Medium" pitchFamily="34" charset="-120"/>
               </a:rPr>
-              <a:t>The rollout must not stall at one brand</a:t>
+              <a:t>Biggest risk: the rollout stalls at one brand</a:t>
             </a:r>
             <a:endParaRPr lang="en-US" sz="2800" dirty="0"/>
           </a:p>
@@ -16399,7 +16575,7 @@
                 <a:ea typeface="Inter" pitchFamily="34" charset="-122"/>
                 <a:cs typeface="Inter" pitchFamily="34" charset="-120"/>
               </a:rPr>
-              <a:t>What we are asking for today.</a:t>
+              <a:t>The risk is commercial and organisational rather than technical: month one worked, but no one owns the rollout above brand level yet.</a:t>
             </a:r>
             <a:endParaRPr lang="en-US" sz="1300" dirty="0"/>
           </a:p>
@@ -16563,7 +16739,7 @@
                 <a:ea typeface="Inter Medium" pitchFamily="34" charset="-122"/>
                 <a:cs typeface="Inter Medium" pitchFamily="34" charset="-120"/>
               </a:rPr>
-              <a:t>Mitigation</a:t>
+              <a:t>Why it matters</a:t>
             </a:r>
             <a:endParaRPr lang="en-US" sz="1050" dirty="0"/>
           </a:p>
@@ -16577,14 +16753,14 @@
         </p:nvSpPr>
         <p:spPr>
           <a:xfrm>
-            <a:off x="1005840" y="4507992"/>
+            <a:off x="1005840" y="4498848"/>
             <a:ext cx="100584" cy="100584"/>
           </a:xfrm>
           <a:prstGeom prst="rect">
             <a:avLst/>
           </a:prstGeom>
           <a:solidFill>
-            <a:srgbClr val="6720FF"/>
+            <a:srgbClr val="F14539"/>
           </a:solidFill>
           <a:ln/>
         </p:spPr>
@@ -16598,7 +16774,7 @@
         <p:spPr>
           <a:xfrm>
             <a:off x="1261872" y="4434840"/>
-            <a:ext cx="4297680" cy="274320"/>
+            <a:ext cx="4297680" cy="457200"/>
           </a:xfrm>
           <a:prstGeom prst="rect">
             <a:avLst/>
@@ -16614,7 +16790,7 @@
               <a:buNone/>
             </a:pPr>
             <a:r>
-              <a:rPr lang="en-US" sz="1200" dirty="0">
+              <a:rPr lang="en-US" sz="1100" dirty="0">
                 <a:solidFill>
                   <a:srgbClr val="28282E"/>
                 </a:solidFill>
@@ -16622,9 +16798,9 @@
                 <a:ea typeface="Inter" pitchFamily="34" charset="-122"/>
                 <a:cs typeface="Inter" pitchFamily="34" charset="-120"/>
               </a:rPr>
-              <a:t>Name a group sponsor at this review</a:t>
-            </a:r>
-            <a:endParaRPr lang="en-US" sz="1200" dirty="0"/>
+              <a:t>Always-on capacity stays a single-brand cost (approx. $5,800/month) rather than $1,200–$1,800 per brand shared.</a:t>
+            </a:r>
+            <a:endParaRPr lang="en-US" sz="1100" dirty="0"/>
           </a:p>
         </p:txBody>
       </p:sp>
@@ -16636,14 +16812,14 @@
         </p:nvSpPr>
         <p:spPr>
           <a:xfrm>
-            <a:off x="1005840" y="4965192"/>
+            <a:off x="1005840" y="5047488"/>
             <a:ext cx="100584" cy="100584"/>
           </a:xfrm>
           <a:prstGeom prst="rect">
             <a:avLst/>
           </a:prstGeom>
           <a:solidFill>
-            <a:srgbClr val="6720FF"/>
+            <a:srgbClr val="F14539"/>
           </a:solidFill>
           <a:ln/>
         </p:spPr>
@@ -16656,8 +16832,8 @@
         </p:nvSpPr>
         <p:spPr>
           <a:xfrm>
-            <a:off x="1261872" y="4892040"/>
-            <a:ext cx="4297680" cy="274320"/>
+            <a:off x="1261872" y="4983480"/>
+            <a:ext cx="4297680" cy="457200"/>
           </a:xfrm>
           <a:prstGeom prst="rect">
             <a:avLst/>
@@ -16673,7 +16849,7 @@
               <a:buNone/>
             </a:pPr>
             <a:r>
-              <a:rPr lang="en-US" sz="1200" dirty="0">
+              <a:rPr lang="en-US" sz="1100" dirty="0">
                 <a:solidFill>
                   <a:srgbClr val="28282E"/>
                 </a:solidFill>
@@ -16681,9 +16857,9 @@
                 <a:ea typeface="Inter" pitchFamily="34" charset="-122"/>
                 <a:cs typeface="Inter" pitchFamily="34" charset="-120"/>
               </a:rPr>
-              <a:t>Agree the Ridgeline pilot criteria together</a:t>
-            </a:r>
-            <a:endParaRPr lang="en-US" sz="1200" dirty="0"/>
+              <a:t>The four sister brands, with most of the group’s Tier-1 volume, don’t get the gains Atlas has shown.</a:t>
+            </a:r>
+            <a:endParaRPr lang="en-US" sz="1100" dirty="0"/>
           </a:p>
         </p:txBody>
       </p:sp>
@@ -16695,14 +16871,14 @@
         </p:nvSpPr>
         <p:spPr>
           <a:xfrm>
-            <a:off x="1005840" y="5422392"/>
+            <a:off x="1005840" y="5596128"/>
             <a:ext cx="100584" cy="100584"/>
           </a:xfrm>
           <a:prstGeom prst="rect">
             <a:avLst/>
           </a:prstGeom>
           <a:solidFill>
-            <a:srgbClr val="6720FF"/>
+            <a:srgbClr val="F14539"/>
           </a:solidFill>
           <a:ln/>
         </p:spPr>
@@ -16715,8 +16891,8 @@
         </p:nvSpPr>
         <p:spPr>
           <a:xfrm>
-            <a:off x="1261872" y="5349240"/>
-            <a:ext cx="4297680" cy="274320"/>
+            <a:off x="1261872" y="5532120"/>
+            <a:ext cx="4297680" cy="457200"/>
           </a:xfrm>
           <a:prstGeom prst="rect">
             <a:avLst/>
@@ -16732,7 +16908,7 @@
               <a:buNone/>
             </a:pPr>
             <a:r>
-              <a:rPr lang="en-US" sz="1200" dirty="0">
+              <a:rPr lang="en-US" sz="1100" dirty="0">
                 <a:solidFill>
                   <a:srgbClr val="28282E"/>
                 </a:solidFill>
@@ -16740,15 +16916,15 @@
                 <a:ea typeface="Inter" pitchFamily="34" charset="-122"/>
                 <a:cs typeface="Inter" pitchFamily="34" charset="-120"/>
               </a:rPr>
-              <a:t>Size shared capacity alongside a second brand</a:t>
-            </a:r>
-            <a:endParaRPr lang="en-US" sz="1200" dirty="0"/>
-          </a:p>
-        </p:txBody>
-      </p:sp>
-      <p:sp>
-        <p:nvSpPr>
-          <p:cNvPr id="16" name="key-messages"/>
+              <a:t>Each brand would make its own platform decision, so the group ends up with several tools to run.</a:t>
+            </a:r>
+            <a:endParaRPr lang="en-US" sz="1100" dirty="0"/>
+          </a:p>
+        </p:txBody>
+      </p:sp>
+      <p:sp>
+        <p:nvSpPr>
+          <p:cNvPr id="16" name="mitigation"/>
           <p:cNvSpPr/>
           <p:nvPr/>
         </p:nvSpPr>
@@ -16806,7 +16982,7 @@
                 <a:ea typeface="Inter Medium" pitchFamily="34" charset="-122"/>
                 <a:cs typeface="Inter Medium" pitchFamily="34" charset="-120"/>
               </a:rPr>
-              <a:t>Key messages</a:t>
+              <a:t>How we mitigate it</a:t>
             </a:r>
             <a:endParaRPr lang="en-US" sz="1050" dirty="0"/>
           </a:p>
@@ -16820,7 +16996,7 @@
         </p:nvSpPr>
         <p:spPr>
           <a:xfrm>
-            <a:off x="6446520" y="2953512"/>
+            <a:off x="6446520" y="2889504"/>
             <a:ext cx="109728" cy="109728"/>
           </a:xfrm>
           <a:prstGeom prst="rect">
@@ -16840,46 +17016,124 @@
         </p:nvSpPr>
         <p:spPr>
           <a:xfrm>
-            <a:off x="6720840" y="2670048"/>
-            <a:ext cx="4465015" cy="676656"/>
-          </a:xfrm>
-          <a:prstGeom prst="rect">
-            <a:avLst/>
-          </a:prstGeom>
-          <a:noFill/>
-          <a:ln/>
-        </p:spPr>
-        <p:txBody>
-          <a:bodyPr wrap="square" lIns="0" tIns="0" rIns="0" bIns="0" rtlCol="0" anchor="ctr"/>
-          <a:lstStyle/>
-          <a:p>
-            <a:pPr marL="0" indent="0">
-              <a:buNone/>
-            </a:pPr>
-            <a:r>
-              <a:rPr lang="en-US" sz="1200" dirty="0">
-                <a:solidFill>
-                  <a:srgbClr val="28282E"/>
+            <a:off x="6720840" y="2816352"/>
+            <a:ext cx="3550615" cy="274320"/>
+          </a:xfrm>
+          <a:prstGeom prst="rect">
+            <a:avLst/>
+          </a:prstGeom>
+          <a:noFill/>
+          <a:ln/>
+        </p:spPr>
+        <p:txBody>
+          <a:bodyPr wrap="square" lIns="0" tIns="0" rIns="0" bIns="0" rtlCol="0" anchor="t"/>
+          <a:lstStyle/>
+          <a:p>
+            <a:pPr marL="0" indent="0">
+              <a:buNone/>
+            </a:pPr>
+            <a:r>
+              <a:rPr lang="en-US" sz="1300" dirty="0">
+                <a:solidFill>
+                  <a:srgbClr val="16181D"/>
+                </a:solidFill>
+                <a:latin typeface="Inter Medium" pitchFamily="34" charset="0"/>
+                <a:ea typeface="Inter Medium" pitchFamily="34" charset="-122"/>
+                <a:cs typeface="Inter Medium" pitchFamily="34" charset="-120"/>
+              </a:rPr>
+              <a:t>Name a group sponsor at this review</a:t>
+            </a:r>
+            <a:endParaRPr lang="en-US" sz="1300" dirty="0"/>
+          </a:p>
+        </p:txBody>
+      </p:sp>
+      <p:sp>
+        <p:nvSpPr>
+          <p:cNvPr id="20" name="Text 18"/>
+          <p:cNvSpPr txBox="1"/>
+          <p:nvPr/>
+        </p:nvSpPr>
+        <p:spPr>
+          <a:xfrm>
+            <a:off x="10271455" y="2816352"/>
+            <a:ext cx="932688" cy="274320"/>
+          </a:xfrm>
+          <a:prstGeom prst="rect">
+            <a:avLst/>
+          </a:prstGeom>
+          <a:noFill/>
+          <a:ln/>
+        </p:spPr>
+        <p:txBody>
+          <a:bodyPr wrap="square" lIns="0" tIns="0" rIns="0" bIns="0" rtlCol="0" anchor="t"/>
+          <a:lstStyle/>
+          <a:p>
+            <a:pPr marL="0" indent="0" algn="r">
+              <a:buNone/>
+            </a:pPr>
+            <a:r>
+              <a:rPr lang="en-US" sz="1100" dirty="0">
+                <a:solidFill>
+                  <a:srgbClr val="501BC4"/>
+                </a:solidFill>
+                <a:latin typeface="Inter Medium" pitchFamily="34" charset="0"/>
+                <a:ea typeface="Inter Medium" pitchFamily="34" charset="-122"/>
+                <a:cs typeface="Inter Medium" pitchFamily="34" charset="-120"/>
+              </a:rPr>
+              <a:t>22 Oct</a:t>
+            </a:r>
+            <a:endParaRPr lang="en-US" sz="1100" dirty="0"/>
+          </a:p>
+        </p:txBody>
+      </p:sp>
+      <p:sp>
+        <p:nvSpPr>
+          <p:cNvPr id="21" name="Text 19"/>
+          <p:cNvSpPr txBox="1"/>
+          <p:nvPr/>
+        </p:nvSpPr>
+        <p:spPr>
+          <a:xfrm>
+            <a:off x="6720840" y="3127248"/>
+            <a:ext cx="4465015" cy="579120"/>
+          </a:xfrm>
+          <a:prstGeom prst="rect">
+            <a:avLst/>
+          </a:prstGeom>
+          <a:noFill/>
+          <a:ln/>
+        </p:spPr>
+        <p:txBody>
+          <a:bodyPr wrap="square" lIns="0" tIns="0" rIns="0" bIns="0" rtlCol="0" anchor="t"/>
+          <a:lstStyle/>
+          <a:p>
+            <a:pPr marL="0" indent="0">
+              <a:buNone/>
+            </a:pPr>
+            <a:r>
+              <a:rPr lang="en-US" sz="1100" dirty="0">
+                <a:solidFill>
+                  <a:srgbClr val="5A5E63"/>
                 </a:solidFill>
                 <a:latin typeface="Inter" pitchFamily="34" charset="0"/>
                 <a:ea typeface="Inter" pitchFamily="34" charset="-122"/>
                 <a:cs typeface="Inter" pitchFamily="34" charset="-120"/>
               </a:rPr>
-              <a:t>Month one delivered: Tier-1 automation reached 70.1% in the final week, with faster, better-rated answers.</a:t>
-            </a:r>
-            <a:endParaRPr lang="en-US" sz="1200" dirty="0"/>
-          </a:p>
-        </p:txBody>
-      </p:sp>
-      <p:sp>
-        <p:nvSpPr>
-          <p:cNvPr id="20" name="Shape 18"/>
-          <p:cNvSpPr/>
-          <p:nvPr/>
-        </p:nvSpPr>
-        <p:spPr>
-          <a:xfrm>
-            <a:off x="6428232" y="3346704"/>
+              <a:t>Someone above brand level who owns the rollout and the wave-2 decision.</a:t>
+            </a:r>
+            <a:endParaRPr lang="en-US" sz="1100" dirty="0"/>
+          </a:p>
+        </p:txBody>
+      </p:sp>
+      <p:sp>
+        <p:nvSpPr>
+          <p:cNvPr id="22" name="Shape 20"/>
+          <p:cNvSpPr/>
+          <p:nvPr/>
+        </p:nvSpPr>
+        <p:spPr>
+          <a:xfrm>
+            <a:off x="6428232" y="3797808"/>
             <a:ext cx="4775911" cy="0"/>
           </a:xfrm>
           <a:prstGeom prst="line">
@@ -16896,13 +17150,13 @@
       </p:sp>
       <p:sp>
         <p:nvSpPr>
-          <p:cNvPr id="21" name="Shape 19"/>
-          <p:cNvSpPr/>
-          <p:nvPr/>
-        </p:nvSpPr>
-        <p:spPr>
-          <a:xfrm>
-            <a:off x="6446520" y="3630168"/>
+          <p:cNvPr id="23" name="Shape 21"/>
+          <p:cNvSpPr/>
+          <p:nvPr/>
+        </p:nvSpPr>
+        <p:spPr>
+          <a:xfrm>
+            <a:off x="6446520" y="4017264"/>
             <a:ext cx="109728" cy="109728"/>
           </a:xfrm>
           <a:prstGeom prst="rect">
@@ -16916,52 +17170,130 @@
       </p:sp>
       <p:sp>
         <p:nvSpPr>
-          <p:cNvPr id="22" name="Text 20"/>
-          <p:cNvSpPr txBox="1"/>
-          <p:nvPr/>
-        </p:nvSpPr>
-        <p:spPr>
-          <a:xfrm>
-            <a:off x="6720840" y="3346704"/>
-            <a:ext cx="4465015" cy="676656"/>
-          </a:xfrm>
-          <a:prstGeom prst="rect">
-            <a:avLst/>
-          </a:prstGeom>
-          <a:noFill/>
-          <a:ln/>
-        </p:spPr>
-        <p:txBody>
-          <a:bodyPr wrap="square" lIns="0" tIns="0" rIns="0" bIns="0" rtlCol="0" anchor="ctr"/>
-          <a:lstStyle/>
-          <a:p>
-            <a:pPr marL="0" indent="0">
-              <a:buNone/>
-            </a:pPr>
-            <a:r>
-              <a:rPr lang="en-US" sz="1200" dirty="0">
-                <a:solidFill>
-                  <a:srgbClr val="28282E"/>
+          <p:cNvPr id="24" name="Text 22"/>
+          <p:cNvSpPr txBox="1"/>
+          <p:nvPr/>
+        </p:nvSpPr>
+        <p:spPr>
+          <a:xfrm>
+            <a:off x="6720840" y="3944112"/>
+            <a:ext cx="3550615" cy="274320"/>
+          </a:xfrm>
+          <a:prstGeom prst="rect">
+            <a:avLst/>
+          </a:prstGeom>
+          <a:noFill/>
+          <a:ln/>
+        </p:spPr>
+        <p:txBody>
+          <a:bodyPr wrap="square" lIns="0" tIns="0" rIns="0" bIns="0" rtlCol="0" anchor="t"/>
+          <a:lstStyle/>
+          <a:p>
+            <a:pPr marL="0" indent="0">
+              <a:buNone/>
+            </a:pPr>
+            <a:r>
+              <a:rPr lang="en-US" sz="1300" dirty="0">
+                <a:solidFill>
+                  <a:srgbClr val="16181D"/>
+                </a:solidFill>
+                <a:latin typeface="Inter Medium" pitchFamily="34" charset="0"/>
+                <a:ea typeface="Inter Medium" pitchFamily="34" charset="-122"/>
+                <a:cs typeface="Inter Medium" pitchFamily="34" charset="-120"/>
+              </a:rPr>
+              <a:t>Agree the Ridgeline pilot criteria together</a:t>
+            </a:r>
+            <a:endParaRPr lang="en-US" sz="1300" dirty="0"/>
+          </a:p>
+        </p:txBody>
+      </p:sp>
+      <p:sp>
+        <p:nvSpPr>
+          <p:cNvPr id="25" name="Text 23"/>
+          <p:cNvSpPr txBox="1"/>
+          <p:nvPr/>
+        </p:nvSpPr>
+        <p:spPr>
+          <a:xfrm>
+            <a:off x="10271455" y="3944112"/>
+            <a:ext cx="932688" cy="274320"/>
+          </a:xfrm>
+          <a:prstGeom prst="rect">
+            <a:avLst/>
+          </a:prstGeom>
+          <a:noFill/>
+          <a:ln/>
+        </p:spPr>
+        <p:txBody>
+          <a:bodyPr wrap="square" lIns="0" tIns="0" rIns="0" bIns="0" rtlCol="0" anchor="t"/>
+          <a:lstStyle/>
+          <a:p>
+            <a:pPr marL="0" indent="0" algn="r">
+              <a:buNone/>
+            </a:pPr>
+            <a:r>
+              <a:rPr lang="en-US" sz="1100" dirty="0">
+                <a:solidFill>
+                  <a:srgbClr val="501BC4"/>
+                </a:solidFill>
+                <a:latin typeface="Inter Medium" pitchFamily="34" charset="0"/>
+                <a:ea typeface="Inter Medium" pitchFamily="34" charset="-122"/>
+                <a:cs typeface="Inter Medium" pitchFamily="34" charset="-120"/>
+              </a:rPr>
+              <a:t>22 Oct</a:t>
+            </a:r>
+            <a:endParaRPr lang="en-US" sz="1100" dirty="0"/>
+          </a:p>
+        </p:txBody>
+      </p:sp>
+      <p:sp>
+        <p:nvSpPr>
+          <p:cNvPr id="26" name="Text 24"/>
+          <p:cNvSpPr txBox="1"/>
+          <p:nvPr/>
+        </p:nvSpPr>
+        <p:spPr>
+          <a:xfrm>
+            <a:off x="6720840" y="4255008"/>
+            <a:ext cx="4465015" cy="579120"/>
+          </a:xfrm>
+          <a:prstGeom prst="rect">
+            <a:avLst/>
+          </a:prstGeom>
+          <a:noFill/>
+          <a:ln/>
+        </p:spPr>
+        <p:txBody>
+          <a:bodyPr wrap="square" lIns="0" tIns="0" rIns="0" bIns="0" rtlCol="0" anchor="t"/>
+          <a:lstStyle/>
+          <a:p>
+            <a:pPr marL="0" indent="0">
+              <a:buNone/>
+            </a:pPr>
+            <a:r>
+              <a:rPr lang="en-US" sz="1100" dirty="0">
+                <a:solidFill>
+                  <a:srgbClr val="5A5E63"/>
                 </a:solidFill>
                 <a:latin typeface="Inter" pitchFamily="34" charset="0"/>
                 <a:ea typeface="Inter" pitchFamily="34" charset="-122"/>
                 <a:cs typeface="Inter" pitchFamily="34" charset="-120"/>
               </a:rPr>
-              <a:t>Quality improved every week, and the evidence is in your dashboard.</a:t>
-            </a:r>
-            <a:endParaRPr lang="en-US" sz="1200" dirty="0"/>
-          </a:p>
-        </p:txBody>
-      </p:sp>
-      <p:sp>
-        <p:nvSpPr>
-          <p:cNvPr id="23" name="Shape 21"/>
-          <p:cNvSpPr/>
-          <p:nvPr/>
-        </p:nvSpPr>
-        <p:spPr>
-          <a:xfrm>
-            <a:off x="6428232" y="4023360"/>
+              <a:t>Success is defined jointly up front, so the readout is a decision rather than a debate.</a:t>
+            </a:r>
+            <a:endParaRPr lang="en-US" sz="1100" dirty="0"/>
+          </a:p>
+        </p:txBody>
+      </p:sp>
+      <p:sp>
+        <p:nvSpPr>
+          <p:cNvPr id="27" name="Shape 25"/>
+          <p:cNvSpPr/>
+          <p:nvPr/>
+        </p:nvSpPr>
+        <p:spPr>
+          <a:xfrm>
+            <a:off x="6428232" y="4925568"/>
             <a:ext cx="4775911" cy="0"/>
           </a:xfrm>
           <a:prstGeom prst="line">
@@ -16978,13 +17310,13 @@
       </p:sp>
       <p:sp>
         <p:nvSpPr>
-          <p:cNvPr id="24" name="Shape 22"/>
-          <p:cNvSpPr/>
-          <p:nvPr/>
-        </p:nvSpPr>
-        <p:spPr>
-          <a:xfrm>
-            <a:off x="6446520" y="4306824"/>
+          <p:cNvPr id="28" name="Shape 26"/>
+          <p:cNvSpPr/>
+          <p:nvPr/>
+        </p:nvSpPr>
+        <p:spPr>
+          <a:xfrm>
+            <a:off x="6446520" y="5145024"/>
             <a:ext cx="109728" cy="109728"/>
           </a:xfrm>
           <a:prstGeom prst="rect">
@@ -16998,204 +17330,118 @@
       </p:sp>
       <p:sp>
         <p:nvSpPr>
-          <p:cNvPr id="25" name="Text 23"/>
-          <p:cNvSpPr txBox="1"/>
-          <p:nvPr/>
-        </p:nvSpPr>
-        <p:spPr>
-          <a:xfrm>
-            <a:off x="6720840" y="4023360"/>
-            <a:ext cx="4465015" cy="676656"/>
-          </a:xfrm>
-          <a:prstGeom prst="rect">
-            <a:avLst/>
-          </a:prstGeom>
-          <a:noFill/>
-          <a:ln/>
-        </p:spPr>
-        <p:txBody>
-          <a:bodyPr wrap="square" lIns="0" tIns="0" rIns="0" bIns="0" rtlCol="0" anchor="ctr"/>
-          <a:lstStyle/>
-          <a:p>
-            <a:pPr marL="0" indent="0">
-              <a:buNone/>
-            </a:pPr>
-            <a:r>
-              <a:rPr lang="en-US" sz="1200" dirty="0">
-                <a:solidFill>
-                  <a:srgbClr val="28282E"/>
+          <p:cNvPr id="29" name="Text 27"/>
+          <p:cNvSpPr txBox="1"/>
+          <p:nvPr/>
+        </p:nvSpPr>
+        <p:spPr>
+          <a:xfrm>
+            <a:off x="6720840" y="5071872"/>
+            <a:ext cx="3550615" cy="274320"/>
+          </a:xfrm>
+          <a:prstGeom prst="rect">
+            <a:avLst/>
+          </a:prstGeom>
+          <a:noFill/>
+          <a:ln/>
+        </p:spPr>
+        <p:txBody>
+          <a:bodyPr wrap="square" lIns="0" tIns="0" rIns="0" bIns="0" rtlCol="0" anchor="t"/>
+          <a:lstStyle/>
+          <a:p>
+            <a:pPr marL="0" indent="0">
+              <a:buNone/>
+            </a:pPr>
+            <a:r>
+              <a:rPr lang="en-US" sz="1300" dirty="0">
+                <a:solidFill>
+                  <a:srgbClr val="16181D"/>
+                </a:solidFill>
+                <a:latin typeface="Inter Medium" pitchFamily="34" charset="0"/>
+                <a:ea typeface="Inter Medium" pitchFamily="34" charset="-122"/>
+                <a:cs typeface="Inter Medium" pitchFamily="34" charset="-120"/>
+              </a:rPr>
+              <a:t>Size shared capacity with a second brand</a:t>
+            </a:r>
+            <a:endParaRPr lang="en-US" sz="1300" dirty="0"/>
+          </a:p>
+        </p:txBody>
+      </p:sp>
+      <p:sp>
+        <p:nvSpPr>
+          <p:cNvPr id="30" name="Text 28"/>
+          <p:cNvSpPr txBox="1"/>
+          <p:nvPr/>
+        </p:nvSpPr>
+        <p:spPr>
+          <a:xfrm>
+            <a:off x="10271455" y="5071872"/>
+            <a:ext cx="932688" cy="274320"/>
+          </a:xfrm>
+          <a:prstGeom prst="rect">
+            <a:avLst/>
+          </a:prstGeom>
+          <a:noFill/>
+          <a:ln/>
+        </p:spPr>
+        <p:txBody>
+          <a:bodyPr wrap="square" lIns="0" tIns="0" rIns="0" bIns="0" rtlCol="0" anchor="t"/>
+          <a:lstStyle/>
+          <a:p>
+            <a:pPr marL="0" indent="0" algn="r">
+              <a:buNone/>
+            </a:pPr>
+            <a:r>
+              <a:rPr lang="en-US" sz="1100" dirty="0">
+                <a:solidFill>
+                  <a:srgbClr val="501BC4"/>
+                </a:solidFill>
+                <a:latin typeface="Inter Medium" pitchFamily="34" charset="0"/>
+                <a:ea typeface="Inter Medium" pitchFamily="34" charset="-122"/>
+                <a:cs typeface="Inter Medium" pitchFamily="34" charset="-120"/>
+              </a:rPr>
+              <a:t>Nov 2026</a:t>
+            </a:r>
+            <a:endParaRPr lang="en-US" sz="1100" dirty="0"/>
+          </a:p>
+        </p:txBody>
+      </p:sp>
+      <p:sp>
+        <p:nvSpPr>
+          <p:cNvPr id="31" name="Text 29"/>
+          <p:cNvSpPr txBox="1"/>
+          <p:nvPr/>
+        </p:nvSpPr>
+        <p:spPr>
+          <a:xfrm>
+            <a:off x="6720840" y="5382768"/>
+            <a:ext cx="4465015" cy="579120"/>
+          </a:xfrm>
+          <a:prstGeom prst="rect">
+            <a:avLst/>
+          </a:prstGeom>
+          <a:noFill/>
+          <a:ln/>
+        </p:spPr>
+        <p:txBody>
+          <a:bodyPr wrap="square" lIns="0" tIns="0" rIns="0" bIns="0" rtlCol="0" anchor="t"/>
+          <a:lstStyle/>
+          <a:p>
+            <a:pPr marL="0" indent="0">
+              <a:buNone/>
+            </a:pPr>
+            <a:r>
+              <a:rPr lang="en-US" sz="1100" dirty="0">
+                <a:solidFill>
+                  <a:srgbClr val="5A5E63"/>
                 </a:solidFill>
                 <a:latin typeface="Inter" pitchFamily="34" charset="0"/>
                 <a:ea typeface="Inter" pitchFamily="34" charset="-122"/>
                 <a:cs typeface="Inter" pitchFamily="34" charset="-120"/>
               </a:rPr>
-              <a:t>99.85% today: we find the cause in telemetry before buying capacity.</a:t>
-            </a:r>
-            <a:endParaRPr lang="en-US" sz="1200" dirty="0"/>
-          </a:p>
-        </p:txBody>
-      </p:sp>
-      <p:sp>
-        <p:nvSpPr>
-          <p:cNvPr id="26" name="Shape 24"/>
-          <p:cNvSpPr/>
-          <p:nvPr/>
-        </p:nvSpPr>
-        <p:spPr>
-          <a:xfrm>
-            <a:off x="6428232" y="4700016"/>
-            <a:ext cx="4775911" cy="0"/>
-          </a:xfrm>
-          <a:prstGeom prst="line">
-            <a:avLst/>
-          </a:prstGeom>
-          <a:noFill/>
-          <a:ln w="9525">
-            <a:solidFill>
-              <a:srgbClr val="E6EAF4"/>
-            </a:solidFill>
-            <a:prstDash val="solid"/>
-          </a:ln>
-        </p:spPr>
-      </p:sp>
-      <p:sp>
-        <p:nvSpPr>
-          <p:cNvPr id="27" name="Shape 25"/>
-          <p:cNvSpPr/>
-          <p:nvPr/>
-        </p:nvSpPr>
-        <p:spPr>
-          <a:xfrm>
-            <a:off x="6446520" y="4983480"/>
-            <a:ext cx="109728" cy="109728"/>
-          </a:xfrm>
-          <a:prstGeom prst="rect">
-            <a:avLst/>
-          </a:prstGeom>
-          <a:solidFill>
-            <a:srgbClr val="6720FF"/>
-          </a:solidFill>
-          <a:ln/>
-        </p:spPr>
-      </p:sp>
-      <p:sp>
-        <p:nvSpPr>
-          <p:cNvPr id="28" name="Text 26"/>
-          <p:cNvSpPr txBox="1"/>
-          <p:nvPr/>
-        </p:nvSpPr>
-        <p:spPr>
-          <a:xfrm>
-            <a:off x="6720840" y="4700016"/>
-            <a:ext cx="4465015" cy="676656"/>
-          </a:xfrm>
-          <a:prstGeom prst="rect">
-            <a:avLst/>
-          </a:prstGeom>
-          <a:noFill/>
-          <a:ln/>
-        </p:spPr>
-        <p:txBody>
-          <a:bodyPr wrap="square" lIns="0" tIns="0" rIns="0" bIns="0" rtlCol="0" anchor="ctr"/>
-          <a:lstStyle/>
-          <a:p>
-            <a:pPr marL="0" indent="0">
-              <a:buNone/>
-            </a:pPr>
-            <a:r>
-              <a:rPr lang="en-US" sz="1200" dirty="0">
-                <a:solidFill>
-                  <a:srgbClr val="28282E"/>
-                </a:solidFill>
-                <a:latin typeface="Inter" pitchFamily="34" charset="0"/>
-                <a:ea typeface="Inter" pitchFamily="34" charset="-122"/>
-                <a:cs typeface="Inter" pitchFamily="34" charset="-120"/>
-              </a:rPr>
-              <a:t>One base, one adapter per brand: each brand keeps its voice and its data.</a:t>
-            </a:r>
-            <a:endParaRPr lang="en-US" sz="1200" dirty="0"/>
-          </a:p>
-        </p:txBody>
-      </p:sp>
-      <p:sp>
-        <p:nvSpPr>
-          <p:cNvPr id="29" name="Shape 27"/>
-          <p:cNvSpPr/>
-          <p:nvPr/>
-        </p:nvSpPr>
-        <p:spPr>
-          <a:xfrm>
-            <a:off x="6428232" y="5376672"/>
-            <a:ext cx="4775911" cy="0"/>
-          </a:xfrm>
-          <a:prstGeom prst="line">
-            <a:avLst/>
-          </a:prstGeom>
-          <a:noFill/>
-          <a:ln w="9525">
-            <a:solidFill>
-              <a:srgbClr val="E6EAF4"/>
-            </a:solidFill>
-            <a:prstDash val="solid"/>
-          </a:ln>
-        </p:spPr>
-      </p:sp>
-      <p:sp>
-        <p:nvSpPr>
-          <p:cNvPr id="30" name="Shape 28"/>
-          <p:cNvSpPr/>
-          <p:nvPr/>
-        </p:nvSpPr>
-        <p:spPr>
-          <a:xfrm>
-            <a:off x="6446520" y="5660136"/>
-            <a:ext cx="109728" cy="109728"/>
-          </a:xfrm>
-          <a:prstGeom prst="rect">
-            <a:avLst/>
-          </a:prstGeom>
-          <a:solidFill>
-            <a:srgbClr val="1DA28F"/>
-          </a:solidFill>
-          <a:ln/>
-        </p:spPr>
-      </p:sp>
-      <p:sp>
-        <p:nvSpPr>
-          <p:cNvPr id="31" name="Text 29"/>
-          <p:cNvSpPr txBox="1"/>
-          <p:nvPr/>
-        </p:nvSpPr>
-        <p:spPr>
-          <a:xfrm>
-            <a:off x="6720840" y="5376672"/>
-            <a:ext cx="4465015" cy="676656"/>
-          </a:xfrm>
-          <a:prstGeom prst="rect">
-            <a:avLst/>
-          </a:prstGeom>
-          <a:noFill/>
-          <a:ln/>
-        </p:spPr>
-        <p:txBody>
-          <a:bodyPr wrap="square" lIns="0" tIns="0" rIns="0" bIns="0" rtlCol="0" anchor="ctr"/>
-          <a:lstStyle/>
-          <a:p>
-            <a:pPr marL="0" indent="0">
-              <a:buNone/>
-            </a:pPr>
-            <a:r>
-              <a:rPr lang="en-US" sz="1200" dirty="0">
-                <a:solidFill>
-                  <a:srgbClr val="28282E"/>
-                </a:solidFill>
-                <a:latin typeface="Inter" pitchFamily="34" charset="0"/>
-                <a:ea typeface="Inter" pitchFamily="34" charset="-122"/>
-                <a:cs typeface="Inter" pitchFamily="34" charset="-120"/>
-              </a:rPr>
-              <a:t>We’re asking for a group sponsor today and Ridgeline as the pilot.</a:t>
-            </a:r>
-            <a:endParaRPr lang="en-US" sz="1200" dirty="0"/>
+              <a:t>Capacity is committed with Ridgeline from a load benchmark, never for Atlas alone.</a:t>
+            </a:r>
+            <a:endParaRPr lang="en-US" sz="1100" dirty="0"/>
           </a:p>
         </p:txBody>
       </p:sp>

--- a/ebr/Northstar_EBR_Oct2026.pptx
+++ b/ebr/Northstar_EBR_Oct2026.pptx
@@ -5,38 +5,30 @@
     <p:sldMasterId id="2147483648" r:id="rId1"/>
   </p:sldMasterIdLst>
   <p:notesMasterIdLst>
-    <p:notesMasterId r:id="rId12"/>
+    <p:notesMasterId r:id="rId11"/>
   </p:notesMasterIdLst>
   <p:sldIdLst>
     <p:sldId id="256" r:id="rId2"/>
     <p:sldId id="257" r:id="rId3"/>
     <p:sldId id="258" r:id="rId4"/>
-    <p:sldId id="259" r:id="rId5"/>
-    <p:sldId id="260" r:id="rId6"/>
-    <p:sldId id="261" r:id="rId7"/>
-    <p:sldId id="262" r:id="rId8"/>
-    <p:sldId id="263" r:id="rId9"/>
-    <p:sldId id="264" r:id="rId10"/>
-    <p:sldId id="265" r:id="rId11"/>
+    <p:sldId id="260" r:id="rId5"/>
+    <p:sldId id="261" r:id="rId6"/>
+    <p:sldId id="262" r:id="rId7"/>
+    <p:sldId id="263" r:id="rId8"/>
+    <p:sldId id="264" r:id="rId9"/>
+    <p:sldId id="265" r:id="rId10"/>
   </p:sldIdLst>
   <p:sldSz cx="12192000" cy="6858000"/>
   <p:notesSz cx="6858000" cy="12192000"/>
   <p:embeddedFontLst>
     <p:embeddedFont>
-      <p:font typeface="Consolas" panose="020B0609020204030204" pitchFamily="49" charset="0"/>
-      <p:regular r:id="rId13"/>
-      <p:bold r:id="rId14"/>
-      <p:italic r:id="rId15"/>
-      <p:boldItalic r:id="rId16"/>
-    </p:embeddedFont>
-    <p:embeddedFont>
       <p:font typeface="Inter" panose="02000503000000020004" pitchFamily="2" charset="0"/>
-      <p:regular r:id="rId17"/>
-      <p:bold r:id="rId18"/>
+      <p:regular r:id="rId12"/>
+      <p:bold r:id="rId13"/>
     </p:embeddedFont>
     <p:embeddedFont>
       <p:font typeface="Inter Medium" panose="02000603000000020004" pitchFamily="2" charset="0"/>
-      <p:regular r:id="rId19"/>
+      <p:regular r:id="rId14"/>
     </p:embeddedFont>
   </p:embeddedFontLst>
   <p:defaultTextStyle>
@@ -143,7 +135,6 @@
           <p14:sldIdLst>
             <p14:sldId id="257"/>
             <p14:sldId id="258"/>
-            <p14:sldId id="259"/>
             <p14:sldId id="260"/>
           </p14:sldIdLst>
         </p14:section>
@@ -173,949 +164,271 @@
 </p:presentation>
 </file>
 
-<file path=ppt/charts/chart1.xml><?xml version="1.0" encoding="utf-8"?>
-<c:chartSpace xmlns:c="http://schemas.openxmlformats.org/drawingml/2006/chart" xmlns:a="http://schemas.openxmlformats.org/drawingml/2006/main" xmlns:r="http://schemas.openxmlformats.org/officeDocument/2006/relationships" xmlns:c16r2="http://schemas.microsoft.com/office/drawing/2015/06/chart">
-  <c:date1904 val="0"/>
-  <c:lang val="en-US"/>
-  <c:roundedCorners val="1"/>
-  <c:style val="2"/>
-  <c:chart>
-    <c:autoTitleDeleted val="1"/>
-    <c:plotArea>
-      <c:layout>
-        <c:manualLayout>
-          <c:layoutTarget val="inner"/>
-          <c:xMode val="edge"/>
-          <c:yMode val="edge"/>
-          <c:x val="8.5000000000000006E-2"/>
-          <c:y val="0.04"/>
-          <c:w val="0.89500000000000002"/>
-          <c:h val="0.8"/>
-        </c:manualLayout>
-      </c:layout>
-      <c:lineChart>
-        <c:grouping val="standard"/>
-        <c:varyColors val="0"/>
-        <c:ser>
-          <c:idx val="0"/>
-          <c:order val="0"/>
-          <c:tx>
-            <c:strRef>
-              <c:f>Sheet1!$B$1</c:f>
-              <c:strCache>
-                <c:ptCount val="1"/>
-                <c:pt idx="0">
-                  <c:v>Automation rate</c:v>
-                </c:pt>
-              </c:strCache>
-            </c:strRef>
-          </c:tx>
-          <c:spPr>
-            <a:ln w="22225" cap="flat">
-              <a:solidFill>
-                <a:srgbClr val="6720FF"/>
-              </a:solidFill>
-              <a:prstDash val="solid"/>
-              <a:round/>
-            </a:ln>
-            <a:effectLst/>
-          </c:spPr>
-          <c:marker>
-            <c:symbol val="none"/>
-          </c:marker>
-          <c:cat>
-            <c:strRef>
-              <c:f>Sheet1!$A$2:$A$32</c:f>
-              <c:strCache>
-                <c:ptCount val="31"/>
-                <c:pt idx="0">
-                  <c:v>Aug 1</c:v>
-                </c:pt>
-                <c:pt idx="7">
-                  <c:v>Aug 8</c:v>
-                </c:pt>
-                <c:pt idx="14">
-                  <c:v>Aug 15</c:v>
-                </c:pt>
-                <c:pt idx="21">
-                  <c:v>Aug 22</c:v>
-                </c:pt>
-                <c:pt idx="28">
-                  <c:v>Aug 29</c:v>
-                </c:pt>
-              </c:strCache>
-            </c:strRef>
-          </c:cat>
-          <c:val>
-            <c:numRef>
-              <c:f>Sheet1!$B$2:$B$32</c:f>
-              <c:numCache>
-                <c:formatCode>General</c:formatCode>
-                <c:ptCount val="31"/>
-                <c:pt idx="0">
-                  <c:v>65.400000000000006</c:v>
-                </c:pt>
-                <c:pt idx="1">
-                  <c:v>65.400000000000006</c:v>
-                </c:pt>
-                <c:pt idx="2">
-                  <c:v>65.599999999999994</c:v>
-                </c:pt>
-                <c:pt idx="3">
-                  <c:v>65.900000000000006</c:v>
-                </c:pt>
-                <c:pt idx="4">
-                  <c:v>65.8</c:v>
-                </c:pt>
-                <c:pt idx="5">
-                  <c:v>66.2</c:v>
-                </c:pt>
-                <c:pt idx="6">
-                  <c:v>66.2</c:v>
-                </c:pt>
-                <c:pt idx="7">
-                  <c:v>66.3</c:v>
-                </c:pt>
-                <c:pt idx="8">
-                  <c:v>66.7</c:v>
-                </c:pt>
-                <c:pt idx="9">
-                  <c:v>66.599999999999994</c:v>
-                </c:pt>
-                <c:pt idx="10">
-                  <c:v>66.900000000000006</c:v>
-                </c:pt>
-                <c:pt idx="11">
-                  <c:v>67.3</c:v>
-                </c:pt>
-                <c:pt idx="12">
-                  <c:v>67.2</c:v>
-                </c:pt>
-                <c:pt idx="13">
-                  <c:v>67.7</c:v>
-                </c:pt>
-                <c:pt idx="14">
-                  <c:v>67.8</c:v>
-                </c:pt>
-                <c:pt idx="15">
-                  <c:v>68</c:v>
-                </c:pt>
-                <c:pt idx="16">
-                  <c:v>67.900000000000006</c:v>
-                </c:pt>
-                <c:pt idx="17">
-                  <c:v>68.3</c:v>
-                </c:pt>
-                <c:pt idx="18">
-                  <c:v>68.599999999999994</c:v>
-                </c:pt>
-                <c:pt idx="19">
-                  <c:v>68.599999999999994</c:v>
-                </c:pt>
-                <c:pt idx="20">
-                  <c:v>68.8</c:v>
-                </c:pt>
-                <c:pt idx="21">
-                  <c:v>69</c:v>
-                </c:pt>
-                <c:pt idx="22">
-                  <c:v>69.2</c:v>
-                </c:pt>
-                <c:pt idx="23">
-                  <c:v>69.5</c:v>
-                </c:pt>
-                <c:pt idx="24">
-                  <c:v>69.7</c:v>
-                </c:pt>
-                <c:pt idx="25">
-                  <c:v>69.5</c:v>
-                </c:pt>
-                <c:pt idx="26">
-                  <c:v>70</c:v>
-                </c:pt>
-                <c:pt idx="27">
-                  <c:v>70.2</c:v>
-                </c:pt>
-                <c:pt idx="28">
-                  <c:v>70.099999999999994</c:v>
-                </c:pt>
-                <c:pt idx="29">
-                  <c:v>70.2</c:v>
-                </c:pt>
-                <c:pt idx="30">
-                  <c:v>70.8</c:v>
-                </c:pt>
-              </c:numCache>
-            </c:numRef>
-          </c:val>
-          <c:smooth val="1"/>
-          <c:extLst>
-            <c:ext xmlns:c16="http://schemas.microsoft.com/office/drawing/2014/chart" uri="{C3380CC4-5D6E-409C-BE32-E72D297353CC}">
-              <c16:uniqueId val="{00000000-2583-4CDB-A3B0-57D81481A681}"/>
-            </c:ext>
-          </c:extLst>
-        </c:ser>
-        <c:ser>
-          <c:idx val="1"/>
-          <c:order val="1"/>
-          <c:tx>
-            <c:strRef>
-              <c:f>Sheet1!$C$1</c:f>
-              <c:strCache>
-                <c:ptCount val="1"/>
-                <c:pt idx="0">
-                  <c:v>70%</c:v>
-                </c:pt>
-              </c:strCache>
-            </c:strRef>
-          </c:tx>
-          <c:spPr>
-            <a:ln w="12700" cap="flat">
-              <a:solidFill>
-                <a:srgbClr val="ABABAB"/>
-              </a:solidFill>
-              <a:prstDash val="dash"/>
-              <a:round/>
-            </a:ln>
-            <a:effectLst/>
-          </c:spPr>
-          <c:marker>
-            <c:symbol val="none"/>
-          </c:marker>
-          <c:cat>
-            <c:strRef>
-              <c:f>Sheet1!$A$2:$A$32</c:f>
-              <c:strCache>
-                <c:ptCount val="31"/>
-                <c:pt idx="0">
-                  <c:v>Aug 1</c:v>
-                </c:pt>
-                <c:pt idx="7">
-                  <c:v>Aug 8</c:v>
-                </c:pt>
-                <c:pt idx="14">
-                  <c:v>Aug 15</c:v>
-                </c:pt>
-                <c:pt idx="21">
-                  <c:v>Aug 22</c:v>
-                </c:pt>
-                <c:pt idx="28">
-                  <c:v>Aug 29</c:v>
-                </c:pt>
-              </c:strCache>
-            </c:strRef>
-          </c:cat>
-          <c:val>
-            <c:numRef>
-              <c:f>Sheet1!$C$2:$C$32</c:f>
-              <c:numCache>
-                <c:formatCode>General</c:formatCode>
-                <c:ptCount val="31"/>
-                <c:pt idx="0">
-                  <c:v>70</c:v>
-                </c:pt>
-                <c:pt idx="1">
-                  <c:v>70</c:v>
-                </c:pt>
-                <c:pt idx="2">
-                  <c:v>70</c:v>
-                </c:pt>
-                <c:pt idx="3">
-                  <c:v>70</c:v>
-                </c:pt>
-                <c:pt idx="4">
-                  <c:v>70</c:v>
-                </c:pt>
-                <c:pt idx="5">
-                  <c:v>70</c:v>
-                </c:pt>
-                <c:pt idx="6">
-                  <c:v>70</c:v>
-                </c:pt>
-                <c:pt idx="7">
-                  <c:v>70</c:v>
-                </c:pt>
-                <c:pt idx="8">
-                  <c:v>70</c:v>
-                </c:pt>
-                <c:pt idx="9">
-                  <c:v>70</c:v>
-                </c:pt>
-                <c:pt idx="10">
-                  <c:v>70</c:v>
-                </c:pt>
-                <c:pt idx="11">
-                  <c:v>70</c:v>
-                </c:pt>
-                <c:pt idx="12">
-                  <c:v>70</c:v>
-                </c:pt>
-                <c:pt idx="13">
-                  <c:v>70</c:v>
-                </c:pt>
-                <c:pt idx="14">
-                  <c:v>70</c:v>
-                </c:pt>
-                <c:pt idx="15">
-                  <c:v>70</c:v>
-                </c:pt>
-                <c:pt idx="16">
-                  <c:v>70</c:v>
-                </c:pt>
-                <c:pt idx="17">
-                  <c:v>70</c:v>
-                </c:pt>
-                <c:pt idx="18">
-                  <c:v>70</c:v>
-                </c:pt>
-                <c:pt idx="19">
-                  <c:v>70</c:v>
-                </c:pt>
-                <c:pt idx="20">
-                  <c:v>70</c:v>
-                </c:pt>
-                <c:pt idx="21">
-                  <c:v>70</c:v>
-                </c:pt>
-                <c:pt idx="22">
-                  <c:v>70</c:v>
-                </c:pt>
-                <c:pt idx="23">
-                  <c:v>70</c:v>
-                </c:pt>
-                <c:pt idx="24">
-                  <c:v>70</c:v>
-                </c:pt>
-                <c:pt idx="25">
-                  <c:v>70</c:v>
-                </c:pt>
-                <c:pt idx="26">
-                  <c:v>70</c:v>
-                </c:pt>
-                <c:pt idx="27">
-                  <c:v>70</c:v>
-                </c:pt>
-                <c:pt idx="28">
-                  <c:v>70</c:v>
-                </c:pt>
-                <c:pt idx="29">
-                  <c:v>70</c:v>
-                </c:pt>
-                <c:pt idx="30">
-                  <c:v>70</c:v>
-                </c:pt>
-              </c:numCache>
-            </c:numRef>
-          </c:val>
-          <c:smooth val="1"/>
-          <c:extLst>
-            <c:ext xmlns:c16="http://schemas.microsoft.com/office/drawing/2014/chart" uri="{C3380CC4-5D6E-409C-BE32-E72D297353CC}">
-              <c16:uniqueId val="{00000001-2583-4CDB-A3B0-57D81481A681}"/>
-            </c:ext>
-          </c:extLst>
-        </c:ser>
-        <c:dLbls>
-          <c:showLegendKey val="0"/>
-          <c:showVal val="0"/>
-          <c:showCatName val="0"/>
-          <c:showSerName val="0"/>
-          <c:showPercent val="0"/>
-          <c:showBubbleSize val="0"/>
-        </c:dLbls>
-        <c:smooth val="0"/>
-        <c:axId val="2094734554"/>
-        <c:axId val="2094734552"/>
-      </c:lineChart>
-      <c:catAx>
-        <c:axId val="2094734554"/>
-        <c:scaling>
-          <c:orientation val="minMax"/>
-        </c:scaling>
-        <c:delete val="0"/>
-        <c:axPos val="b"/>
-        <c:numFmt formatCode="General" sourceLinked="1"/>
-        <c:majorTickMark val="none"/>
-        <c:minorTickMark val="none"/>
-        <c:tickLblPos val="low"/>
-        <c:spPr>
-          <a:ln w="12700" cap="flat">
-            <a:solidFill>
-              <a:srgbClr val="E6EAF4"/>
-            </a:solidFill>
-            <a:prstDash val="solid"/>
-            <a:round/>
-          </a:ln>
-        </c:spPr>
-        <c:txPr>
-          <a:bodyPr/>
-          <a:lstStyle/>
-          <a:p>
-            <a:pPr>
-              <a:defRPr sz="850" b="0" i="0" u="none" strike="noStrike">
-                <a:solidFill>
-                  <a:srgbClr val="5A5E63"/>
-                </a:solidFill>
-                <a:latin typeface="+mn-lt"/>
-              </a:defRPr>
-            </a:pPr>
-            <a:endParaRPr lang="en-US"/>
-          </a:p>
-        </c:txPr>
-        <c:crossAx val="2094734552"/>
-        <c:crosses val="autoZero"/>
-        <c:auto val="1"/>
-        <c:lblAlgn val="ctr"/>
-        <c:lblOffset val="100"/>
-        <c:noMultiLvlLbl val="1"/>
-      </c:catAx>
-      <c:valAx>
-        <c:axId val="2094734552"/>
-        <c:scaling>
-          <c:orientation val="minMax"/>
-          <c:max val="76"/>
-          <c:min val="60"/>
-        </c:scaling>
-        <c:delete val="0"/>
-        <c:axPos val="l"/>
-        <c:majorGridlines>
-          <c:spPr>
-            <a:ln w="9525" cap="flat">
-              <a:solidFill>
-                <a:srgbClr val="E6EAF4"/>
-              </a:solidFill>
-              <a:prstDash val="solid"/>
-              <a:round/>
-            </a:ln>
-          </c:spPr>
-        </c:majorGridlines>
-        <c:numFmt formatCode="0&quot;%&quot;" sourceLinked="0"/>
-        <c:majorTickMark val="none"/>
-        <c:minorTickMark val="none"/>
-        <c:tickLblPos val="nextTo"/>
-        <c:spPr>
-          <a:ln w="12700" cap="flat">
-            <a:noFill/>
-            <a:prstDash val="solid"/>
-            <a:round/>
-          </a:ln>
-        </c:spPr>
-        <c:txPr>
-          <a:bodyPr/>
-          <a:lstStyle/>
-          <a:p>
-            <a:pPr>
-              <a:defRPr sz="850" b="0" i="0" u="none" strike="noStrike">
-                <a:solidFill>
-                  <a:srgbClr val="5A5E63"/>
-                </a:solidFill>
-                <a:latin typeface="+mn-lt"/>
-              </a:defRPr>
-            </a:pPr>
-            <a:endParaRPr lang="en-US"/>
-          </a:p>
-        </c:txPr>
-        <c:crossAx val="2094734554"/>
-        <c:crosses val="autoZero"/>
-        <c:crossBetween val="between"/>
-        <c:majorUnit val="4"/>
-      </c:valAx>
-      <c:spPr>
-        <a:noFill/>
-        <a:ln>
-          <a:noFill/>
-        </a:ln>
-        <a:effectLst/>
-      </c:spPr>
-    </c:plotArea>
-    <c:plotVisOnly val="1"/>
-    <c:dispBlanksAs val="span"/>
-    <c:showDLblsOverMax val="1"/>
-  </c:chart>
-  <c:spPr>
-    <a:noFill/>
-    <a:ln>
-      <a:noFill/>
-    </a:ln>
-    <a:effectLst/>
-  </c:spPr>
-  <c:externalData r:id="rId1">
-    <c:autoUpdate val="0"/>
-  </c:externalData>
-</c:chartSpace>
+<file path=ppt/revisionInfo.xml><?xml version="1.0" encoding="utf-8"?>
+<p1510:revInfo xmlns:a="http://schemas.openxmlformats.org/drawingml/2006/main" xmlns:r="http://schemas.openxmlformats.org/officeDocument/2006/relationships" xmlns:p1510="http://schemas.microsoft.com/office/powerpoint/2015/10/main">
+  <p1510:revLst>
+    <p1510:client id="{CCD47E27-5CED-42BE-8A5E-043EACC456CA}" v="4" dt="2026-10-05T15:39:00.743"/>
+  </p1510:revLst>
+</p1510:revInfo>
 </file>
 
-<file path=ppt/charts/chart2.xml><?xml version="1.0" encoding="utf-8"?>
-<c:chartSpace xmlns:c="http://schemas.openxmlformats.org/drawingml/2006/chart" xmlns:a="http://schemas.openxmlformats.org/drawingml/2006/main" xmlns:r="http://schemas.openxmlformats.org/officeDocument/2006/relationships" xmlns:c16r2="http://schemas.microsoft.com/office/drawing/2015/06/chart">
-  <c:date1904 val="0"/>
-  <c:lang val="en-US"/>
-  <c:roundedCorners val="1"/>
-  <c:style val="2"/>
-  <c:chart>
-    <c:autoTitleDeleted val="1"/>
-    <c:plotArea>
-      <c:layout>
-        <c:manualLayout>
-          <c:layoutTarget val="inner"/>
-          <c:xMode val="edge"/>
-          <c:yMode val="edge"/>
-          <c:x val="8.5000000000000006E-2"/>
-          <c:y val="0.04"/>
-          <c:w val="0.89500000000000002"/>
-          <c:h val="0.8"/>
-        </c:manualLayout>
-      </c:layout>
-      <c:lineChart>
-        <c:grouping val="standard"/>
-        <c:varyColors val="0"/>
-        <c:ser>
-          <c:idx val="0"/>
-          <c:order val="0"/>
-          <c:tx>
-            <c:strRef>
-              <c:f>Sheet1!$B$1</c:f>
-              <c:strCache>
-                <c:ptCount val="1"/>
-                <c:pt idx="0">
-                  <c:v>Grounded answers</c:v>
-                </c:pt>
-              </c:strCache>
-            </c:strRef>
-          </c:tx>
-          <c:spPr>
-            <a:ln w="22225" cap="flat">
-              <a:solidFill>
-                <a:srgbClr val="6720FF"/>
-              </a:solidFill>
-              <a:prstDash val="solid"/>
-              <a:round/>
-            </a:ln>
-            <a:effectLst/>
-          </c:spPr>
-          <c:marker>
-            <c:symbol val="none"/>
-          </c:marker>
-          <c:cat>
-            <c:strRef>
-              <c:f>Sheet1!$A$2:$A$32</c:f>
-              <c:strCache>
-                <c:ptCount val="31"/>
-                <c:pt idx="0">
-                  <c:v>Aug 1</c:v>
-                </c:pt>
-                <c:pt idx="7">
-                  <c:v>Aug 8</c:v>
-                </c:pt>
-                <c:pt idx="14">
-                  <c:v>Aug 15</c:v>
-                </c:pt>
-                <c:pt idx="21">
-                  <c:v>Aug 22</c:v>
-                </c:pt>
-                <c:pt idx="28">
-                  <c:v>Aug 29</c:v>
-                </c:pt>
-              </c:strCache>
-            </c:strRef>
-          </c:cat>
-          <c:val>
-            <c:numRef>
-              <c:f>Sheet1!$B$2:$B$32</c:f>
-              <c:numCache>
-                <c:formatCode>General</c:formatCode>
-                <c:ptCount val="31"/>
-                <c:pt idx="0">
-                  <c:v>91.8</c:v>
-                </c:pt>
-                <c:pt idx="1">
-                  <c:v>91.9</c:v>
-                </c:pt>
-                <c:pt idx="2">
-                  <c:v>92</c:v>
-                </c:pt>
-                <c:pt idx="3">
-                  <c:v>92</c:v>
-                </c:pt>
-                <c:pt idx="4">
-                  <c:v>92.4</c:v>
-                </c:pt>
-                <c:pt idx="5">
-                  <c:v>92.5</c:v>
-                </c:pt>
-                <c:pt idx="6">
-                  <c:v>92.5</c:v>
-                </c:pt>
-                <c:pt idx="7">
-                  <c:v>92.6</c:v>
-                </c:pt>
-                <c:pt idx="8">
-                  <c:v>92.8</c:v>
-                </c:pt>
-                <c:pt idx="9">
-                  <c:v>92.7</c:v>
-                </c:pt>
-                <c:pt idx="10">
-                  <c:v>93.1</c:v>
-                </c:pt>
-                <c:pt idx="11">
-                  <c:v>93.2</c:v>
-                </c:pt>
-                <c:pt idx="12">
-                  <c:v>93.3</c:v>
-                </c:pt>
-                <c:pt idx="13">
-                  <c:v>93.6</c:v>
-                </c:pt>
-                <c:pt idx="14">
-                  <c:v>93.5</c:v>
-                </c:pt>
-                <c:pt idx="15">
-                  <c:v>93.6</c:v>
-                </c:pt>
-                <c:pt idx="16">
-                  <c:v>93.7</c:v>
-                </c:pt>
-                <c:pt idx="17">
-                  <c:v>94.1</c:v>
-                </c:pt>
-                <c:pt idx="18">
-                  <c:v>94.2</c:v>
-                </c:pt>
-                <c:pt idx="19">
-                  <c:v>94.3</c:v>
-                </c:pt>
-                <c:pt idx="20">
-                  <c:v>94.5</c:v>
-                </c:pt>
-                <c:pt idx="21">
-                  <c:v>94.3</c:v>
-                </c:pt>
-                <c:pt idx="22">
-                  <c:v>94.6</c:v>
-                </c:pt>
-                <c:pt idx="23">
-                  <c:v>95.7</c:v>
-                </c:pt>
-                <c:pt idx="24">
-                  <c:v>95.5</c:v>
-                </c:pt>
-                <c:pt idx="25">
-                  <c:v>95.9</c:v>
-                </c:pt>
-                <c:pt idx="26">
-                  <c:v>95.8</c:v>
-                </c:pt>
-                <c:pt idx="27">
-                  <c:v>96.2</c:v>
-                </c:pt>
-                <c:pt idx="28">
-                  <c:v>96</c:v>
-                </c:pt>
-                <c:pt idx="29">
-                  <c:v>96.2</c:v>
-                </c:pt>
-                <c:pt idx="30">
-                  <c:v>96.5</c:v>
-                </c:pt>
-              </c:numCache>
-            </c:numRef>
-          </c:val>
-          <c:smooth val="1"/>
-          <c:extLst>
-            <c:ext xmlns:c16="http://schemas.microsoft.com/office/drawing/2014/chart" uri="{C3380CC4-5D6E-409C-BE32-E72D297353CC}">
-              <c16:uniqueId val="{00000000-BF6E-4619-824B-CCC8747C5D83}"/>
-            </c:ext>
-          </c:extLst>
-        </c:ser>
-        <c:ser>
-          <c:idx val="1"/>
-          <c:order val="1"/>
-          <c:tx>
-            <c:strRef>
-              <c:f>Sheet1!$C$1</c:f>
-              <c:strCache>
-                <c:ptCount val="1"/>
-                <c:pt idx="0">
-                  <c:v>Eval pass</c:v>
-                </c:pt>
-              </c:strCache>
-            </c:strRef>
-          </c:tx>
-          <c:spPr>
-            <a:ln w="22225" cap="flat">
-              <a:solidFill>
-                <a:srgbClr val="1756FF"/>
-              </a:solidFill>
-              <a:prstDash val="solid"/>
-              <a:round/>
-            </a:ln>
-            <a:effectLst/>
-          </c:spPr>
-          <c:marker>
-            <c:symbol val="none"/>
-          </c:marker>
-          <c:cat>
-            <c:strRef>
-              <c:f>Sheet1!$A$2:$A$32</c:f>
-              <c:strCache>
-                <c:ptCount val="31"/>
-                <c:pt idx="0">
-                  <c:v>Aug 1</c:v>
-                </c:pt>
-                <c:pt idx="7">
-                  <c:v>Aug 8</c:v>
-                </c:pt>
-                <c:pt idx="14">
-                  <c:v>Aug 15</c:v>
-                </c:pt>
-                <c:pt idx="21">
-                  <c:v>Aug 22</c:v>
-                </c:pt>
-                <c:pt idx="28">
-                  <c:v>Aug 29</c:v>
-                </c:pt>
-              </c:strCache>
-            </c:strRef>
-          </c:cat>
-          <c:val>
-            <c:numRef>
-              <c:f>Sheet1!$C$2:$C$32</c:f>
-              <c:numCache>
-                <c:formatCode>General</c:formatCode>
-                <c:ptCount val="31"/>
-                <c:pt idx="0">
-                  <c:v>91.1</c:v>
-                </c:pt>
-                <c:pt idx="1">
-                  <c:v>91.1</c:v>
-                </c:pt>
-                <c:pt idx="2">
-                  <c:v>91.3</c:v>
-                </c:pt>
-                <c:pt idx="3">
-                  <c:v>91.5</c:v>
-                </c:pt>
-                <c:pt idx="4">
-                  <c:v>91.4</c:v>
-                </c:pt>
-                <c:pt idx="5">
-                  <c:v>91.8</c:v>
-                </c:pt>
-                <c:pt idx="6">
-                  <c:v>91.8</c:v>
-                </c:pt>
-                <c:pt idx="7">
-                  <c:v>91.8</c:v>
-                </c:pt>
-                <c:pt idx="8">
-                  <c:v>92.1</c:v>
-                </c:pt>
-                <c:pt idx="9">
-                  <c:v>92</c:v>
-                </c:pt>
-                <c:pt idx="10">
-                  <c:v>92.3</c:v>
-                </c:pt>
-                <c:pt idx="11">
-                  <c:v>92.6</c:v>
-                </c:pt>
-                <c:pt idx="12">
-                  <c:v>92.5</c:v>
-                </c:pt>
-                <c:pt idx="13">
-                  <c:v>92.9</c:v>
-                </c:pt>
-                <c:pt idx="14">
-                  <c:v>93</c:v>
-                </c:pt>
-                <c:pt idx="15">
-                  <c:v>93.1</c:v>
-                </c:pt>
-                <c:pt idx="16">
-                  <c:v>93</c:v>
-                </c:pt>
-                <c:pt idx="17">
-                  <c:v>93.4</c:v>
-                </c:pt>
-                <c:pt idx="18">
-                  <c:v>93.6</c:v>
-                </c:pt>
-                <c:pt idx="19">
-                  <c:v>93.6</c:v>
-                </c:pt>
-                <c:pt idx="20">
-                  <c:v>93.8</c:v>
-                </c:pt>
-                <c:pt idx="21">
-                  <c:v>93.9</c:v>
-                </c:pt>
-                <c:pt idx="22">
-                  <c:v>94.1</c:v>
-                </c:pt>
-                <c:pt idx="23">
-                  <c:v>94.4</c:v>
-                </c:pt>
-                <c:pt idx="24">
-                  <c:v>94.5</c:v>
-                </c:pt>
-                <c:pt idx="25">
-                  <c:v>94.2</c:v>
-                </c:pt>
-                <c:pt idx="26">
-                  <c:v>94.7</c:v>
-                </c:pt>
-                <c:pt idx="27">
-                  <c:v>94.9</c:v>
-                </c:pt>
-                <c:pt idx="28">
-                  <c:v>94.8</c:v>
-                </c:pt>
-                <c:pt idx="29">
-                  <c:v>94.9</c:v>
-                </c:pt>
-                <c:pt idx="30">
-                  <c:v>95.3</c:v>
-                </c:pt>
-              </c:numCache>
-            </c:numRef>
-          </c:val>
-          <c:smooth val="1"/>
-          <c:extLst>
-            <c:ext xmlns:c16="http://schemas.microsoft.com/office/drawing/2014/chart" uri="{C3380CC4-5D6E-409C-BE32-E72D297353CC}">
-              <c16:uniqueId val="{00000001-BF6E-4619-824B-CCC8747C5D83}"/>
-            </c:ext>
-          </c:extLst>
-        </c:ser>
-        <c:dLbls>
-          <c:showLegendKey val="0"/>
-          <c:showVal val="0"/>
-          <c:showCatName val="0"/>
-          <c:showSerName val="0"/>
-          <c:showPercent val="0"/>
-          <c:showBubbleSize val="0"/>
-        </c:dLbls>
-        <c:smooth val="0"/>
-        <c:axId val="2094734554"/>
-        <c:axId val="2094734552"/>
-      </c:lineChart>
-      <c:catAx>
-        <c:axId val="2094734554"/>
-        <c:scaling>
-          <c:orientation val="minMax"/>
-        </c:scaling>
-        <c:delete val="0"/>
-        <c:axPos val="b"/>
-        <c:numFmt formatCode="General" sourceLinked="1"/>
-        <c:majorTickMark val="none"/>
-        <c:minorTickMark val="none"/>
-        <c:tickLblPos val="low"/>
-        <c:spPr>
-          <a:ln w="12700" cap="flat">
-            <a:solidFill>
-              <a:srgbClr val="E6EAF4"/>
-            </a:solidFill>
-            <a:prstDash val="solid"/>
-            <a:round/>
-          </a:ln>
-        </c:spPr>
-        <c:txPr>
-          <a:bodyPr/>
-          <a:lstStyle/>
-          <a:p>
-            <a:pPr>
-              <a:defRPr sz="850" b="0" i="0" u="none" strike="noStrike">
-                <a:solidFill>
-                  <a:srgbClr val="5A5E63"/>
-                </a:solidFill>
-                <a:latin typeface="+mn-lt"/>
-              </a:defRPr>
-            </a:pPr>
-            <a:endParaRPr lang="en-US"/>
-          </a:p>
-        </c:txPr>
-        <c:crossAx val="2094734552"/>
-        <c:crosses val="autoZero"/>
-        <c:auto val="1"/>
-        <c:lblAlgn val="ctr"/>
-        <c:lblOffset val="100"/>
-        <c:noMultiLvlLbl val="1"/>
-      </c:catAx>
-      <c:valAx>
-        <c:axId val="2094734552"/>
-        <c:scaling>
-          <c:orientation val="minMax"/>
-          <c:max val="100"/>
-          <c:min val="88"/>
-        </c:scaling>
-        <c:delete val="0"/>
-        <c:axPos val="l"/>
-        <c:majorGridlines>
-          <c:spPr>
-            <a:ln w="9525" cap="flat">
-              <a:solidFill>
-                <a:srgbClr val="E6EAF4"/>
-              </a:solidFill>
-              <a:prstDash val="solid"/>
-              <a:round/>
-            </a:ln>
-          </c:spPr>
-        </c:majorGridlines>
-        <c:numFmt formatCode="0&quot;%&quot;" sourceLinked="0"/>
-        <c:majorTickMark val="none"/>
-        <c:minorTickMark val="none"/>
-        <c:tickLblPos val="nextTo"/>
-        <c:spPr>
-          <a:ln w="12700" cap="flat">
-            <a:noFill/>
-            <a:prstDash val="solid"/>
-            <a:round/>
-          </a:ln>
-        </c:spPr>
-        <c:txPr>
-          <a:bodyPr/>
-          <a:lstStyle/>
-          <a:p>
-            <a:pPr>
-              <a:defRPr sz="850" b="0" i="0" u="none" strike="noStrike">
-                <a:solidFill>
-                  <a:srgbClr val="5A5E63"/>
-                </a:solidFill>
-                <a:latin typeface="+mn-lt"/>
-              </a:defRPr>
-            </a:pPr>
-            <a:endParaRPr lang="en-US"/>
-          </a:p>
-        </c:txPr>
-        <c:crossAx val="2094734554"/>
-        <c:crosses val="autoZero"/>
-        <c:crossBetween val="between"/>
-        <c:majorUnit val="2"/>
-      </c:valAx>
-      <c:spPr>
-        <a:noFill/>
-        <a:ln>
-          <a:noFill/>
-        </a:ln>
-        <a:effectLst/>
-      </c:spPr>
-    </c:plotArea>
-    <c:plotVisOnly val="1"/>
-    <c:dispBlanksAs val="span"/>
-    <c:showDLblsOverMax val="1"/>
-  </c:chart>
-  <c:spPr>
-    <a:noFill/>
-    <a:ln>
-      <a:noFill/>
-    </a:ln>
-    <a:effectLst/>
-  </c:spPr>
-  <c:externalData r:id="rId1">
-    <c:autoUpdate val="0"/>
-  </c:externalData>
-</c:chartSpace>
+<file path=ppt/changesInfos/changesInfo1.xml><?xml version="1.0" encoding="utf-8"?>
+<pc:chgInfo xmlns:a="http://schemas.openxmlformats.org/drawingml/2006/main" xmlns:r="http://schemas.openxmlformats.org/officeDocument/2006/relationships" xmlns:ac="http://schemas.microsoft.com/office/drawing/2013/main/command" xmlns:pc="http://schemas.microsoft.com/office/powerpoint/2013/main/command">
+  <pc:docChgLst>
+    <pc:chgData name="Abubakar Olafusi" userId="eee36072894731d4" providerId="LiveId" clId="{0389F522-8E0A-4582-B847-05731A668B5C}"/>
+    <pc:docChg chg="undo custSel delSld modSld modSection">
+      <pc:chgData name="Abubakar Olafusi" userId="eee36072894731d4" providerId="LiveId" clId="{0389F522-8E0A-4582-B847-05731A668B5C}" dt="2026-10-05T15:42:42.689" v="255" actId="20577"/>
+      <pc:docMkLst>
+        <pc:docMk/>
+      </pc:docMkLst>
+      <pc:sldChg chg="addSp delSp modSp mod">
+        <pc:chgData name="Abubakar Olafusi" userId="eee36072894731d4" providerId="LiveId" clId="{0389F522-8E0A-4582-B847-05731A668B5C}" dt="2026-10-05T15:33:55.363" v="8" actId="1076"/>
+        <pc:sldMkLst>
+          <pc:docMk/>
+          <pc:sldMk cId="0" sldId="256"/>
+        </pc:sldMkLst>
+        <pc:spChg chg="add del mod">
+          <ac:chgData name="Abubakar Olafusi" userId="eee36072894731d4" providerId="LiveId" clId="{0389F522-8E0A-4582-B847-05731A668B5C}" dt="2026-10-05T15:33:52.284" v="7" actId="14100"/>
+          <ac:spMkLst>
+            <pc:docMk/>
+            <pc:sldMk cId="0" sldId="256"/>
+            <ac:spMk id="4" creationId="{00000000-0000-0000-0000-000000000000}"/>
+          </ac:spMkLst>
+        </pc:spChg>
+        <pc:spChg chg="mod">
+          <ac:chgData name="Abubakar Olafusi" userId="eee36072894731d4" providerId="LiveId" clId="{0389F522-8E0A-4582-B847-05731A668B5C}" dt="2026-10-05T15:33:55.363" v="8" actId="1076"/>
+          <ac:spMkLst>
+            <pc:docMk/>
+            <pc:sldMk cId="0" sldId="256"/>
+            <ac:spMk id="5" creationId="{00000000-0000-0000-0000-000000000000}"/>
+          </ac:spMkLst>
+        </pc:spChg>
+        <pc:spChg chg="mod">
+          <ac:chgData name="Abubakar Olafusi" userId="eee36072894731d4" providerId="LiveId" clId="{0389F522-8E0A-4582-B847-05731A668B5C}" dt="2026-10-05T15:33:30.877" v="1" actId="14100"/>
+          <ac:spMkLst>
+            <pc:docMk/>
+            <pc:sldMk cId="0" sldId="256"/>
+            <ac:spMk id="6" creationId="{00000000-0000-0000-0000-000000000000}"/>
+          </ac:spMkLst>
+        </pc:spChg>
+        <pc:spChg chg="del">
+          <ac:chgData name="Abubakar Olafusi" userId="eee36072894731d4" providerId="LiveId" clId="{0389F522-8E0A-4582-B847-05731A668B5C}" dt="2026-10-05T15:33:35.775" v="2" actId="478"/>
+          <ac:spMkLst>
+            <pc:docMk/>
+            <pc:sldMk cId="0" sldId="256"/>
+            <ac:spMk id="23" creationId="{00000000-0000-0000-0000-000000000000}"/>
+          </ac:spMkLst>
+        </pc:spChg>
+        <pc:spChg chg="mod">
+          <ac:chgData name="Abubakar Olafusi" userId="eee36072894731d4" providerId="LiveId" clId="{0389F522-8E0A-4582-B847-05731A668B5C}" dt="2026-10-05T15:33:39.228" v="3" actId="20577"/>
+          <ac:spMkLst>
+            <pc:docMk/>
+            <pc:sldMk cId="0" sldId="256"/>
+            <ac:spMk id="24" creationId="{00000000-0000-0000-0000-000000000000}"/>
+          </ac:spMkLst>
+        </pc:spChg>
+      </pc:sldChg>
+      <pc:sldChg chg="modSp mod">
+        <pc:chgData name="Abubakar Olafusi" userId="eee36072894731d4" providerId="LiveId" clId="{0389F522-8E0A-4582-B847-05731A668B5C}" dt="2026-10-05T15:42:42.689" v="255" actId="20577"/>
+        <pc:sldMkLst>
+          <pc:docMk/>
+          <pc:sldMk cId="0" sldId="257"/>
+        </pc:sldMkLst>
+        <pc:spChg chg="mod">
+          <ac:chgData name="Abubakar Olafusi" userId="eee36072894731d4" providerId="LiveId" clId="{0389F522-8E0A-4582-B847-05731A668B5C}" dt="2026-10-05T15:42:33.719" v="245" actId="20577"/>
+          <ac:spMkLst>
+            <pc:docMk/>
+            <pc:sldMk cId="0" sldId="257"/>
+            <ac:spMk id="17" creationId="{00000000-0000-0000-0000-000000000000}"/>
+          </ac:spMkLst>
+        </pc:spChg>
+        <pc:spChg chg="mod">
+          <ac:chgData name="Abubakar Olafusi" userId="eee36072894731d4" providerId="LiveId" clId="{0389F522-8E0A-4582-B847-05731A668B5C}" dt="2026-10-05T15:42:38.586" v="251" actId="20577"/>
+          <ac:spMkLst>
+            <pc:docMk/>
+            <pc:sldMk cId="0" sldId="257"/>
+            <ac:spMk id="21" creationId="{00000000-0000-0000-0000-000000000000}"/>
+          </ac:spMkLst>
+        </pc:spChg>
+        <pc:spChg chg="mod">
+          <ac:chgData name="Abubakar Olafusi" userId="eee36072894731d4" providerId="LiveId" clId="{0389F522-8E0A-4582-B847-05731A668B5C}" dt="2026-10-05T15:42:42.689" v="255" actId="20577"/>
+          <ac:spMkLst>
+            <pc:docMk/>
+            <pc:sldMk cId="0" sldId="257"/>
+            <ac:spMk id="42" creationId="{00000000-0000-0000-0000-000000000000}"/>
+          </ac:spMkLst>
+        </pc:spChg>
+      </pc:sldChg>
+      <pc:sldChg chg="modSp">
+        <pc:chgData name="Abubakar Olafusi" userId="eee36072894731d4" providerId="LiveId" clId="{0389F522-8E0A-4582-B847-05731A668B5C}" dt="2026-10-05T15:34:47.752" v="10"/>
+        <pc:sldMkLst>
+          <pc:docMk/>
+          <pc:sldMk cId="0" sldId="258"/>
+        </pc:sldMkLst>
+        <pc:spChg chg="mod">
+          <ac:chgData name="Abubakar Olafusi" userId="eee36072894731d4" providerId="LiveId" clId="{0389F522-8E0A-4582-B847-05731A668B5C}" dt="2026-10-05T15:34:41.979" v="9"/>
+          <ac:spMkLst>
+            <pc:docMk/>
+            <pc:sldMk cId="0" sldId="258"/>
+            <ac:spMk id="3" creationId="{00000000-0000-0000-0000-000000000000}"/>
+          </ac:spMkLst>
+        </pc:spChg>
+        <pc:spChg chg="mod">
+          <ac:chgData name="Abubakar Olafusi" userId="eee36072894731d4" providerId="LiveId" clId="{0389F522-8E0A-4582-B847-05731A668B5C}" dt="2026-10-05T15:34:47.752" v="10"/>
+          <ac:spMkLst>
+            <pc:docMk/>
+            <pc:sldMk cId="0" sldId="258"/>
+            <ac:spMk id="4" creationId="{00000000-0000-0000-0000-000000000000}"/>
+          </ac:spMkLst>
+        </pc:spChg>
+      </pc:sldChg>
+      <pc:sldChg chg="del">
+        <pc:chgData name="Abubakar Olafusi" userId="eee36072894731d4" providerId="LiveId" clId="{0389F522-8E0A-4582-B847-05731A668B5C}" dt="2026-10-05T15:35:03.610" v="11" actId="47"/>
+        <pc:sldMkLst>
+          <pc:docMk/>
+          <pc:sldMk cId="0" sldId="259"/>
+        </pc:sldMkLst>
+      </pc:sldChg>
+      <pc:sldChg chg="addSp delSp modSp mod">
+        <pc:chgData name="Abubakar Olafusi" userId="eee36072894731d4" providerId="LiveId" clId="{0389F522-8E0A-4582-B847-05731A668B5C}" dt="2026-10-05T15:41:42.861" v="237" actId="207"/>
+        <pc:sldMkLst>
+          <pc:docMk/>
+          <pc:sldMk cId="0" sldId="264"/>
+        </pc:sldMkLst>
+        <pc:spChg chg="mod">
+          <ac:chgData name="Abubakar Olafusi" userId="eee36072894731d4" providerId="LiveId" clId="{0389F522-8E0A-4582-B847-05731A668B5C}" dt="2026-10-05T15:39:37.002" v="174" actId="1035"/>
+          <ac:spMkLst>
+            <pc:docMk/>
+            <pc:sldMk cId="0" sldId="264"/>
+            <ac:spMk id="5" creationId="{00000000-0000-0000-0000-000000000000}"/>
+          </ac:spMkLst>
+        </pc:spChg>
+        <pc:spChg chg="del">
+          <ac:chgData name="Abubakar Olafusi" userId="eee36072894731d4" providerId="LiveId" clId="{0389F522-8E0A-4582-B847-05731A668B5C}" dt="2026-10-05T15:38:47.291" v="70" actId="478"/>
+          <ac:spMkLst>
+            <pc:docMk/>
+            <pc:sldMk cId="0" sldId="264"/>
+            <ac:spMk id="6" creationId="{00000000-0000-0000-0000-000000000000}"/>
+          </ac:spMkLst>
+        </pc:spChg>
+        <pc:spChg chg="del">
+          <ac:chgData name="Abubakar Olafusi" userId="eee36072894731d4" providerId="LiveId" clId="{0389F522-8E0A-4582-B847-05731A668B5C}" dt="2026-10-05T15:38:45.951" v="69" actId="478"/>
+          <ac:spMkLst>
+            <pc:docMk/>
+            <pc:sldMk cId="0" sldId="264"/>
+            <ac:spMk id="7" creationId="{00000000-0000-0000-0000-000000000000}"/>
+          </ac:spMkLst>
+        </pc:spChg>
+        <pc:spChg chg="mod">
+          <ac:chgData name="Abubakar Olafusi" userId="eee36072894731d4" providerId="LiveId" clId="{0389F522-8E0A-4582-B847-05731A668B5C}" dt="2026-10-05T15:38:53.684" v="71" actId="1076"/>
+          <ac:spMkLst>
+            <pc:docMk/>
+            <pc:sldMk cId="0" sldId="264"/>
+            <ac:spMk id="8" creationId="{00000000-0000-0000-0000-000000000000}"/>
+          </ac:spMkLst>
+        </pc:spChg>
+        <pc:spChg chg="mod">
+          <ac:chgData name="Abubakar Olafusi" userId="eee36072894731d4" providerId="LiveId" clId="{0389F522-8E0A-4582-B847-05731A668B5C}" dt="2026-10-05T15:39:43.577" v="220" actId="1036"/>
+          <ac:spMkLst>
+            <pc:docMk/>
+            <pc:sldMk cId="0" sldId="264"/>
+            <ac:spMk id="9" creationId="{00000000-0000-0000-0000-000000000000}"/>
+          </ac:spMkLst>
+        </pc:spChg>
+        <pc:spChg chg="add del mod">
+          <ac:chgData name="Abubakar Olafusi" userId="eee36072894731d4" providerId="LiveId" clId="{0389F522-8E0A-4582-B847-05731A668B5C}" dt="2026-10-05T15:41:42.861" v="237" actId="207"/>
+          <ac:spMkLst>
+            <pc:docMk/>
+            <pc:sldMk cId="0" sldId="264"/>
+            <ac:spMk id="10" creationId="{00000000-0000-0000-0000-000000000000}"/>
+          </ac:spMkLst>
+        </pc:spChg>
+        <pc:spChg chg="mod">
+          <ac:chgData name="Abubakar Olafusi" userId="eee36072894731d4" providerId="LiveId" clId="{0389F522-8E0A-4582-B847-05731A668B5C}" dt="2026-10-05T15:39:43.577" v="220" actId="1036"/>
+          <ac:spMkLst>
+            <pc:docMk/>
+            <pc:sldMk cId="0" sldId="264"/>
+            <ac:spMk id="11" creationId="{00000000-0000-0000-0000-000000000000}"/>
+          </ac:spMkLst>
+        </pc:spChg>
+        <pc:spChg chg="mod">
+          <ac:chgData name="Abubakar Olafusi" userId="eee36072894731d4" providerId="LiveId" clId="{0389F522-8E0A-4582-B847-05731A668B5C}" dt="2026-10-05T15:40:10.218" v="222" actId="207"/>
+          <ac:spMkLst>
+            <pc:docMk/>
+            <pc:sldMk cId="0" sldId="264"/>
+            <ac:spMk id="12" creationId="{00000000-0000-0000-0000-000000000000}"/>
+          </ac:spMkLst>
+        </pc:spChg>
+        <pc:spChg chg="mod">
+          <ac:chgData name="Abubakar Olafusi" userId="eee36072894731d4" providerId="LiveId" clId="{0389F522-8E0A-4582-B847-05731A668B5C}" dt="2026-10-05T15:39:43.577" v="220" actId="1036"/>
+          <ac:spMkLst>
+            <pc:docMk/>
+            <pc:sldMk cId="0" sldId="264"/>
+            <ac:spMk id="13" creationId="{00000000-0000-0000-0000-000000000000}"/>
+          </ac:spMkLst>
+        </pc:spChg>
+        <pc:spChg chg="mod">
+          <ac:chgData name="Abubakar Olafusi" userId="eee36072894731d4" providerId="LiveId" clId="{0389F522-8E0A-4582-B847-05731A668B5C}" dt="2026-10-05T15:40:05.377" v="221" actId="207"/>
+          <ac:spMkLst>
+            <pc:docMk/>
+            <pc:sldMk cId="0" sldId="264"/>
+            <ac:spMk id="14" creationId="{00000000-0000-0000-0000-000000000000}"/>
+          </ac:spMkLst>
+        </pc:spChg>
+        <pc:spChg chg="mod">
+          <ac:chgData name="Abubakar Olafusi" userId="eee36072894731d4" providerId="LiveId" clId="{0389F522-8E0A-4582-B847-05731A668B5C}" dt="2026-10-05T15:39:43.577" v="220" actId="1036"/>
+          <ac:spMkLst>
+            <pc:docMk/>
+            <pc:sldMk cId="0" sldId="264"/>
+            <ac:spMk id="15" creationId="{00000000-0000-0000-0000-000000000000}"/>
+          </ac:spMkLst>
+        </pc:spChg>
+        <pc:spChg chg="mod">
+          <ac:chgData name="Abubakar Olafusi" userId="eee36072894731d4" providerId="LiveId" clId="{0389F522-8E0A-4582-B847-05731A668B5C}" dt="2026-10-05T15:41:12.160" v="232" actId="1076"/>
+          <ac:spMkLst>
+            <pc:docMk/>
+            <pc:sldMk cId="0" sldId="264"/>
+            <ac:spMk id="18" creationId="{00000000-0000-0000-0000-000000000000}"/>
+          </ac:spMkLst>
+        </pc:spChg>
+        <pc:spChg chg="add del mod">
+          <ac:chgData name="Abubakar Olafusi" userId="eee36072894731d4" providerId="LiveId" clId="{0389F522-8E0A-4582-B847-05731A668B5C}" dt="2026-10-05T15:41:11.777" v="231" actId="1076"/>
+          <ac:spMkLst>
+            <pc:docMk/>
+            <pc:sldMk cId="0" sldId="264"/>
+            <ac:spMk id="23" creationId="{00000000-0000-0000-0000-000000000000}"/>
+          </ac:spMkLst>
+        </pc:spChg>
+        <pc:spChg chg="add mod">
+          <ac:chgData name="Abubakar Olafusi" userId="eee36072894731d4" providerId="LiveId" clId="{0389F522-8E0A-4582-B847-05731A668B5C}" dt="2026-10-05T15:39:00.743" v="73" actId="571"/>
+          <ac:spMkLst>
+            <pc:docMk/>
+            <pc:sldMk cId="0" sldId="264"/>
+            <ac:spMk id="33" creationId="{30727FC1-2796-454F-EB4B-B047F13F1298}"/>
+          </ac:spMkLst>
+        </pc:spChg>
+      </pc:sldChg>
+      <pc:sldChg chg="modSp mod">
+        <pc:chgData name="Abubakar Olafusi" userId="eee36072894731d4" providerId="LiveId" clId="{0389F522-8E0A-4582-B847-05731A668B5C}" dt="2026-10-05T15:37:33.318" v="68" actId="20577"/>
+        <pc:sldMkLst>
+          <pc:docMk/>
+          <pc:sldMk cId="0" sldId="265"/>
+        </pc:sldMkLst>
+        <pc:spChg chg="mod">
+          <ac:chgData name="Abubakar Olafusi" userId="eee36072894731d4" providerId="LiveId" clId="{0389F522-8E0A-4582-B847-05731A668B5C}" dt="2026-10-05T15:37:33.318" v="68" actId="20577"/>
+          <ac:spMkLst>
+            <pc:docMk/>
+            <pc:sldMk cId="0" sldId="265"/>
+            <ac:spMk id="4" creationId="{00000000-0000-0000-0000-000000000000}"/>
+          </ac:spMkLst>
+        </pc:spChg>
+      </pc:sldChg>
+    </pc:docChg>
+  </pc:docChgLst>
+</pc:chgInfo>
 </file>
 
-<file path=ppt/charts/chart3.xml><?xml version="1.0" encoding="utf-8"?>
+<file path=ppt/charts/chart1.xml><?xml version="1.0" encoding="utf-8"?>
 <c:chartSpace xmlns:c="http://schemas.openxmlformats.org/drawingml/2006/chart" xmlns:a="http://schemas.openxmlformats.org/drawingml/2006/main" xmlns:r="http://schemas.openxmlformats.org/officeDocument/2006/relationships" xmlns:c16r2="http://schemas.microsoft.com/office/drawing/2015/06/chart">
   <c:date1904 val="0"/>
   <c:lang val="en-US"/>
@@ -1798,93 +1111,6 @@
 </p:notes>
 </file>
 
-<file path=ppt/notesSlides/notesSlide10.xml><?xml version="1.0" encoding="utf-8"?>
-<p:notes xmlns:a="http://schemas.openxmlformats.org/drawingml/2006/main" xmlns:r="http://schemas.openxmlformats.org/officeDocument/2006/relationships" xmlns:p="http://schemas.openxmlformats.org/presentationml/2006/main">
-  <p:cSld>
-    <p:spTree>
-      <p:nvGrpSpPr>
-        <p:cNvPr id="1" name=""/>
-        <p:cNvGrpSpPr/>
-        <p:nvPr/>
-      </p:nvGrpSpPr>
-      <p:grpSpPr>
-        <a:xfrm>
-          <a:off x="0" y="0"/>
-          <a:ext cx="0" cy="0"/>
-          <a:chOff x="0" y="0"/>
-          <a:chExt cx="0" cy="0"/>
-        </a:xfrm>
-      </p:grpSpPr>
-      <p:sp>
-        <p:nvSpPr>
-          <p:cNvPr id="2" name="Slide Image Placeholder 1"/>
-          <p:cNvSpPr>
-            <a:spLocks noGrp="1" noRot="1" noChangeAspect="1"/>
-          </p:cNvSpPr>
-          <p:nvPr>
-            <p:ph type="sldImg"/>
-          </p:nvPr>
-        </p:nvSpPr>
-        <p:spPr/>
-      </p:sp>
-      <p:sp>
-        <p:nvSpPr>
-          <p:cNvPr id="3" name="Notes Placeholder 2"/>
-          <p:cNvSpPr>
-            <a:spLocks noGrp="1"/>
-          </p:cNvSpPr>
-          <p:nvPr>
-            <p:ph type="body" idx="1"/>
-          </p:nvPr>
-        </p:nvSpPr>
-        <p:spPr/>
-        <p:txBody>
-          <a:bodyPr/>
-          <a:lstStyle/>
-          <a:p>
-            <a:r>
-              <a:rPr lang="en-US" dirty="0"/>
-              <a:t>Thank you. These are the joint next actions from the Next steps view of the dashboard, with owners and dates, so everyone leaves with the same list. Open the floor for questions.</a:t>
-            </a:r>
-          </a:p>
-        </p:txBody>
-      </p:sp>
-      <p:sp>
-        <p:nvSpPr>
-          <p:cNvPr id="4" name="Slide Number Placeholder 3"/>
-          <p:cNvSpPr>
-            <a:spLocks noGrp="1"/>
-          </p:cNvSpPr>
-          <p:nvPr>
-            <p:ph type="sldNum" sz="quarter" idx="10"/>
-          </p:nvPr>
-        </p:nvSpPr>
-        <p:spPr/>
-        <p:txBody>
-          <a:bodyPr/>
-          <a:lstStyle/>
-          <a:p>
-            <a:fld id="{F7021451-1387-4CA6-816F-3879F97B5CBC}" type="slidenum">
-              <a:rPr lang="en-US"/>
-              <a:t>10</a:t>
-            </a:fld>
-            <a:endParaRPr lang="en-US"/>
-          </a:p>
-        </p:txBody>
-      </p:sp>
-    </p:spTree>
-    <p:extLst>
-      <p:ext uri="{BB962C8B-B14F-4D97-AF65-F5344CB8AC3E}">
-        <p14:creationId xmlns:p14="http://schemas.microsoft.com/office/powerpoint/2010/main" val="1024086991"/>
-      </p:ext>
-    </p:extLst>
-  </p:cSld>
-  <p:clrMapOvr>
-    <a:masterClrMapping/>
-  </p:clrMapOvr>
-</p:notes>
-</file>
-
 <file path=ppt/notesSlides/notesSlide2.xml><?xml version="1.0" encoding="utf-8"?>
 <p:notes xmlns:a="http://schemas.openxmlformats.org/drawingml/2006/main" xmlns:r="http://schemas.openxmlformats.org/officeDocument/2006/relationships" xmlns:p="http://schemas.openxmlformats.org/presentationml/2006/main">
   <p:cSld>
@@ -2105,7 +1331,7 @@
           <a:p>
             <a:r>
               <a:rPr lang="en-US" dirty="0"/>
-              <a:t>Quality moved one way all month: grounded answers 92.2% to 96.0%, eval pass 91.4% to 94.8%, and escalations down 2.7 points. The knowledge refresh on 24 Aug, the purple marker, is where grounding steps up. Automation climbed steadily from 65.8% to 70.1% with no plateau yet, and automated tickets grew faster than total tickets, so more of the work is being handed to the model. One thing to review together: requests per ticket rose from 4.6 to 6.2.</a:t>
+              <a:t>Be precise about what we know. Availability averaged 99.85% and met 99.9% on only 4 of 31 days, so this is not just the two incident days. At 19,000 to 31,000 requests a day Atlas is unlikely to sit idle at zero for long, so we should not assume cold starts are the cause. The next step is the deployment telemetry: scale-up events and error codes by hour. Meanwhile we retune scale-up thresholds and pre-warm before planned promotions. Always-on capacity for Atlas alone would be about $5,800 a month, $8,800 with EU-only placement; we would only recommend it if the telemetry shows scale-up is driving the misses. On the shared deployment the same capacity is about $1,200 to $1,800 per brand.</a:t>
             </a:r>
           </a:p>
         </p:txBody>
@@ -2192,7 +1418,7 @@
           <a:p>
             <a:r>
               <a:rPr lang="en-US" dirty="0"/>
-              <a:t>Be precise about what we know. Availability averaged 99.85% and met 99.9% on only 4 of 31 days, so this is not just the two incident days. At 19,000 to 31,000 requests a day Atlas is unlikely to sit idle at zero for long, so we should not assume cold starts are the cause. The next step is the deployment telemetry: scale-up events and error codes by hour. Meanwhile we retune scale-up thresholds and pre-warm before planned promotions. Always-on capacity for Atlas alone would be about $5,800 a month, $8,800 with EU-only placement; we would only recommend it if the telemetry shows scale-up is driving the misses. On the shared deployment the same capacity is about $1,200 to $1,800 per brand.</a:t>
+              <a:t>The architecture: one open-weight base model on a shared deployment, one adapter per brand for tone, workflow and policy-following behaviour, and a separate knowledge index and system prompt per brand. Policy facts such as return windows live in the index, not the weights, so they can change without retraining. Atlas’s adapter moves over unchanged. Halden, the largest brand, can move to its own deployment once its volume keeps capacity busy. Why not reuse Atlas with a new prompt: its tone and policy-handling habits are learned and would leak. Why not five separate models: five deployments to run and retrain, and the smaller brands don’t have enough transcripts.</a:t>
             </a:r>
           </a:p>
         </p:txBody>
@@ -2279,7 +1505,7 @@
           <a:p>
             <a:r>
               <a:rPr lang="en-US" dirty="0"/>
-              <a:t>The architecture: one open-weight base model on a shared deployment, one adapter per brand for tone, workflow and policy-following behaviour, and a separate knowledge index and system prompt per brand. Policy facts such as return windows live in the index, not the weights, so they can change without retraining. Atlas’s adapter moves over unchanged. Halden, the largest brand, can move to its own deployment once its volume keeps capacity busy. Why not reuse Atlas with a new prompt: its tone and policy-handling habits are learned and would leak. Why not five separate models: five deployments to run and retrain, and the smaller brands don’t have enough transcripts.</a:t>
+              <a:t>The pilot gives the cheapest option a fair test. Arm A uses no brand-specific training; if it clears every criterion, we skip the adapter. Arm B adds a Ridgeline adapter. Both run for four weeks against criteria we agree today. We also capture Ridgeline’s baselines before launch, so the uplift is measured directly rather than relying on supplied figures.</a:t>
             </a:r>
           </a:p>
         </p:txBody>
@@ -2366,7 +1592,7 @@
           <a:p>
             <a:r>
               <a:rPr lang="en-US" dirty="0"/>
-              <a:t>The pilot gives the cheapest option a fair test. Arm A uses no brand-specific training; if it clears every criterion, we skip the adapter. Arm B adds a Ridgeline adapter. Both run for four weeks against criteria we agree today. We also capture Ridgeline’s baselines before launch, so the uplift is measured directly rather than relying on supplied figures.</a:t>
+              <a:t>Sequence: agree the sponsor and dependencies this month, stand up the shared deployment and prove Atlas parity in November, run the Ridgeline pilot through December, read out in January, then Halden and Polar in Q1 and Harbour &amp; Hide in Q2. Budget: the shared deployment is billed as dedicated capacity, about $5,800 a month for one replica, $8,800 with EU-only placement; training cost is immaterial. The number of replicas is sized from a load benchmark before we commit. The overlap while Atlas moves is budgeted in weeks.</a:t>
             </a:r>
           </a:p>
         </p:txBody>
@@ -2453,7 +1679,7 @@
           <a:p>
             <a:r>
               <a:rPr lang="en-US" dirty="0"/>
-              <a:t>Sequence: agree the sponsor and dependencies this month, stand up the shared deployment and prove Atlas parity in November, run the Ridgeline pilot through December, read out in January, then Halden and Polar in Q1 and Harbour &amp; Hide in Q2. Budget: the shared deployment is billed as dedicated capacity, about $5,800 a month for one replica, $8,800 with EU-only placement; training cost is immaterial. The number of replicas is sized from a load benchmark before we commit. The overlap while Atlas moves is budgeted in weeks.</a:t>
+              <a:t>Close on the one risk that matters. The platform worked in month one; the risk is that nobody above brand level owns the rollout, so it stays with Atlas. If that happens, always-on capacity stays a single-brand cost, the sister brands, which carry most of the Tier-1 volume, don’t get the gains, and each brand makes its own tooling decision. The mitigation is three concrete asks: a named group sponsor at this review, the Ridgeline criteria agreed together, and shared capacity sized alongside a second brand from a load benchmark, never for Atlas alone.</a:t>
             </a:r>
           </a:p>
         </p:txBody>
@@ -2540,7 +1766,7 @@
           <a:p>
             <a:r>
               <a:rPr lang="en-US" dirty="0"/>
-              <a:t>Close on the one risk that matters. The platform worked in month one; the risk is that nobody above brand level owns the rollout, so it stays with Atlas. If that happens, always-on capacity stays a single-brand cost, the sister brands, which carry most of the Tier-1 volume, don’t get the gains, and each brand makes its own tooling decision. The mitigation is three concrete asks: a named group sponsor at this review, the Ridgeline criteria agreed together, and shared capacity sized alongside a second brand from a load benchmark, never for Atlas alone.</a:t>
+              <a:t>Thank you. These are the joint next actions from the Next steps view of the dashboard, with owners and dates, so everyone leaves with the same list. Open the floor for questions.</a:t>
             </a:r>
           </a:p>
         </p:txBody>
@@ -2943,7 +2169,7 @@
           </a:prstGeom>
           <a:extLst>
             <a:ext uri="{C572A759-6A51-4108-AA02-DFA0A04FC94B}">
-              <ma14:wrappingTextBoxFlag xmlns:ma14="http://schemas.microsoft.com/office/mac/drawingml/2011/main" xmlns="" val="0"/>
+              <ma14:wrappingTextBoxFlag xmlns="" xmlns:ma14="http://schemas.microsoft.com/office/mac/drawingml/2011/main" val="0"/>
             </a:ext>
           </a:extLst>
         </p:spPr>
@@ -3026,6 +2252,13 @@
             <a:prstDash val="solid"/>
           </a:ln>
         </p:spPr>
+        <p:txBody>
+          <a:bodyPr/>
+          <a:lstStyle/>
+          <a:p>
+            <a:endParaRPr lang="en-GB"/>
+          </a:p>
+        </p:txBody>
       </p:sp>
       <p:sp>
         <p:nvSpPr>
@@ -3049,6 +2282,13 @@
             <a:prstDash val="solid"/>
           </a:ln>
         </p:spPr>
+        <p:txBody>
+          <a:bodyPr/>
+          <a:lstStyle/>
+          <a:p>
+            <a:endParaRPr lang="en-GB"/>
+          </a:p>
+        </p:txBody>
       </p:sp>
     </p:spTree>
   </p:cSld>
@@ -3288,7 +2528,7 @@
           </a:prstGeom>
           <a:extLst>
             <a:ext uri="{C572A759-6A51-4108-AA02-DFA0A04FC94B}">
-              <ma14:wrappingTextBoxFlag xmlns:ma14="http://schemas.microsoft.com/office/mac/drawingml/2011/main" xmlns="" val="0"/>
+              <ma14:wrappingTextBoxFlag xmlns="" xmlns:ma14="http://schemas.microsoft.com/office/mac/drawingml/2011/main" val="0"/>
             </a:ext>
           </a:extLst>
         </p:spPr>
@@ -3668,7 +2908,7 @@
         <p:spPr>
           <a:xfrm>
             <a:off x="731520" y="2670048"/>
-            <a:ext cx="5394960" cy="1325880"/>
+            <a:ext cx="5394960" cy="731519"/>
           </a:xfrm>
           <a:prstGeom prst="rect">
             <a:avLst/>
@@ -3699,26 +2939,6 @@
             </a:r>
             <a:endParaRPr lang="en-US" sz="4000" dirty="0"/>
           </a:p>
-          <a:p>
-            <a:pPr marL="0" indent="0">
-              <a:lnSpc>
-                <a:spcPct val="95000"/>
-              </a:lnSpc>
-              <a:buNone/>
-            </a:pPr>
-            <a:r>
-              <a:rPr lang="en-US" sz="4000" kern="0" spc="-160" dirty="0">
-                <a:solidFill>
-                  <a:srgbClr val="16181D"/>
-                </a:solidFill>
-                <a:latin typeface="Inter Medium" pitchFamily="34" charset="0"/>
-                <a:ea typeface="Inter Medium" pitchFamily="34" charset="-122"/>
-                <a:cs typeface="Inter Medium" pitchFamily="34" charset="-120"/>
-              </a:rPr>
-              <a:t>— Atlas</a:t>
-            </a:r>
-            <a:endParaRPr lang="en-US" sz="4000" dirty="0"/>
-          </a:p>
         </p:txBody>
       </p:sp>
       <p:sp>
@@ -3729,7 +2949,7 @@
         </p:nvSpPr>
         <p:spPr>
           <a:xfrm>
-            <a:off x="731520" y="4114800"/>
+            <a:off x="731520" y="3451860"/>
             <a:ext cx="5029200" cy="731520"/>
           </a:xfrm>
           <a:prstGeom prst="rect">
@@ -3786,6 +3006,13 @@
             <a:prstDash val="solid"/>
           </a:ln>
         </p:spPr>
+        <p:txBody>
+          <a:bodyPr/>
+          <a:lstStyle/>
+          <a:p>
+            <a:endParaRPr lang="en-GB"/>
+          </a:p>
+        </p:txBody>
       </p:sp>
       <p:sp>
         <p:nvSpPr>
@@ -3845,6 +3072,13 @@
           </a:solidFill>
           <a:ln/>
         </p:spPr>
+        <p:txBody>
+          <a:bodyPr/>
+          <a:lstStyle/>
+          <a:p>
+            <a:endParaRPr lang="en-GB"/>
+          </a:p>
+        </p:txBody>
       </p:sp>
       <p:sp>
         <p:nvSpPr>
@@ -3907,6 +3141,13 @@
             <a:prstDash val="solid"/>
           </a:ln>
         </p:spPr>
+        <p:txBody>
+          <a:bodyPr/>
+          <a:lstStyle/>
+          <a:p>
+            <a:endParaRPr lang="en-GB"/>
+          </a:p>
+        </p:txBody>
       </p:sp>
       <p:sp>
         <p:nvSpPr>
@@ -3927,6 +3168,13 @@
           </a:solidFill>
           <a:ln/>
         </p:spPr>
+        <p:txBody>
+          <a:bodyPr/>
+          <a:lstStyle/>
+          <a:p>
+            <a:endParaRPr lang="en-GB"/>
+          </a:p>
+        </p:txBody>
       </p:sp>
       <p:sp>
         <p:nvSpPr>
@@ -3989,6 +3237,13 @@
             <a:prstDash val="solid"/>
           </a:ln>
         </p:spPr>
+        <p:txBody>
+          <a:bodyPr/>
+          <a:lstStyle/>
+          <a:p>
+            <a:endParaRPr lang="en-GB"/>
+          </a:p>
+        </p:txBody>
       </p:sp>
       <p:sp>
         <p:nvSpPr>
@@ -4009,6 +3264,13 @@
           </a:solidFill>
           <a:ln/>
         </p:spPr>
+        <p:txBody>
+          <a:bodyPr/>
+          <a:lstStyle/>
+          <a:p>
+            <a:endParaRPr lang="en-GB"/>
+          </a:p>
+        </p:txBody>
       </p:sp>
       <p:sp>
         <p:nvSpPr>
@@ -4071,6 +3333,13 @@
             <a:prstDash val="solid"/>
           </a:ln>
         </p:spPr>
+        <p:txBody>
+          <a:bodyPr/>
+          <a:lstStyle/>
+          <a:p>
+            <a:endParaRPr lang="en-GB"/>
+          </a:p>
+        </p:txBody>
       </p:sp>
       <p:sp>
         <p:nvSpPr>
@@ -4091,6 +3360,13 @@
           </a:solidFill>
           <a:ln/>
         </p:spPr>
+        <p:txBody>
+          <a:bodyPr/>
+          <a:lstStyle/>
+          <a:p>
+            <a:endParaRPr lang="en-GB"/>
+          </a:p>
+        </p:txBody>
       </p:sp>
       <p:sp>
         <p:nvSpPr>
@@ -4153,6 +3429,13 @@
             <a:prstDash val="solid"/>
           </a:ln>
         </p:spPr>
+        <p:txBody>
+          <a:bodyPr/>
+          <a:lstStyle/>
+          <a:p>
+            <a:endParaRPr lang="en-GB"/>
+          </a:p>
+        </p:txBody>
       </p:sp>
       <p:sp>
         <p:nvSpPr>
@@ -4173,6 +3456,13 @@
           </a:solidFill>
           <a:ln/>
         </p:spPr>
+        <p:txBody>
+          <a:bodyPr/>
+          <a:lstStyle/>
+          <a:p>
+            <a:endParaRPr lang="en-GB"/>
+          </a:p>
+        </p:txBody>
       </p:sp>
       <p:sp>
         <p:nvSpPr>
@@ -4235,16 +3525,23 @@
             <a:prstDash val="solid"/>
           </a:ln>
         </p:spPr>
-      </p:sp>
-      <p:sp>
-        <p:nvSpPr>
-          <p:cNvPr id="23" name="Text 20"/>
-          <p:cNvSpPr txBox="1"/>
-          <p:nvPr/>
-        </p:nvSpPr>
-        <p:spPr>
-          <a:xfrm>
-            <a:off x="731520" y="5925312"/>
+        <p:txBody>
+          <a:bodyPr/>
+          <a:lstStyle/>
+          <a:p>
+            <a:endParaRPr lang="en-GB"/>
+          </a:p>
+        </p:txBody>
+      </p:sp>
+      <p:sp>
+        <p:nvSpPr>
+          <p:cNvPr id="24" name="Text 21"/>
+          <p:cNvSpPr txBox="1"/>
+          <p:nvPr/>
+        </p:nvSpPr>
+        <p:spPr>
+          <a:xfrm>
+            <a:off x="5973775" y="5925312"/>
             <a:ext cx="5486400" cy="274320"/>
           </a:xfrm>
           <a:prstGeom prst="rect">
@@ -4257,7 +3554,7 @@
           <a:bodyPr wrap="square" lIns="0" tIns="0" rIns="0" bIns="0" rtlCol="0" anchor="t"/>
           <a:lstStyle/>
           <a:p>
-            <a:pPr marL="0" indent="0">
+            <a:pPr marL="0" indent="0" algn="r">
               <a:buNone/>
             </a:pPr>
             <a:r>
@@ -4269,1565 +3566,11 @@
                 <a:ea typeface="Inter" pitchFamily="34" charset="-122"/>
                 <a:cs typeface="Inter" pitchFamily="34" charset="-120"/>
               </a:rPr>
-              <a:t>Model ID: </a:t>
-            </a:r>
-            <a:r>
-              <a:rPr lang="en-US" sz="1100" dirty="0">
-                <a:solidFill>
-                  <a:srgbClr val="5A5E63"/>
-                </a:solidFill>
-                <a:latin typeface="Consolas" pitchFamily="34" charset="0"/>
-                <a:ea typeface="Consolas" pitchFamily="34" charset="-122"/>
-                <a:cs typeface="Consolas" pitchFamily="34" charset="-120"/>
-              </a:rPr>
-              <a:t>northstar-atlas-support-ft-v1</a:t>
+              <a:t>October 2026</a:t>
             </a:r>
             <a:endParaRPr lang="en-US" sz="1100" dirty="0"/>
           </a:p>
         </p:txBody>
-      </p:sp>
-      <p:sp>
-        <p:nvSpPr>
-          <p:cNvPr id="24" name="Text 21"/>
-          <p:cNvSpPr txBox="1"/>
-          <p:nvPr/>
-        </p:nvSpPr>
-        <p:spPr>
-          <a:xfrm>
-            <a:off x="5973775" y="5925312"/>
-            <a:ext cx="5486400" cy="274320"/>
-          </a:xfrm>
-          <a:prstGeom prst="rect">
-            <a:avLst/>
-          </a:prstGeom>
-          <a:noFill/>
-          <a:ln/>
-        </p:spPr>
-        <p:txBody>
-          <a:bodyPr wrap="square" lIns="0" tIns="0" rIns="0" bIns="0" rtlCol="0" anchor="t"/>
-          <a:lstStyle/>
-          <a:p>
-            <a:pPr marL="0" indent="0" algn="r">
-              <a:buNone/>
-            </a:pPr>
-            <a:r>
-              <a:rPr lang="en-US" sz="1100" dirty="0">
-                <a:solidFill>
-                  <a:srgbClr val="5A5E63"/>
-                </a:solidFill>
-                <a:latin typeface="Inter" pitchFamily="34" charset="0"/>
-                <a:ea typeface="Inter" pitchFamily="34" charset="-122"/>
-                <a:cs typeface="Inter" pitchFamily="34" charset="-120"/>
-              </a:rPr>
-              <a:t>Aug 1 – Aug 31, 2026 · Reviewed October 2026</a:t>
-            </a:r>
-            <a:endParaRPr lang="en-US" sz="1100" dirty="0"/>
-          </a:p>
-        </p:txBody>
-      </p:sp>
-    </p:spTree>
-  </p:cSld>
-  <p:clrMapOvr>
-    <a:masterClrMapping/>
-  </p:clrMapOvr>
-</p:sld>
-</file>
-
-<file path=ppt/slides/slide10.xml><?xml version="1.0" encoding="utf-8"?>
-<p:sld xmlns:a="http://schemas.openxmlformats.org/drawingml/2006/main" xmlns:r="http://schemas.openxmlformats.org/officeDocument/2006/relationships" xmlns:p="http://schemas.openxmlformats.org/presentationml/2006/main">
-  <p:cSld name="Slide 10">
-    <p:spTree>
-      <p:nvGrpSpPr>
-        <p:cNvPr id="1" name=""/>
-        <p:cNvGrpSpPr/>
-        <p:nvPr/>
-      </p:nvGrpSpPr>
-      <p:grpSpPr>
-        <a:xfrm>
-          <a:off x="0" y="0"/>
-          <a:ext cx="0" cy="0"/>
-          <a:chOff x="0" y="0"/>
-          <a:chExt cx="0" cy="0"/>
-        </a:xfrm>
-      </p:grpSpPr>
-      <p:sp>
-        <p:nvSpPr>
-          <p:cNvPr id="2" name="Text 0"/>
-          <p:cNvSpPr txBox="1"/>
-          <p:nvPr/>
-        </p:nvSpPr>
-        <p:spPr>
-          <a:xfrm>
-            <a:off x="2881191" y="219456"/>
-            <a:ext cx="3200400" cy="274320"/>
-          </a:xfrm>
-          <a:prstGeom prst="rect">
-            <a:avLst/>
-          </a:prstGeom>
-          <a:noFill/>
-          <a:ln/>
-        </p:spPr>
-        <p:txBody>
-          <a:bodyPr wrap="square" lIns="0" tIns="0" rIns="0" bIns="0" rtlCol="0" anchor="ctr"/>
-          <a:lstStyle/>
-          <a:p>
-            <a:pPr marL="0" indent="0">
-              <a:buNone/>
-            </a:pPr>
-            <a:r>
-              <a:rPr lang="en-US" sz="1100" dirty="0">
-                <a:solidFill>
-                  <a:srgbClr val="16181D"/>
-                </a:solidFill>
-                <a:latin typeface="Inter Medium" pitchFamily="34" charset="0"/>
-                <a:ea typeface="Inter Medium" pitchFamily="34" charset="-122"/>
-                <a:cs typeface="Inter Medium" pitchFamily="34" charset="-120"/>
-              </a:rPr>
-              <a:t>Next steps</a:t>
-            </a:r>
-            <a:endParaRPr lang="en-US" sz="1100" dirty="0"/>
-          </a:p>
-        </p:txBody>
-      </p:sp>
-      <p:sp>
-        <p:nvSpPr>
-          <p:cNvPr id="3" name="Text 1"/>
-          <p:cNvSpPr txBox="1"/>
-          <p:nvPr/>
-        </p:nvSpPr>
-        <p:spPr>
-          <a:xfrm>
-            <a:off x="731520" y="1371600"/>
-            <a:ext cx="5486400" cy="914400"/>
-          </a:xfrm>
-          <a:prstGeom prst="rect">
-            <a:avLst/>
-          </a:prstGeom>
-          <a:noFill/>
-          <a:ln/>
-        </p:spPr>
-        <p:txBody>
-          <a:bodyPr wrap="square" lIns="0" tIns="0" rIns="0" bIns="0" rtlCol="0" anchor="t"/>
-          <a:lstStyle/>
-          <a:p>
-            <a:pPr marL="0" indent="0">
-              <a:buNone/>
-            </a:pPr>
-            <a:r>
-              <a:rPr lang="en-US" sz="5400" kern="0" spc="-220" dirty="0">
-                <a:solidFill>
-                  <a:srgbClr val="16181D"/>
-                </a:solidFill>
-                <a:latin typeface="Inter Medium" pitchFamily="34" charset="0"/>
-                <a:ea typeface="Inter Medium" pitchFamily="34" charset="-122"/>
-                <a:cs typeface="Inter Medium" pitchFamily="34" charset="-120"/>
-              </a:rPr>
-              <a:t>Thank you</a:t>
-            </a:r>
-            <a:endParaRPr lang="en-US" sz="5400" dirty="0"/>
-          </a:p>
-        </p:txBody>
-      </p:sp>
-      <p:sp>
-        <p:nvSpPr>
-          <p:cNvPr id="4" name="Text 2"/>
-          <p:cNvSpPr txBox="1"/>
-          <p:nvPr/>
-        </p:nvSpPr>
-        <p:spPr>
-          <a:xfrm>
-            <a:off x="731520" y="2331720"/>
-            <a:ext cx="5486400" cy="411480"/>
-          </a:xfrm>
-          <a:prstGeom prst="rect">
-            <a:avLst/>
-          </a:prstGeom>
-          <a:noFill/>
-          <a:ln/>
-        </p:spPr>
-        <p:txBody>
-          <a:bodyPr wrap="square" lIns="0" tIns="0" rIns="0" bIns="0" rtlCol="0" anchor="t"/>
-          <a:lstStyle/>
-          <a:p>
-            <a:pPr marL="0" indent="0">
-              <a:buNone/>
-            </a:pPr>
-            <a:r>
-              <a:rPr lang="en-US" sz="2000" dirty="0">
-                <a:solidFill>
-                  <a:srgbClr val="5A5E63"/>
-                </a:solidFill>
-                <a:latin typeface="Inter" pitchFamily="34" charset="0"/>
-                <a:ea typeface="Inter" pitchFamily="34" charset="-122"/>
-                <a:cs typeface="Inter" pitchFamily="34" charset="-120"/>
-              </a:rPr>
-              <a:t>Questions and discussion</a:t>
-            </a:r>
-            <a:endParaRPr lang="en-US" sz="2000" dirty="0"/>
-          </a:p>
-        </p:txBody>
-      </p:sp>
-      <p:sp>
-        <p:nvSpPr>
-          <p:cNvPr id="5" name="Shape 3"/>
-          <p:cNvSpPr/>
-          <p:nvPr/>
-        </p:nvSpPr>
-        <p:spPr>
-          <a:xfrm>
-            <a:off x="1865376" y="3785616"/>
-            <a:ext cx="219456" cy="219456"/>
-          </a:xfrm>
-          <a:prstGeom prst="rect">
-            <a:avLst/>
-          </a:prstGeom>
-          <a:solidFill>
-            <a:srgbClr val="6720FF"/>
-          </a:solidFill>
-          <a:ln/>
-        </p:spPr>
-      </p:sp>
-      <p:sp>
-        <p:nvSpPr>
-          <p:cNvPr id="6" name="Shape 4"/>
-          <p:cNvSpPr/>
-          <p:nvPr/>
-        </p:nvSpPr>
-        <p:spPr>
-          <a:xfrm>
-            <a:off x="2148840" y="3785616"/>
-            <a:ext cx="219456" cy="219456"/>
-          </a:xfrm>
-          <a:prstGeom prst="rect">
-            <a:avLst/>
-          </a:prstGeom>
-          <a:solidFill>
-            <a:srgbClr val="6720FF"/>
-          </a:solidFill>
-          <a:ln/>
-        </p:spPr>
-      </p:sp>
-      <p:sp>
-        <p:nvSpPr>
-          <p:cNvPr id="7" name="Shape 5"/>
-          <p:cNvSpPr/>
-          <p:nvPr/>
-        </p:nvSpPr>
-        <p:spPr>
-          <a:xfrm>
-            <a:off x="1581912" y="4069080"/>
-            <a:ext cx="219456" cy="219456"/>
-          </a:xfrm>
-          <a:prstGeom prst="rect">
-            <a:avLst/>
-          </a:prstGeom>
-          <a:solidFill>
-            <a:srgbClr val="6720FF"/>
-          </a:solidFill>
-          <a:ln/>
-        </p:spPr>
-      </p:sp>
-      <p:sp>
-        <p:nvSpPr>
-          <p:cNvPr id="8" name="Shape 6"/>
-          <p:cNvSpPr/>
-          <p:nvPr/>
-        </p:nvSpPr>
-        <p:spPr>
-          <a:xfrm>
-            <a:off x="1865376" y="4069080"/>
-            <a:ext cx="219456" cy="219456"/>
-          </a:xfrm>
-          <a:prstGeom prst="rect">
-            <a:avLst/>
-          </a:prstGeom>
-          <a:solidFill>
-            <a:srgbClr val="CEB4FF"/>
-          </a:solidFill>
-          <a:ln/>
-        </p:spPr>
-      </p:sp>
-      <p:sp>
-        <p:nvSpPr>
-          <p:cNvPr id="9" name="Shape 7"/>
-          <p:cNvSpPr/>
-          <p:nvPr/>
-        </p:nvSpPr>
-        <p:spPr>
-          <a:xfrm>
-            <a:off x="2148840" y="4069080"/>
-            <a:ext cx="219456" cy="219456"/>
-          </a:xfrm>
-          <a:prstGeom prst="rect">
-            <a:avLst/>
-          </a:prstGeom>
-          <a:solidFill>
-            <a:srgbClr val="6720FF"/>
-          </a:solidFill>
-          <a:ln/>
-        </p:spPr>
-      </p:sp>
-      <p:sp>
-        <p:nvSpPr>
-          <p:cNvPr id="10" name="Shape 8"/>
-          <p:cNvSpPr/>
-          <p:nvPr/>
-        </p:nvSpPr>
-        <p:spPr>
-          <a:xfrm>
-            <a:off x="1298448" y="4352544"/>
-            <a:ext cx="219456" cy="219456"/>
-          </a:xfrm>
-          <a:prstGeom prst="rect">
-            <a:avLst/>
-          </a:prstGeom>
-          <a:solidFill>
-            <a:srgbClr val="6720FF"/>
-          </a:solidFill>
-          <a:ln/>
-        </p:spPr>
-      </p:sp>
-      <p:sp>
-        <p:nvSpPr>
-          <p:cNvPr id="11" name="Shape 9"/>
-          <p:cNvSpPr/>
-          <p:nvPr/>
-        </p:nvSpPr>
-        <p:spPr>
-          <a:xfrm>
-            <a:off x="1581912" y="4352544"/>
-            <a:ext cx="219456" cy="219456"/>
-          </a:xfrm>
-          <a:prstGeom prst="rect">
-            <a:avLst/>
-          </a:prstGeom>
-          <a:solidFill>
-            <a:srgbClr val="CEB4FF"/>
-          </a:solidFill>
-          <a:ln/>
-        </p:spPr>
-      </p:sp>
-      <p:sp>
-        <p:nvSpPr>
-          <p:cNvPr id="12" name="Shape 10"/>
-          <p:cNvSpPr/>
-          <p:nvPr/>
-        </p:nvSpPr>
-        <p:spPr>
-          <a:xfrm>
-            <a:off x="1865376" y="4352544"/>
-            <a:ext cx="219456" cy="219456"/>
-          </a:xfrm>
-          <a:prstGeom prst="rect">
-            <a:avLst/>
-          </a:prstGeom>
-          <a:solidFill>
-            <a:srgbClr val="E0D2FD"/>
-          </a:solidFill>
-          <a:ln/>
-        </p:spPr>
-      </p:sp>
-      <p:sp>
-        <p:nvSpPr>
-          <p:cNvPr id="13" name="Shape 11"/>
-          <p:cNvSpPr/>
-          <p:nvPr/>
-        </p:nvSpPr>
-        <p:spPr>
-          <a:xfrm>
-            <a:off x="2148840" y="4352544"/>
-            <a:ext cx="219456" cy="219456"/>
-          </a:xfrm>
-          <a:prstGeom prst="rect">
-            <a:avLst/>
-          </a:prstGeom>
-          <a:solidFill>
-            <a:srgbClr val="CEB4FF"/>
-          </a:solidFill>
-          <a:ln/>
-        </p:spPr>
-      </p:sp>
-      <p:sp>
-        <p:nvSpPr>
-          <p:cNvPr id="14" name="Shape 12"/>
-          <p:cNvSpPr/>
-          <p:nvPr/>
-        </p:nvSpPr>
-        <p:spPr>
-          <a:xfrm>
-            <a:off x="1014984" y="4636008"/>
-            <a:ext cx="219456" cy="219456"/>
-          </a:xfrm>
-          <a:prstGeom prst="rect">
-            <a:avLst/>
-          </a:prstGeom>
-          <a:solidFill>
-            <a:srgbClr val="6720FF"/>
-          </a:solidFill>
-          <a:ln/>
-        </p:spPr>
-      </p:sp>
-      <p:sp>
-        <p:nvSpPr>
-          <p:cNvPr id="15" name="Shape 13"/>
-          <p:cNvSpPr/>
-          <p:nvPr/>
-        </p:nvSpPr>
-        <p:spPr>
-          <a:xfrm>
-            <a:off x="1298448" y="4636008"/>
-            <a:ext cx="219456" cy="219456"/>
-          </a:xfrm>
-          <a:prstGeom prst="rect">
-            <a:avLst/>
-          </a:prstGeom>
-          <a:solidFill>
-            <a:srgbClr val="CEB4FF"/>
-          </a:solidFill>
-          <a:ln/>
-        </p:spPr>
-      </p:sp>
-      <p:sp>
-        <p:nvSpPr>
-          <p:cNvPr id="16" name="Shape 14"/>
-          <p:cNvSpPr/>
-          <p:nvPr/>
-        </p:nvSpPr>
-        <p:spPr>
-          <a:xfrm>
-            <a:off x="1581912" y="4636008"/>
-            <a:ext cx="219456" cy="219456"/>
-          </a:xfrm>
-          <a:prstGeom prst="rect">
-            <a:avLst/>
-          </a:prstGeom>
-          <a:solidFill>
-            <a:srgbClr val="E0D2FD"/>
-          </a:solidFill>
-          <a:ln/>
-        </p:spPr>
-      </p:sp>
-      <p:sp>
-        <p:nvSpPr>
-          <p:cNvPr id="17" name="Shape 15"/>
-          <p:cNvSpPr/>
-          <p:nvPr/>
-        </p:nvSpPr>
-        <p:spPr>
-          <a:xfrm>
-            <a:off x="731520" y="4919472"/>
-            <a:ext cx="219456" cy="219456"/>
-          </a:xfrm>
-          <a:prstGeom prst="rect">
-            <a:avLst/>
-          </a:prstGeom>
-          <a:solidFill>
-            <a:srgbClr val="6720FF"/>
-          </a:solidFill>
-          <a:ln/>
-        </p:spPr>
-      </p:sp>
-      <p:sp>
-        <p:nvSpPr>
-          <p:cNvPr id="18" name="Shape 16"/>
-          <p:cNvSpPr/>
-          <p:nvPr/>
-        </p:nvSpPr>
-        <p:spPr>
-          <a:xfrm>
-            <a:off x="1014984" y="4919472"/>
-            <a:ext cx="219456" cy="219456"/>
-          </a:xfrm>
-          <a:prstGeom prst="rect">
-            <a:avLst/>
-          </a:prstGeom>
-          <a:solidFill>
-            <a:srgbClr val="CEB4FF"/>
-          </a:solidFill>
-          <a:ln/>
-        </p:spPr>
-      </p:sp>
-      <p:sp>
-        <p:nvSpPr>
-          <p:cNvPr id="19" name="Shape 17"/>
-          <p:cNvSpPr/>
-          <p:nvPr/>
-        </p:nvSpPr>
-        <p:spPr>
-          <a:xfrm>
-            <a:off x="1298448" y="4919472"/>
-            <a:ext cx="219456" cy="219456"/>
-          </a:xfrm>
-          <a:prstGeom prst="rect">
-            <a:avLst/>
-          </a:prstGeom>
-          <a:solidFill>
-            <a:srgbClr val="E0D2FD"/>
-          </a:solidFill>
-          <a:ln/>
-        </p:spPr>
-      </p:sp>
-      <p:sp>
-        <p:nvSpPr>
-          <p:cNvPr id="20" name="Text 18"/>
-          <p:cNvSpPr txBox="1"/>
-          <p:nvPr/>
-        </p:nvSpPr>
-        <p:spPr>
-          <a:xfrm>
-            <a:off x="5303520" y="1005840"/>
-            <a:ext cx="3657600" cy="219456"/>
-          </a:xfrm>
-          <a:prstGeom prst="rect">
-            <a:avLst/>
-          </a:prstGeom>
-          <a:noFill/>
-          <a:ln/>
-        </p:spPr>
-        <p:txBody>
-          <a:bodyPr wrap="square" lIns="0" tIns="0" rIns="0" bIns="0" rtlCol="0" anchor="t"/>
-          <a:lstStyle/>
-          <a:p>
-            <a:pPr marL="0" indent="0">
-              <a:buNone/>
-            </a:pPr>
-            <a:r>
-              <a:rPr lang="en-US" sz="1100" dirty="0">
-                <a:solidFill>
-                  <a:srgbClr val="501BC4"/>
-                </a:solidFill>
-                <a:latin typeface="Inter Medium" pitchFamily="34" charset="0"/>
-                <a:ea typeface="Inter Medium" pitchFamily="34" charset="-122"/>
-                <a:cs typeface="Inter Medium" pitchFamily="34" charset="-120"/>
-              </a:rPr>
-              <a:t>Joint next actions</a:t>
-            </a:r>
-            <a:endParaRPr lang="en-US" sz="1100" dirty="0"/>
-          </a:p>
-        </p:txBody>
-      </p:sp>
-      <p:sp>
-        <p:nvSpPr>
-          <p:cNvPr id="21" name="Shape 19"/>
-          <p:cNvSpPr/>
-          <p:nvPr/>
-        </p:nvSpPr>
-        <p:spPr>
-          <a:xfrm>
-            <a:off x="5303520" y="1371600"/>
-            <a:ext cx="6156655" cy="3767328"/>
-          </a:xfrm>
-          <a:prstGeom prst="roundRect">
-            <a:avLst>
-              <a:gd name="adj" fmla="val 2913"/>
-            </a:avLst>
-          </a:prstGeom>
-          <a:solidFill>
-            <a:srgbClr val="FFFFFF"/>
-          </a:solidFill>
-          <a:ln/>
-        </p:spPr>
-      </p:sp>
-      <p:sp>
-        <p:nvSpPr>
-          <p:cNvPr id="22" name="Shape 20"/>
-          <p:cNvSpPr/>
-          <p:nvPr/>
-        </p:nvSpPr>
-        <p:spPr>
-          <a:xfrm>
-            <a:off x="5303520" y="1371600"/>
-            <a:ext cx="6156655" cy="365760"/>
-          </a:xfrm>
-          <a:prstGeom prst="round2SameRect">
-            <a:avLst/>
-          </a:prstGeom>
-          <a:solidFill>
-            <a:srgbClr val="FAF7FF"/>
-          </a:solidFill>
-          <a:ln/>
-        </p:spPr>
-      </p:sp>
-      <p:sp>
-        <p:nvSpPr>
-          <p:cNvPr id="23" name="Shape 21"/>
-          <p:cNvSpPr/>
-          <p:nvPr/>
-        </p:nvSpPr>
-        <p:spPr>
-          <a:xfrm>
-            <a:off x="5303520" y="1737360"/>
-            <a:ext cx="6156655" cy="0"/>
-          </a:xfrm>
-          <a:prstGeom prst="line">
-            <a:avLst/>
-          </a:prstGeom>
-          <a:noFill/>
-          <a:ln w="9525">
-            <a:solidFill>
-              <a:srgbClr val="E6EAF4"/>
-            </a:solidFill>
-            <a:prstDash val="solid"/>
-          </a:ln>
-        </p:spPr>
-      </p:sp>
-      <p:sp>
-        <p:nvSpPr>
-          <p:cNvPr id="24" name="Text 22"/>
-          <p:cNvSpPr txBox="1"/>
-          <p:nvPr/>
-        </p:nvSpPr>
-        <p:spPr>
-          <a:xfrm>
-            <a:off x="5486400" y="1371600"/>
-            <a:ext cx="3200400" cy="365760"/>
-          </a:xfrm>
-          <a:prstGeom prst="rect">
-            <a:avLst/>
-          </a:prstGeom>
-          <a:noFill/>
-          <a:ln/>
-        </p:spPr>
-        <p:txBody>
-          <a:bodyPr wrap="square" lIns="0" tIns="0" rIns="0" bIns="0" rtlCol="0" anchor="ctr"/>
-          <a:lstStyle/>
-          <a:p>
-            <a:pPr marL="0" indent="0">
-              <a:buNone/>
-            </a:pPr>
-            <a:r>
-              <a:rPr lang="en-US" sz="950" dirty="0">
-                <a:solidFill>
-                  <a:srgbClr val="5A5E63"/>
-                </a:solidFill>
-                <a:latin typeface="Inter Medium" pitchFamily="34" charset="0"/>
-                <a:ea typeface="Inter Medium" pitchFamily="34" charset="-122"/>
-                <a:cs typeface="Inter Medium" pitchFamily="34" charset="-120"/>
-              </a:rPr>
-              <a:t>Action</a:t>
-            </a:r>
-            <a:endParaRPr lang="en-US" sz="950" dirty="0"/>
-          </a:p>
-        </p:txBody>
-      </p:sp>
-      <p:sp>
-        <p:nvSpPr>
-          <p:cNvPr id="25" name="Text 23"/>
-          <p:cNvSpPr txBox="1"/>
-          <p:nvPr/>
-        </p:nvSpPr>
-        <p:spPr>
-          <a:xfrm>
-            <a:off x="8823960" y="1371600"/>
-            <a:ext cx="1783080" cy="365760"/>
-          </a:xfrm>
-          <a:prstGeom prst="rect">
-            <a:avLst/>
-          </a:prstGeom>
-          <a:noFill/>
-          <a:ln/>
-        </p:spPr>
-        <p:txBody>
-          <a:bodyPr wrap="square" lIns="0" tIns="0" rIns="0" bIns="0" rtlCol="0" anchor="ctr"/>
-          <a:lstStyle/>
-          <a:p>
-            <a:pPr marL="0" indent="0">
-              <a:buNone/>
-            </a:pPr>
-            <a:r>
-              <a:rPr lang="en-US" sz="950" dirty="0">
-                <a:solidFill>
-                  <a:srgbClr val="5A5E63"/>
-                </a:solidFill>
-                <a:latin typeface="Inter Medium" pitchFamily="34" charset="0"/>
-                <a:ea typeface="Inter Medium" pitchFamily="34" charset="-122"/>
-                <a:cs typeface="Inter Medium" pitchFamily="34" charset="-120"/>
-              </a:rPr>
-              <a:t>Owner</a:t>
-            </a:r>
-            <a:endParaRPr lang="en-US" sz="950" dirty="0"/>
-          </a:p>
-        </p:txBody>
-      </p:sp>
-      <p:sp>
-        <p:nvSpPr>
-          <p:cNvPr id="26" name="Text 24"/>
-          <p:cNvSpPr txBox="1"/>
-          <p:nvPr/>
-        </p:nvSpPr>
-        <p:spPr>
-          <a:xfrm>
-            <a:off x="10618927" y="1371600"/>
-            <a:ext cx="731520" cy="365760"/>
-          </a:xfrm>
-          <a:prstGeom prst="rect">
-            <a:avLst/>
-          </a:prstGeom>
-          <a:noFill/>
-          <a:ln/>
-        </p:spPr>
-        <p:txBody>
-          <a:bodyPr wrap="square" lIns="0" tIns="0" rIns="0" bIns="0" rtlCol="0" anchor="ctr"/>
-          <a:lstStyle/>
-          <a:p>
-            <a:pPr marL="0" indent="0">
-              <a:buNone/>
-            </a:pPr>
-            <a:r>
-              <a:rPr lang="en-US" sz="950" dirty="0">
-                <a:solidFill>
-                  <a:srgbClr val="5A5E63"/>
-                </a:solidFill>
-                <a:latin typeface="Inter Medium" pitchFamily="34" charset="0"/>
-                <a:ea typeface="Inter Medium" pitchFamily="34" charset="-122"/>
-                <a:cs typeface="Inter Medium" pitchFamily="34" charset="-120"/>
-              </a:rPr>
-              <a:t>Due</a:t>
-            </a:r>
-            <a:endParaRPr lang="en-US" sz="950" dirty="0"/>
-          </a:p>
-        </p:txBody>
-      </p:sp>
-      <p:sp>
-        <p:nvSpPr>
-          <p:cNvPr id="27" name="Text 25"/>
-          <p:cNvSpPr txBox="1"/>
-          <p:nvPr/>
-        </p:nvSpPr>
-        <p:spPr>
-          <a:xfrm>
-            <a:off x="5486400" y="1737360"/>
-            <a:ext cx="3200400" cy="566928"/>
-          </a:xfrm>
-          <a:prstGeom prst="rect">
-            <a:avLst/>
-          </a:prstGeom>
-          <a:noFill/>
-          <a:ln/>
-        </p:spPr>
-        <p:txBody>
-          <a:bodyPr wrap="square" lIns="0" tIns="0" rIns="0" bIns="0" rtlCol="0" anchor="ctr"/>
-          <a:lstStyle/>
-          <a:p>
-            <a:pPr marL="0" indent="0">
-              <a:buNone/>
-            </a:pPr>
-            <a:r>
-              <a:rPr lang="en-US" sz="1050" dirty="0">
-                <a:solidFill>
-                  <a:srgbClr val="16181D"/>
-                </a:solidFill>
-                <a:latin typeface="Inter" pitchFamily="34" charset="0"/>
-                <a:ea typeface="Inter" pitchFamily="34" charset="-122"/>
-                <a:cs typeface="Inter" pitchFamily="34" charset="-120"/>
-              </a:rPr>
-              <a:t>Retune scale-up thresholds and agree a pre-warm runbook for planned promotions</a:t>
-            </a:r>
-            <a:endParaRPr lang="en-US" sz="1050" dirty="0"/>
-          </a:p>
-        </p:txBody>
-      </p:sp>
-      <p:sp>
-        <p:nvSpPr>
-          <p:cNvPr id="28" name="Text 26"/>
-          <p:cNvSpPr txBox="1"/>
-          <p:nvPr/>
-        </p:nvSpPr>
-        <p:spPr>
-          <a:xfrm>
-            <a:off x="8823960" y="1737360"/>
-            <a:ext cx="1783080" cy="566928"/>
-          </a:xfrm>
-          <a:prstGeom prst="rect">
-            <a:avLst/>
-          </a:prstGeom>
-          <a:noFill/>
-          <a:ln/>
-        </p:spPr>
-        <p:txBody>
-          <a:bodyPr wrap="square" lIns="0" tIns="0" rIns="0" bIns="0" rtlCol="0" anchor="ctr"/>
-          <a:lstStyle/>
-          <a:p>
-            <a:pPr marL="0" indent="0">
-              <a:buNone/>
-            </a:pPr>
-            <a:r>
-              <a:rPr lang="en-US" sz="900" dirty="0">
-                <a:solidFill>
-                  <a:srgbClr val="5A5E63"/>
-                </a:solidFill>
-                <a:latin typeface="Inter" pitchFamily="34" charset="0"/>
-                <a:ea typeface="Inter" pitchFamily="34" charset="-122"/>
-                <a:cs typeface="Inter" pitchFamily="34" charset="-120"/>
-              </a:rPr>
-              <a:t>Fireworks Engineering + Northstar CX operations</a:t>
-            </a:r>
-            <a:endParaRPr lang="en-US" sz="900" dirty="0"/>
-          </a:p>
-        </p:txBody>
-      </p:sp>
-      <p:sp>
-        <p:nvSpPr>
-          <p:cNvPr id="29" name="Text 27"/>
-          <p:cNvSpPr txBox="1"/>
-          <p:nvPr/>
-        </p:nvSpPr>
-        <p:spPr>
-          <a:xfrm>
-            <a:off x="10618927" y="1737360"/>
-            <a:ext cx="731520" cy="566928"/>
-          </a:xfrm>
-          <a:prstGeom prst="rect">
-            <a:avLst/>
-          </a:prstGeom>
-          <a:noFill/>
-          <a:ln/>
-        </p:spPr>
-        <p:txBody>
-          <a:bodyPr wrap="square" lIns="0" tIns="0" rIns="0" bIns="0" rtlCol="0" anchor="ctr"/>
-          <a:lstStyle/>
-          <a:p>
-            <a:pPr marL="0" indent="0">
-              <a:buNone/>
-            </a:pPr>
-            <a:r>
-              <a:rPr lang="en-US" sz="1050" dirty="0">
-                <a:solidFill>
-                  <a:srgbClr val="16181D"/>
-                </a:solidFill>
-                <a:latin typeface="Inter Medium" pitchFamily="34" charset="0"/>
-                <a:ea typeface="Inter Medium" pitchFamily="34" charset="-122"/>
-                <a:cs typeface="Inter Medium" pitchFamily="34" charset="-120"/>
-              </a:rPr>
-              <a:t>16 Oct</a:t>
-            </a:r>
-            <a:endParaRPr lang="en-US" sz="1050" dirty="0"/>
-          </a:p>
-        </p:txBody>
-      </p:sp>
-      <p:sp>
-        <p:nvSpPr>
-          <p:cNvPr id="30" name="Shape 28"/>
-          <p:cNvSpPr/>
-          <p:nvPr/>
-        </p:nvSpPr>
-        <p:spPr>
-          <a:xfrm>
-            <a:off x="5303520" y="2304288"/>
-            <a:ext cx="6156655" cy="0"/>
-          </a:xfrm>
-          <a:prstGeom prst="line">
-            <a:avLst/>
-          </a:prstGeom>
-          <a:noFill/>
-          <a:ln w="9525">
-            <a:solidFill>
-              <a:srgbClr val="E6EAF4"/>
-            </a:solidFill>
-            <a:prstDash val="solid"/>
-          </a:ln>
-        </p:spPr>
-      </p:sp>
-      <p:sp>
-        <p:nvSpPr>
-          <p:cNvPr id="31" name="Text 29"/>
-          <p:cNvSpPr txBox="1"/>
-          <p:nvPr/>
-        </p:nvSpPr>
-        <p:spPr>
-          <a:xfrm>
-            <a:off x="5486400" y="2304288"/>
-            <a:ext cx="3200400" cy="566928"/>
-          </a:xfrm>
-          <a:prstGeom prst="rect">
-            <a:avLst/>
-          </a:prstGeom>
-          <a:noFill/>
-          <a:ln/>
-        </p:spPr>
-        <p:txBody>
-          <a:bodyPr wrap="square" lIns="0" tIns="0" rIns="0" bIns="0" rtlCol="0" anchor="ctr"/>
-          <a:lstStyle/>
-          <a:p>
-            <a:pPr marL="0" indent="0">
-              <a:buNone/>
-            </a:pPr>
-            <a:r>
-              <a:rPr lang="en-US" sz="1050" dirty="0">
-                <a:solidFill>
-                  <a:srgbClr val="16181D"/>
-                </a:solidFill>
-                <a:latin typeface="Inter" pitchFamily="34" charset="0"/>
-                <a:ea typeface="Inter" pitchFamily="34" charset="-122"/>
-                <a:cs typeface="Inter" pitchFamily="34" charset="-120"/>
-              </a:rPr>
-              <a:t>Share pre-launch handle-time and CSAT baselines for Atlas</a:t>
-            </a:r>
-            <a:endParaRPr lang="en-US" sz="1050" dirty="0"/>
-          </a:p>
-        </p:txBody>
-      </p:sp>
-      <p:sp>
-        <p:nvSpPr>
-          <p:cNvPr id="32" name="Text 30"/>
-          <p:cNvSpPr txBox="1"/>
-          <p:nvPr/>
-        </p:nvSpPr>
-        <p:spPr>
-          <a:xfrm>
-            <a:off x="8823960" y="2304288"/>
-            <a:ext cx="1783080" cy="566928"/>
-          </a:xfrm>
-          <a:prstGeom prst="rect">
-            <a:avLst/>
-          </a:prstGeom>
-          <a:noFill/>
-          <a:ln/>
-        </p:spPr>
-        <p:txBody>
-          <a:bodyPr wrap="square" lIns="0" tIns="0" rIns="0" bIns="0" rtlCol="0" anchor="ctr"/>
-          <a:lstStyle/>
-          <a:p>
-            <a:pPr marL="0" indent="0">
-              <a:buNone/>
-            </a:pPr>
-            <a:r>
-              <a:rPr lang="en-US" sz="900" dirty="0">
-                <a:solidFill>
-                  <a:srgbClr val="5A5E63"/>
-                </a:solidFill>
-                <a:latin typeface="Inter" pitchFamily="34" charset="0"/>
-                <a:ea typeface="Inter" pitchFamily="34" charset="-122"/>
-                <a:cs typeface="Inter" pitchFamily="34" charset="-120"/>
-              </a:rPr>
-              <a:t>Deployment Strategist + Northstar CX</a:t>
-            </a:r>
-            <a:endParaRPr lang="en-US" sz="900" dirty="0"/>
-          </a:p>
-        </p:txBody>
-      </p:sp>
-      <p:sp>
-        <p:nvSpPr>
-          <p:cNvPr id="33" name="Text 31"/>
-          <p:cNvSpPr txBox="1"/>
-          <p:nvPr/>
-        </p:nvSpPr>
-        <p:spPr>
-          <a:xfrm>
-            <a:off x="10618927" y="2304288"/>
-            <a:ext cx="731520" cy="566928"/>
-          </a:xfrm>
-          <a:prstGeom prst="rect">
-            <a:avLst/>
-          </a:prstGeom>
-          <a:noFill/>
-          <a:ln/>
-        </p:spPr>
-        <p:txBody>
-          <a:bodyPr wrap="square" lIns="0" tIns="0" rIns="0" bIns="0" rtlCol="0" anchor="ctr"/>
-          <a:lstStyle/>
-          <a:p>
-            <a:pPr marL="0" indent="0">
-              <a:buNone/>
-            </a:pPr>
-            <a:r>
-              <a:rPr lang="en-US" sz="1050" dirty="0">
-                <a:solidFill>
-                  <a:srgbClr val="16181D"/>
-                </a:solidFill>
-                <a:latin typeface="Inter Medium" pitchFamily="34" charset="0"/>
-                <a:ea typeface="Inter Medium" pitchFamily="34" charset="-122"/>
-                <a:cs typeface="Inter Medium" pitchFamily="34" charset="-120"/>
-              </a:rPr>
-              <a:t>16 Oct</a:t>
-            </a:r>
-            <a:endParaRPr lang="en-US" sz="1050" dirty="0"/>
-          </a:p>
-        </p:txBody>
-      </p:sp>
-      <p:sp>
-        <p:nvSpPr>
-          <p:cNvPr id="34" name="Shape 32"/>
-          <p:cNvSpPr/>
-          <p:nvPr/>
-        </p:nvSpPr>
-        <p:spPr>
-          <a:xfrm>
-            <a:off x="5303520" y="2871216"/>
-            <a:ext cx="6156655" cy="0"/>
-          </a:xfrm>
-          <a:prstGeom prst="line">
-            <a:avLst/>
-          </a:prstGeom>
-          <a:noFill/>
-          <a:ln w="9525">
-            <a:solidFill>
-              <a:srgbClr val="E6EAF4"/>
-            </a:solidFill>
-            <a:prstDash val="solid"/>
-          </a:ln>
-        </p:spPr>
-      </p:sp>
-      <p:sp>
-        <p:nvSpPr>
-          <p:cNvPr id="35" name="Text 33"/>
-          <p:cNvSpPr txBox="1"/>
-          <p:nvPr/>
-        </p:nvSpPr>
-        <p:spPr>
-          <a:xfrm>
-            <a:off x="5486400" y="2871216"/>
-            <a:ext cx="3200400" cy="566928"/>
-          </a:xfrm>
-          <a:prstGeom prst="rect">
-            <a:avLst/>
-          </a:prstGeom>
-          <a:noFill/>
-          <a:ln/>
-        </p:spPr>
-        <p:txBody>
-          <a:bodyPr wrap="square" lIns="0" tIns="0" rIns="0" bIns="0" rtlCol="0" anchor="ctr"/>
-          <a:lstStyle/>
-          <a:p>
-            <a:pPr marL="0" indent="0">
-              <a:buNone/>
-            </a:pPr>
-            <a:r>
-              <a:rPr lang="en-US" sz="1050" dirty="0">
-                <a:solidFill>
-                  <a:srgbClr val="16181D"/>
-                </a:solidFill>
-                <a:latin typeface="Inter" pitchFamily="34" charset="0"/>
-                <a:ea typeface="Inter" pitchFamily="34" charset="-122"/>
-                <a:cs typeface="Inter" pitchFamily="34" charset="-120"/>
-              </a:rPr>
-              <a:t>Executive review: agree a group sponsor, the Ridgeline pilot and its success criteria</a:t>
-            </a:r>
-            <a:endParaRPr lang="en-US" sz="1050" dirty="0"/>
-          </a:p>
-        </p:txBody>
-      </p:sp>
-      <p:sp>
-        <p:nvSpPr>
-          <p:cNvPr id="36" name="Text 34"/>
-          <p:cNvSpPr txBox="1"/>
-          <p:nvPr/>
-        </p:nvSpPr>
-        <p:spPr>
-          <a:xfrm>
-            <a:off x="8823960" y="2871216"/>
-            <a:ext cx="1783080" cy="566928"/>
-          </a:xfrm>
-          <a:prstGeom prst="rect">
-            <a:avLst/>
-          </a:prstGeom>
-          <a:noFill/>
-          <a:ln/>
-        </p:spPr>
-        <p:txBody>
-          <a:bodyPr wrap="square" lIns="0" tIns="0" rIns="0" bIns="0" rtlCol="0" anchor="ctr"/>
-          <a:lstStyle/>
-          <a:p>
-            <a:pPr marL="0" indent="0">
-              <a:buNone/>
-            </a:pPr>
-            <a:r>
-              <a:rPr lang="en-US" sz="900" dirty="0">
-                <a:solidFill>
-                  <a:srgbClr val="5A5E63"/>
-                </a:solidFill>
-                <a:latin typeface="Inter" pitchFamily="34" charset="0"/>
-                <a:ea typeface="Inter" pitchFamily="34" charset="-122"/>
-                <a:cs typeface="Inter" pitchFamily="34" charset="-120"/>
-              </a:rPr>
-              <a:t>Deployment Strategist + Account Executive</a:t>
-            </a:r>
-            <a:endParaRPr lang="en-US" sz="900" dirty="0"/>
-          </a:p>
-        </p:txBody>
-      </p:sp>
-      <p:sp>
-        <p:nvSpPr>
-          <p:cNvPr id="37" name="Text 35"/>
-          <p:cNvSpPr txBox="1"/>
-          <p:nvPr/>
-        </p:nvSpPr>
-        <p:spPr>
-          <a:xfrm>
-            <a:off x="10618927" y="2871216"/>
-            <a:ext cx="731520" cy="566928"/>
-          </a:xfrm>
-          <a:prstGeom prst="rect">
-            <a:avLst/>
-          </a:prstGeom>
-          <a:noFill/>
-          <a:ln/>
-        </p:spPr>
-        <p:txBody>
-          <a:bodyPr wrap="square" lIns="0" tIns="0" rIns="0" bIns="0" rtlCol="0" anchor="ctr"/>
-          <a:lstStyle/>
-          <a:p>
-            <a:pPr marL="0" indent="0">
-              <a:buNone/>
-            </a:pPr>
-            <a:r>
-              <a:rPr lang="en-US" sz="1050" dirty="0">
-                <a:solidFill>
-                  <a:srgbClr val="16181D"/>
-                </a:solidFill>
-                <a:latin typeface="Inter Medium" pitchFamily="34" charset="0"/>
-                <a:ea typeface="Inter Medium" pitchFamily="34" charset="-122"/>
-                <a:cs typeface="Inter Medium" pitchFamily="34" charset="-120"/>
-              </a:rPr>
-              <a:t>22 Oct</a:t>
-            </a:r>
-            <a:endParaRPr lang="en-US" sz="1050" dirty="0"/>
-          </a:p>
-        </p:txBody>
-      </p:sp>
-      <p:sp>
-        <p:nvSpPr>
-          <p:cNvPr id="38" name="Shape 36"/>
-          <p:cNvSpPr/>
-          <p:nvPr/>
-        </p:nvSpPr>
-        <p:spPr>
-          <a:xfrm>
-            <a:off x="5303520" y="3438144"/>
-            <a:ext cx="6156655" cy="0"/>
-          </a:xfrm>
-          <a:prstGeom prst="line">
-            <a:avLst/>
-          </a:prstGeom>
-          <a:noFill/>
-          <a:ln w="9525">
-            <a:solidFill>
-              <a:srgbClr val="E6EAF4"/>
-            </a:solidFill>
-            <a:prstDash val="solid"/>
-          </a:ln>
-        </p:spPr>
-      </p:sp>
-      <p:sp>
-        <p:nvSpPr>
-          <p:cNvPr id="39" name="Text 37"/>
-          <p:cNvSpPr txBox="1"/>
-          <p:nvPr/>
-        </p:nvSpPr>
-        <p:spPr>
-          <a:xfrm>
-            <a:off x="5486400" y="3438144"/>
-            <a:ext cx="3200400" cy="566928"/>
-          </a:xfrm>
-          <a:prstGeom prst="rect">
-            <a:avLst/>
-          </a:prstGeom>
-          <a:noFill/>
-          <a:ln/>
-        </p:spPr>
-        <p:txBody>
-          <a:bodyPr wrap="square" lIns="0" tIns="0" rIns="0" bIns="0" rtlCol="0" anchor="ctr"/>
-          <a:lstStyle/>
-          <a:p>
-            <a:pPr marL="0" indent="0">
-              <a:buNone/>
-            </a:pPr>
-            <a:r>
-              <a:rPr lang="en-US" sz="1050" dirty="0">
-                <a:solidFill>
-                  <a:srgbClr val="16181D"/>
-                </a:solidFill>
-                <a:latin typeface="Inter" pitchFamily="34" charset="0"/>
-                <a:ea typeface="Inter" pitchFamily="34" charset="-122"/>
-                <a:cs typeface="Inter" pitchFamily="34" charset="-120"/>
-              </a:rPr>
-              <a:t>Joint review of rising requests per ticket (4.6 → 6.2)</a:t>
-            </a:r>
-            <a:endParaRPr lang="en-US" sz="1050" dirty="0"/>
-          </a:p>
-        </p:txBody>
-      </p:sp>
-      <p:sp>
-        <p:nvSpPr>
-          <p:cNvPr id="40" name="Text 38"/>
-          <p:cNvSpPr txBox="1"/>
-          <p:nvPr/>
-        </p:nvSpPr>
-        <p:spPr>
-          <a:xfrm>
-            <a:off x="8823960" y="3438144"/>
-            <a:ext cx="1783080" cy="566928"/>
-          </a:xfrm>
-          <a:prstGeom prst="rect">
-            <a:avLst/>
-          </a:prstGeom>
-          <a:noFill/>
-          <a:ln/>
-        </p:spPr>
-        <p:txBody>
-          <a:bodyPr wrap="square" lIns="0" tIns="0" rIns="0" bIns="0" rtlCol="0" anchor="ctr"/>
-          <a:lstStyle/>
-          <a:p>
-            <a:pPr marL="0" indent="0">
-              <a:buNone/>
-            </a:pPr>
-            <a:r>
-              <a:rPr lang="en-US" sz="900" dirty="0">
-                <a:solidFill>
-                  <a:srgbClr val="5A5E63"/>
-                </a:solidFill>
-                <a:latin typeface="Inter" pitchFamily="34" charset="0"/>
-                <a:ea typeface="Inter" pitchFamily="34" charset="-122"/>
-                <a:cs typeface="Inter" pitchFamily="34" charset="-120"/>
-              </a:rPr>
-              <a:t>Deployment Strategist + Northstar Engineering</a:t>
-            </a:r>
-            <a:endParaRPr lang="en-US" sz="900" dirty="0"/>
-          </a:p>
-        </p:txBody>
-      </p:sp>
-      <p:sp>
-        <p:nvSpPr>
-          <p:cNvPr id="41" name="Text 39"/>
-          <p:cNvSpPr txBox="1"/>
-          <p:nvPr/>
-        </p:nvSpPr>
-        <p:spPr>
-          <a:xfrm>
-            <a:off x="10618927" y="3438144"/>
-            <a:ext cx="731520" cy="566928"/>
-          </a:xfrm>
-          <a:prstGeom prst="rect">
-            <a:avLst/>
-          </a:prstGeom>
-          <a:noFill/>
-          <a:ln/>
-        </p:spPr>
-        <p:txBody>
-          <a:bodyPr wrap="square" lIns="0" tIns="0" rIns="0" bIns="0" rtlCol="0" anchor="ctr"/>
-          <a:lstStyle/>
-          <a:p>
-            <a:pPr marL="0" indent="0">
-              <a:buNone/>
-            </a:pPr>
-            <a:r>
-              <a:rPr lang="en-US" sz="1050" dirty="0">
-                <a:solidFill>
-                  <a:srgbClr val="16181D"/>
-                </a:solidFill>
-                <a:latin typeface="Inter Medium" pitchFamily="34" charset="0"/>
-                <a:ea typeface="Inter Medium" pitchFamily="34" charset="-122"/>
-                <a:cs typeface="Inter Medium" pitchFamily="34" charset="-120"/>
-              </a:rPr>
-              <a:t>23 Oct</a:t>
-            </a:r>
-            <a:endParaRPr lang="en-US" sz="1050" dirty="0"/>
-          </a:p>
-        </p:txBody>
-      </p:sp>
-      <p:sp>
-        <p:nvSpPr>
-          <p:cNvPr id="42" name="Shape 40"/>
-          <p:cNvSpPr/>
-          <p:nvPr/>
-        </p:nvSpPr>
-        <p:spPr>
-          <a:xfrm>
-            <a:off x="5303520" y="4005072"/>
-            <a:ext cx="6156655" cy="0"/>
-          </a:xfrm>
-          <a:prstGeom prst="line">
-            <a:avLst/>
-          </a:prstGeom>
-          <a:noFill/>
-          <a:ln w="9525">
-            <a:solidFill>
-              <a:srgbClr val="E6EAF4"/>
-            </a:solidFill>
-            <a:prstDash val="solid"/>
-          </a:ln>
-        </p:spPr>
-      </p:sp>
-      <p:sp>
-        <p:nvSpPr>
-          <p:cNvPr id="43" name="Text 41"/>
-          <p:cNvSpPr txBox="1"/>
-          <p:nvPr/>
-        </p:nvSpPr>
-        <p:spPr>
-          <a:xfrm>
-            <a:off x="5486400" y="4005072"/>
-            <a:ext cx="3200400" cy="566928"/>
-          </a:xfrm>
-          <a:prstGeom prst="rect">
-            <a:avLst/>
-          </a:prstGeom>
-          <a:noFill/>
-          <a:ln/>
-        </p:spPr>
-        <p:txBody>
-          <a:bodyPr wrap="square" lIns="0" tIns="0" rIns="0" bIns="0" rtlCol="0" anchor="ctr"/>
-          <a:lstStyle/>
-          <a:p>
-            <a:pPr marL="0" indent="0">
-              <a:buNone/>
-            </a:pPr>
-            <a:r>
-              <a:rPr lang="en-US" sz="1050" dirty="0">
-                <a:solidFill>
-                  <a:srgbClr val="16181D"/>
-                </a:solidFill>
-                <a:latin typeface="Inter" pitchFamily="34" charset="0"/>
-                <a:ea typeface="Inter" pitchFamily="34" charset="-122"/>
-                <a:cs typeface="Inter" pitchFamily="34" charset="-120"/>
-              </a:rPr>
-              <a:t>Train the Ridgeline adapter and run the two-arm pilot</a:t>
-            </a:r>
-            <a:endParaRPr lang="en-US" sz="1050" dirty="0"/>
-          </a:p>
-        </p:txBody>
-      </p:sp>
-      <p:sp>
-        <p:nvSpPr>
-          <p:cNvPr id="44" name="Text 42"/>
-          <p:cNvSpPr txBox="1"/>
-          <p:nvPr/>
-        </p:nvSpPr>
-        <p:spPr>
-          <a:xfrm>
-            <a:off x="8823960" y="4005072"/>
-            <a:ext cx="1783080" cy="566928"/>
-          </a:xfrm>
-          <a:prstGeom prst="rect">
-            <a:avLst/>
-          </a:prstGeom>
-          <a:noFill/>
-          <a:ln/>
-        </p:spPr>
-        <p:txBody>
-          <a:bodyPr wrap="square" lIns="0" tIns="0" rIns="0" bIns="0" rtlCol="0" anchor="ctr"/>
-          <a:lstStyle/>
-          <a:p>
-            <a:pPr marL="0" indent="0">
-              <a:buNone/>
-            </a:pPr>
-            <a:r>
-              <a:rPr lang="en-US" sz="900" dirty="0">
-                <a:solidFill>
-                  <a:srgbClr val="5A5E63"/>
-                </a:solidFill>
-                <a:latin typeface="Inter" pitchFamily="34" charset="0"/>
-                <a:ea typeface="Inter" pitchFamily="34" charset="-122"/>
-                <a:cs typeface="Inter" pitchFamily="34" charset="-120"/>
-              </a:rPr>
-              <a:t>Fireworks Applied ML + Northstar Engineering</a:t>
-            </a:r>
-            <a:endParaRPr lang="en-US" sz="900" dirty="0"/>
-          </a:p>
-        </p:txBody>
-      </p:sp>
-      <p:sp>
-        <p:nvSpPr>
-          <p:cNvPr id="45" name="Text 43"/>
-          <p:cNvSpPr txBox="1"/>
-          <p:nvPr/>
-        </p:nvSpPr>
-        <p:spPr>
-          <a:xfrm>
-            <a:off x="10618927" y="4005072"/>
-            <a:ext cx="731520" cy="566928"/>
-          </a:xfrm>
-          <a:prstGeom prst="rect">
-            <a:avLst/>
-          </a:prstGeom>
-          <a:noFill/>
-          <a:ln/>
-        </p:spPr>
-        <p:txBody>
-          <a:bodyPr wrap="square" lIns="0" tIns="0" rIns="0" bIns="0" rtlCol="0" anchor="ctr"/>
-          <a:lstStyle/>
-          <a:p>
-            <a:pPr marL="0" indent="0">
-              <a:buNone/>
-            </a:pPr>
-            <a:r>
-              <a:rPr lang="en-US" sz="1050" dirty="0">
-                <a:solidFill>
-                  <a:srgbClr val="16181D"/>
-                </a:solidFill>
-                <a:latin typeface="Inter Medium" pitchFamily="34" charset="0"/>
-                <a:ea typeface="Inter Medium" pitchFamily="34" charset="-122"/>
-                <a:cs typeface="Inter Medium" pitchFamily="34" charset="-120"/>
-              </a:rPr>
-              <a:t>18 Dec</a:t>
-            </a:r>
-            <a:endParaRPr lang="en-US" sz="1050" dirty="0"/>
-          </a:p>
-        </p:txBody>
-      </p:sp>
-      <p:sp>
-        <p:nvSpPr>
-          <p:cNvPr id="46" name="Shape 44"/>
-          <p:cNvSpPr/>
-          <p:nvPr/>
-        </p:nvSpPr>
-        <p:spPr>
-          <a:xfrm>
-            <a:off x="5303520" y="4572000"/>
-            <a:ext cx="6156655" cy="0"/>
-          </a:xfrm>
-          <a:prstGeom prst="line">
-            <a:avLst/>
-          </a:prstGeom>
-          <a:noFill/>
-          <a:ln w="9525">
-            <a:solidFill>
-              <a:srgbClr val="E6EAF4"/>
-            </a:solidFill>
-            <a:prstDash val="solid"/>
-          </a:ln>
-        </p:spPr>
-      </p:sp>
-      <p:sp>
-        <p:nvSpPr>
-          <p:cNvPr id="47" name="Text 45"/>
-          <p:cNvSpPr txBox="1"/>
-          <p:nvPr/>
-        </p:nvSpPr>
-        <p:spPr>
-          <a:xfrm>
-            <a:off x="5486400" y="4572000"/>
-            <a:ext cx="3200400" cy="566928"/>
-          </a:xfrm>
-          <a:prstGeom prst="rect">
-            <a:avLst/>
-          </a:prstGeom>
-          <a:noFill/>
-          <a:ln/>
-        </p:spPr>
-        <p:txBody>
-          <a:bodyPr wrap="square" lIns="0" tIns="0" rIns="0" bIns="0" rtlCol="0" anchor="ctr"/>
-          <a:lstStyle/>
-          <a:p>
-            <a:pPr marL="0" indent="0">
-              <a:buNone/>
-            </a:pPr>
-            <a:r>
-              <a:rPr lang="en-US" sz="1050" dirty="0">
-                <a:solidFill>
-                  <a:srgbClr val="16181D"/>
-                </a:solidFill>
-                <a:latin typeface="Inter" pitchFamily="34" charset="0"/>
-                <a:ea typeface="Inter" pitchFamily="34" charset="-122"/>
-                <a:cs typeface="Inter" pitchFamily="34" charset="-120"/>
-              </a:rPr>
-              <a:t>Pilot readout and wave-2 decision</a:t>
-            </a:r>
-            <a:endParaRPr lang="en-US" sz="1050" dirty="0"/>
-          </a:p>
-        </p:txBody>
-      </p:sp>
-      <p:sp>
-        <p:nvSpPr>
-          <p:cNvPr id="48" name="Text 46"/>
-          <p:cNvSpPr txBox="1"/>
-          <p:nvPr/>
-        </p:nvSpPr>
-        <p:spPr>
-          <a:xfrm>
-            <a:off x="8823960" y="4572000"/>
-            <a:ext cx="1783080" cy="566928"/>
-          </a:xfrm>
-          <a:prstGeom prst="rect">
-            <a:avLst/>
-          </a:prstGeom>
-          <a:noFill/>
-          <a:ln/>
-        </p:spPr>
-        <p:txBody>
-          <a:bodyPr wrap="square" lIns="0" tIns="0" rIns="0" bIns="0" rtlCol="0" anchor="ctr"/>
-          <a:lstStyle/>
-          <a:p>
-            <a:pPr marL="0" indent="0">
-              <a:buNone/>
-            </a:pPr>
-            <a:r>
-              <a:rPr lang="en-US" sz="900" dirty="0">
-                <a:solidFill>
-                  <a:srgbClr val="5A5E63"/>
-                </a:solidFill>
-                <a:latin typeface="Inter" pitchFamily="34" charset="0"/>
-                <a:ea typeface="Inter" pitchFamily="34" charset="-122"/>
-                <a:cs typeface="Inter" pitchFamily="34" charset="-120"/>
-              </a:rPr>
-              <a:t>Deployment Strategist + Northstar sponsor</a:t>
-            </a:r>
-            <a:endParaRPr lang="en-US" sz="900" dirty="0"/>
-          </a:p>
-        </p:txBody>
-      </p:sp>
-      <p:sp>
-        <p:nvSpPr>
-          <p:cNvPr id="49" name="Text 47"/>
-          <p:cNvSpPr txBox="1"/>
-          <p:nvPr/>
-        </p:nvSpPr>
-        <p:spPr>
-          <a:xfrm>
-            <a:off x="10618927" y="4572000"/>
-            <a:ext cx="731520" cy="566928"/>
-          </a:xfrm>
-          <a:prstGeom prst="rect">
-            <a:avLst/>
-          </a:prstGeom>
-          <a:noFill/>
-          <a:ln/>
-        </p:spPr>
-        <p:txBody>
-          <a:bodyPr wrap="square" lIns="0" tIns="0" rIns="0" bIns="0" rtlCol="0" anchor="ctr"/>
-          <a:lstStyle/>
-          <a:p>
-            <a:pPr marL="0" indent="0">
-              <a:buNone/>
-            </a:pPr>
-            <a:r>
-              <a:rPr lang="en-US" sz="1050" dirty="0">
-                <a:solidFill>
-                  <a:srgbClr val="16181D"/>
-                </a:solidFill>
-                <a:latin typeface="Inter Medium" pitchFamily="34" charset="0"/>
-                <a:ea typeface="Inter Medium" pitchFamily="34" charset="-122"/>
-                <a:cs typeface="Inter Medium" pitchFamily="34" charset="-120"/>
-              </a:rPr>
-              <a:t>8 Jan 2027</a:t>
-            </a:r>
-            <a:endParaRPr lang="en-US" sz="1050" dirty="0"/>
-          </a:p>
-        </p:txBody>
-      </p:sp>
-      <p:sp>
-        <p:nvSpPr>
-          <p:cNvPr id="50" name="joint-next-actions"/>
-          <p:cNvSpPr/>
-          <p:nvPr/>
-        </p:nvSpPr>
-        <p:spPr>
-          <a:xfrm>
-            <a:off x="5303520" y="1371600"/>
-            <a:ext cx="6156655" cy="3767328"/>
-          </a:xfrm>
-          <a:prstGeom prst="roundRect">
-            <a:avLst>
-              <a:gd name="adj" fmla="val 2913"/>
-            </a:avLst>
-          </a:prstGeom>
-          <a:ln w="9525">
-            <a:solidFill>
-              <a:srgbClr val="E6EAF4"/>
-            </a:solidFill>
-            <a:prstDash val="solid"/>
-          </a:ln>
-        </p:spPr>
       </p:sp>
     </p:spTree>
   </p:cSld>
@@ -6009,6 +3752,13 @@
             <a:prstDash val="solid"/>
           </a:ln>
         </p:spPr>
+        <p:txBody>
+          <a:bodyPr/>
+          <a:lstStyle/>
+          <a:p>
+            <a:endParaRPr lang="en-GB"/>
+          </a:p>
+        </p:txBody>
       </p:sp>
       <p:sp>
         <p:nvSpPr>
@@ -6032,6 +3782,13 @@
             <a:prstDash val="solid"/>
           </a:ln>
         </p:spPr>
+        <p:txBody>
+          <a:bodyPr/>
+          <a:lstStyle/>
+          <a:p>
+            <a:endParaRPr lang="en-GB"/>
+          </a:p>
+        </p:txBody>
       </p:sp>
       <p:sp>
         <p:nvSpPr>
@@ -6055,6 +3812,13 @@
             <a:prstDash val="solid"/>
           </a:ln>
         </p:spPr>
+        <p:txBody>
+          <a:bodyPr/>
+          <a:lstStyle/>
+          <a:p>
+            <a:endParaRPr lang="en-GB"/>
+          </a:p>
+        </p:txBody>
       </p:sp>
       <p:sp>
         <p:nvSpPr>
@@ -6078,6 +3842,13 @@
             <a:prstDash val="solid"/>
           </a:ln>
         </p:spPr>
+        <p:txBody>
+          <a:bodyPr/>
+          <a:lstStyle/>
+          <a:p>
+            <a:endParaRPr lang="en-GB"/>
+          </a:p>
+        </p:txBody>
       </p:sp>
       <p:sp>
         <p:nvSpPr>
@@ -6101,6 +3872,13 @@
             <a:prstDash val="solid"/>
           </a:ln>
         </p:spPr>
+        <p:txBody>
+          <a:bodyPr/>
+          <a:lstStyle/>
+          <a:p>
+            <a:endParaRPr lang="en-GB"/>
+          </a:p>
+        </p:txBody>
       </p:sp>
       <p:sp>
         <p:nvSpPr>
@@ -6408,7 +4186,7 @@
                 <a:ea typeface="Inter" pitchFamily="34" charset="-122"/>
                 <a:cs typeface="Inter" pitchFamily="34" charset="-120"/>
               </a:rPr>
-              <a:t>−35% vs pre-launch baseline, supplied by Northstar</a:t>
+              <a:t>−35% vs pre-launch baseline (1)</a:t>
             </a:r>
             <a:endParaRPr lang="en-US" sz="950" dirty="0"/>
           </a:p>
@@ -6564,7 +4342,7 @@
                 <a:ea typeface="Inter" pitchFamily="34" charset="-122"/>
                 <a:cs typeface="Inter" pitchFamily="34" charset="-120"/>
               </a:rPr>
-              <a:t>+12 pts vs pre-launch baseline, supplied by Northstar</a:t>
+              <a:t>+12 pts vs pre-launch baseline (1)</a:t>
             </a:r>
             <a:endParaRPr lang="en-US" sz="950" dirty="0"/>
           </a:p>
@@ -7375,7 +5153,7 @@
               <a:buNone/>
             </a:pPr>
             <a:r>
-              <a:rPr lang="en-US" sz="950" dirty="0">
+              <a:rPr lang="en-US" sz="950">
                 <a:solidFill>
                   <a:srgbClr val="5A5E63"/>
                 </a:solidFill>
@@ -7383,7 +5161,18 @@
                 <a:ea typeface="Inter" pitchFamily="34" charset="-122"/>
                 <a:cs typeface="Inter" pitchFamily="34" charset="-120"/>
               </a:rPr>
-              <a:t>The −35% handle-time and +12-point CSAT figures compare against Northstar’s pre-launch baselines, which are not in the August dataset; the in-month trends are measured directly.</a:t>
+              <a:t>(1) The </a:t>
+            </a:r>
+            <a:r>
+              <a:rPr lang="en-US" sz="950" dirty="0">
+                <a:solidFill>
+                  <a:srgbClr val="5A5E63"/>
+                </a:solidFill>
+                <a:latin typeface="Inter" pitchFamily="34" charset="0"/>
+                <a:ea typeface="Inter" pitchFamily="34" charset="-122"/>
+                <a:cs typeface="Inter" pitchFamily="34" charset="-120"/>
+              </a:rPr>
+              <a:t>−35% handle-time and +12-point CSAT figures compare against Northstar’s pre-launch baselines, which are not in the August dataset; the in-month trends are measured directly.</a:t>
             </a:r>
             <a:endParaRPr lang="en-US" sz="950" dirty="0"/>
           </a:p>
@@ -7409,7 +5198,7 @@
           </a:prstGeom>
           <a:extLst>
             <a:ext uri="{C572A759-6A51-4108-AA02-DFA0A04FC94B}">
-              <ma14:wrappingTextBoxFlag xmlns:ma14="http://schemas.microsoft.com/office/mac/drawingml/2011/main" xmlns="" val="0"/>
+              <ma14:wrappingTextBoxFlag xmlns="" xmlns:ma14="http://schemas.microsoft.com/office/mac/drawingml/2011/main" val="0"/>
             </a:ext>
           </a:extLst>
         </p:spPr>
@@ -7530,19 +5319,9 @@
           <a:bodyPr wrap="square" lIns="0" tIns="0" rIns="0" bIns="0" rtlCol="0" anchor="t"/>
           <a:lstStyle/>
           <a:p>
-            <a:pPr marL="0" indent="0" algn="l">
-              <a:buNone/>
-            </a:pPr>
-            <a:r>
-              <a:rPr lang="en-US" sz="2800" kern="0" spc="-70" dirty="0">
-                <a:solidFill>
-                  <a:srgbClr val="16181D"/>
-                </a:solidFill>
-                <a:latin typeface="Inter Medium" pitchFamily="34" charset="0"/>
-                <a:ea typeface="Inter Medium" pitchFamily="34" charset="-122"/>
-                <a:cs typeface="Inter Medium" pitchFamily="34" charset="-120"/>
-              </a:rPr>
-              <a:t>Operational health is 3.58 / 5, led by quality and outcomes</a:t>
+            <a:r>
+              <a:rPr lang="en-US" dirty="0"/>
+              <a:t>Operational health is on-track for current deployment stage</a:t>
             </a:r>
             <a:endParaRPr lang="en-US" sz="2800" dirty="0"/>
           </a:p>
@@ -7573,21 +5352,10 @@
           <a:bodyPr wrap="square" lIns="0" tIns="0" rIns="0" bIns="0" rtlCol="0" anchor="t"/>
           <a:lstStyle/>
           <a:p>
-            <a:pPr marL="0" indent="0">
-              <a:buNone/>
-            </a:pPr>
-            <a:r>
-              <a:rPr lang="en-US" sz="1300" dirty="0">
-                <a:solidFill>
-                  <a:srgbClr val="5A5E63"/>
-                </a:solidFill>
-                <a:latin typeface="Inter" pitchFamily="34" charset="0"/>
-                <a:ea typeface="Inter" pitchFamily="34" charset="-122"/>
-                <a:cs typeface="Inter" pitchFamily="34" charset="-120"/>
-              </a:rPr>
-              <a:t>Four operational pillars, each scored 1–5 on full-period averages for August. The same scoring as your dashboard.</a:t>
-            </a:r>
-            <a:endParaRPr lang="en-US" sz="1300" dirty="0"/>
+            <a:r>
+              <a:rPr lang="en-US" dirty="0"/>
+              <a:t>A strong start on all four operational pillars, each scored 1–5 on full-period averages for August. </a:t>
+            </a:r>
           </a:p>
         </p:txBody>
       </p:sp>
@@ -7612,6 +5380,13 @@
           </a:solidFill>
           <a:ln/>
         </p:spPr>
+        <p:txBody>
+          <a:bodyPr/>
+          <a:lstStyle/>
+          <a:p>
+            <a:endParaRPr lang="en-GB"/>
+          </a:p>
+        </p:txBody>
       </p:sp>
       <p:sp>
         <p:nvSpPr>
@@ -7634,6 +5409,13 @@
           </a:solidFill>
           <a:ln/>
         </p:spPr>
+        <p:txBody>
+          <a:bodyPr/>
+          <a:lstStyle/>
+          <a:p>
+            <a:endParaRPr lang="en-GB"/>
+          </a:p>
+        </p:txBody>
       </p:sp>
       <p:sp>
         <p:nvSpPr>
@@ -7654,6 +5436,13 @@
           </a:solidFill>
           <a:ln/>
         </p:spPr>
+        <p:txBody>
+          <a:bodyPr/>
+          <a:lstStyle/>
+          <a:p>
+            <a:endParaRPr lang="en-GB"/>
+          </a:p>
+        </p:txBody>
       </p:sp>
       <p:sp>
         <p:nvSpPr>
@@ -7677,6 +5466,13 @@
             <a:prstDash val="solid"/>
           </a:ln>
         </p:spPr>
+        <p:txBody>
+          <a:bodyPr/>
+          <a:lstStyle/>
+          <a:p>
+            <a:endParaRPr lang="en-GB"/>
+          </a:p>
+        </p:txBody>
       </p:sp>
       <p:sp>
         <p:nvSpPr>
@@ -7701,6 +5497,13 @@
             <a:prstDash val="solid"/>
           </a:ln>
         </p:spPr>
+        <p:txBody>
+          <a:bodyPr/>
+          <a:lstStyle/>
+          <a:p>
+            <a:endParaRPr lang="en-GB"/>
+          </a:p>
+        </p:txBody>
       </p:sp>
       <p:sp>
         <p:nvSpPr>
@@ -7888,6 +5691,13 @@
           </a:solidFill>
           <a:ln/>
         </p:spPr>
+        <p:txBody>
+          <a:bodyPr/>
+          <a:lstStyle/>
+          <a:p>
+            <a:endParaRPr lang="en-GB"/>
+          </a:p>
+        </p:txBody>
       </p:sp>
       <p:pic>
         <p:nvPicPr>
@@ -8010,6 +5820,13 @@
           </a:solidFill>
           <a:ln/>
         </p:spPr>
+        <p:txBody>
+          <a:bodyPr/>
+          <a:lstStyle/>
+          <a:p>
+            <a:endParaRPr lang="en-GB"/>
+          </a:p>
+        </p:txBody>
       </p:sp>
       <p:sp>
         <p:nvSpPr>
@@ -8030,6 +5847,13 @@
           </a:solidFill>
           <a:ln/>
         </p:spPr>
+        <p:txBody>
+          <a:bodyPr/>
+          <a:lstStyle/>
+          <a:p>
+            <a:endParaRPr lang="en-GB"/>
+          </a:p>
+        </p:txBody>
       </p:sp>
       <p:sp>
         <p:nvSpPr>
@@ -8050,6 +5874,13 @@
           </a:solidFill>
           <a:ln/>
         </p:spPr>
+        <p:txBody>
+          <a:bodyPr/>
+          <a:lstStyle/>
+          <a:p>
+            <a:endParaRPr lang="en-GB"/>
+          </a:p>
+        </p:txBody>
       </p:sp>
       <p:sp>
         <p:nvSpPr>
@@ -8070,6 +5901,13 @@
           </a:solidFill>
           <a:ln/>
         </p:spPr>
+        <p:txBody>
+          <a:bodyPr/>
+          <a:lstStyle/>
+          <a:p>
+            <a:endParaRPr lang="en-GB"/>
+          </a:p>
+        </p:txBody>
       </p:sp>
       <p:sp>
         <p:nvSpPr>
@@ -8090,6 +5928,13 @@
           </a:solidFill>
           <a:ln/>
         </p:spPr>
+        <p:txBody>
+          <a:bodyPr/>
+          <a:lstStyle/>
+          <a:p>
+            <a:endParaRPr lang="en-GB"/>
+          </a:p>
+        </p:txBody>
       </p:sp>
       <p:sp>
         <p:nvSpPr>
@@ -8110,6 +5955,13 @@
           </a:solidFill>
           <a:ln/>
         </p:spPr>
+        <p:txBody>
+          <a:bodyPr/>
+          <a:lstStyle/>
+          <a:p>
+            <a:endParaRPr lang="en-GB"/>
+          </a:p>
+        </p:txBody>
       </p:sp>
       <p:sp>
         <p:nvSpPr>
@@ -8130,6 +5982,13 @@
           </a:solidFill>
           <a:ln/>
         </p:spPr>
+        <p:txBody>
+          <a:bodyPr/>
+          <a:lstStyle/>
+          <a:p>
+            <a:endParaRPr lang="en-GB"/>
+          </a:p>
+        </p:txBody>
       </p:sp>
       <p:sp>
         <p:nvSpPr>
@@ -8150,6 +6009,13 @@
           </a:solidFill>
           <a:ln/>
         </p:spPr>
+        <p:txBody>
+          <a:bodyPr/>
+          <a:lstStyle/>
+          <a:p>
+            <a:endParaRPr lang="en-GB"/>
+          </a:p>
+        </p:txBody>
       </p:sp>
       <p:sp>
         <p:nvSpPr>
@@ -8170,6 +6036,13 @@
           </a:solidFill>
           <a:ln/>
         </p:spPr>
+        <p:txBody>
+          <a:bodyPr/>
+          <a:lstStyle/>
+          <a:p>
+            <a:endParaRPr lang="en-GB"/>
+          </a:p>
+        </p:txBody>
       </p:sp>
       <p:sp>
         <p:nvSpPr>
@@ -8232,6 +6105,13 @@
             <a:prstDash val="solid"/>
           </a:ln>
         </p:spPr>
+        <p:txBody>
+          <a:bodyPr/>
+          <a:lstStyle/>
+          <a:p>
+            <a:endParaRPr lang="en-GB"/>
+          </a:p>
+        </p:txBody>
       </p:sp>
       <p:sp>
         <p:nvSpPr>
@@ -8252,6 +6132,13 @@
           </a:solidFill>
           <a:ln/>
         </p:spPr>
+        <p:txBody>
+          <a:bodyPr/>
+          <a:lstStyle/>
+          <a:p>
+            <a:endParaRPr lang="en-GB"/>
+          </a:p>
+        </p:txBody>
       </p:sp>
       <p:pic>
         <p:nvPicPr>
@@ -8374,6 +6261,13 @@
           </a:solidFill>
           <a:ln/>
         </p:spPr>
+        <p:txBody>
+          <a:bodyPr/>
+          <a:lstStyle/>
+          <a:p>
+            <a:endParaRPr lang="en-GB"/>
+          </a:p>
+        </p:txBody>
       </p:sp>
       <p:sp>
         <p:nvSpPr>
@@ -8394,6 +6288,13 @@
           </a:solidFill>
           <a:ln/>
         </p:spPr>
+        <p:txBody>
+          <a:bodyPr/>
+          <a:lstStyle/>
+          <a:p>
+            <a:endParaRPr lang="en-GB"/>
+          </a:p>
+        </p:txBody>
       </p:sp>
       <p:sp>
         <p:nvSpPr>
@@ -8414,6 +6315,13 @@
           </a:solidFill>
           <a:ln/>
         </p:spPr>
+        <p:txBody>
+          <a:bodyPr/>
+          <a:lstStyle/>
+          <a:p>
+            <a:endParaRPr lang="en-GB"/>
+          </a:p>
+        </p:txBody>
       </p:sp>
       <p:sp>
         <p:nvSpPr>
@@ -8434,6 +6342,13 @@
           </a:solidFill>
           <a:ln/>
         </p:spPr>
+        <p:txBody>
+          <a:bodyPr/>
+          <a:lstStyle/>
+          <a:p>
+            <a:endParaRPr lang="en-GB"/>
+          </a:p>
+        </p:txBody>
       </p:sp>
       <p:sp>
         <p:nvSpPr>
@@ -8454,6 +6369,13 @@
           </a:solidFill>
           <a:ln/>
         </p:spPr>
+        <p:txBody>
+          <a:bodyPr/>
+          <a:lstStyle/>
+          <a:p>
+            <a:endParaRPr lang="en-GB"/>
+          </a:p>
+        </p:txBody>
       </p:sp>
       <p:sp>
         <p:nvSpPr>
@@ -8474,6 +6396,13 @@
           </a:solidFill>
           <a:ln/>
         </p:spPr>
+        <p:txBody>
+          <a:bodyPr/>
+          <a:lstStyle/>
+          <a:p>
+            <a:endParaRPr lang="en-GB"/>
+          </a:p>
+        </p:txBody>
       </p:sp>
       <p:sp>
         <p:nvSpPr>
@@ -8494,6 +6423,13 @@
           </a:solidFill>
           <a:ln/>
         </p:spPr>
+        <p:txBody>
+          <a:bodyPr/>
+          <a:lstStyle/>
+          <a:p>
+            <a:endParaRPr lang="en-GB"/>
+          </a:p>
+        </p:txBody>
       </p:sp>
       <p:sp>
         <p:nvSpPr>
@@ -8514,6 +6450,13 @@
           </a:solidFill>
           <a:ln/>
         </p:spPr>
+        <p:txBody>
+          <a:bodyPr/>
+          <a:lstStyle/>
+          <a:p>
+            <a:endParaRPr lang="en-GB"/>
+          </a:p>
+        </p:txBody>
       </p:sp>
       <p:sp>
         <p:nvSpPr>
@@ -8576,6 +6519,13 @@
             <a:prstDash val="solid"/>
           </a:ln>
         </p:spPr>
+        <p:txBody>
+          <a:bodyPr/>
+          <a:lstStyle/>
+          <a:p>
+            <a:endParaRPr lang="en-GB"/>
+          </a:p>
+        </p:txBody>
       </p:sp>
       <p:sp>
         <p:nvSpPr>
@@ -8596,6 +6546,13 @@
           </a:solidFill>
           <a:ln/>
         </p:spPr>
+        <p:txBody>
+          <a:bodyPr/>
+          <a:lstStyle/>
+          <a:p>
+            <a:endParaRPr lang="en-GB"/>
+          </a:p>
+        </p:txBody>
       </p:sp>
       <p:pic>
         <p:nvPicPr>
@@ -8718,6 +6675,13 @@
           </a:solidFill>
           <a:ln/>
         </p:spPr>
+        <p:txBody>
+          <a:bodyPr/>
+          <a:lstStyle/>
+          <a:p>
+            <a:endParaRPr lang="en-GB"/>
+          </a:p>
+        </p:txBody>
       </p:sp>
       <p:sp>
         <p:nvSpPr>
@@ -8738,6 +6702,13 @@
           </a:solidFill>
           <a:ln/>
         </p:spPr>
+        <p:txBody>
+          <a:bodyPr/>
+          <a:lstStyle/>
+          <a:p>
+            <a:endParaRPr lang="en-GB"/>
+          </a:p>
+        </p:txBody>
       </p:sp>
       <p:sp>
         <p:nvSpPr>
@@ -8758,6 +6729,13 @@
           </a:solidFill>
           <a:ln/>
         </p:spPr>
+        <p:txBody>
+          <a:bodyPr/>
+          <a:lstStyle/>
+          <a:p>
+            <a:endParaRPr lang="en-GB"/>
+          </a:p>
+        </p:txBody>
       </p:sp>
       <p:sp>
         <p:nvSpPr>
@@ -8778,6 +6756,13 @@
           </a:solidFill>
           <a:ln/>
         </p:spPr>
+        <p:txBody>
+          <a:bodyPr/>
+          <a:lstStyle/>
+          <a:p>
+            <a:endParaRPr lang="en-GB"/>
+          </a:p>
+        </p:txBody>
       </p:sp>
       <p:sp>
         <p:nvSpPr>
@@ -8798,6 +6783,13 @@
           </a:solidFill>
           <a:ln/>
         </p:spPr>
+        <p:txBody>
+          <a:bodyPr/>
+          <a:lstStyle/>
+          <a:p>
+            <a:endParaRPr lang="en-GB"/>
+          </a:p>
+        </p:txBody>
       </p:sp>
       <p:sp>
         <p:nvSpPr>
@@ -8818,6 +6810,13 @@
           </a:solidFill>
           <a:ln/>
         </p:spPr>
+        <p:txBody>
+          <a:bodyPr/>
+          <a:lstStyle/>
+          <a:p>
+            <a:endParaRPr lang="en-GB"/>
+          </a:p>
+        </p:txBody>
       </p:sp>
       <p:sp>
         <p:nvSpPr>
@@ -8838,6 +6837,13 @@
           </a:solidFill>
           <a:ln/>
         </p:spPr>
+        <p:txBody>
+          <a:bodyPr/>
+          <a:lstStyle/>
+          <a:p>
+            <a:endParaRPr lang="en-GB"/>
+          </a:p>
+        </p:txBody>
       </p:sp>
       <p:sp>
         <p:nvSpPr>
@@ -8858,6 +6864,13 @@
           </a:solidFill>
           <a:ln/>
         </p:spPr>
+        <p:txBody>
+          <a:bodyPr/>
+          <a:lstStyle/>
+          <a:p>
+            <a:endParaRPr lang="en-GB"/>
+          </a:p>
+        </p:txBody>
       </p:sp>
       <p:sp>
         <p:nvSpPr>
@@ -8878,6 +6891,13 @@
           </a:solidFill>
           <a:ln/>
         </p:spPr>
+        <p:txBody>
+          <a:bodyPr/>
+          <a:lstStyle/>
+          <a:p>
+            <a:endParaRPr lang="en-GB"/>
+          </a:p>
+        </p:txBody>
       </p:sp>
       <p:sp>
         <p:nvSpPr>
@@ -8940,6 +6960,13 @@
             <a:prstDash val="solid"/>
           </a:ln>
         </p:spPr>
+        <p:txBody>
+          <a:bodyPr/>
+          <a:lstStyle/>
+          <a:p>
+            <a:endParaRPr lang="en-GB"/>
+          </a:p>
+        </p:txBody>
       </p:sp>
       <p:sp>
         <p:nvSpPr>
@@ -8960,6 +6987,13 @@
           </a:solidFill>
           <a:ln/>
         </p:spPr>
+        <p:txBody>
+          <a:bodyPr/>
+          <a:lstStyle/>
+          <a:p>
+            <a:endParaRPr lang="en-GB"/>
+          </a:p>
+        </p:txBody>
       </p:sp>
       <p:pic>
         <p:nvPicPr>
@@ -9082,6 +7116,13 @@
           </a:solidFill>
           <a:ln/>
         </p:spPr>
+        <p:txBody>
+          <a:bodyPr/>
+          <a:lstStyle/>
+          <a:p>
+            <a:endParaRPr lang="en-GB"/>
+          </a:p>
+        </p:txBody>
       </p:sp>
       <p:sp>
         <p:nvSpPr>
@@ -9102,6 +7143,13 @@
           </a:solidFill>
           <a:ln/>
         </p:spPr>
+        <p:txBody>
+          <a:bodyPr/>
+          <a:lstStyle/>
+          <a:p>
+            <a:endParaRPr lang="en-GB"/>
+          </a:p>
+        </p:txBody>
       </p:sp>
       <p:sp>
         <p:nvSpPr>
@@ -9122,6 +7170,13 @@
           </a:solidFill>
           <a:ln/>
         </p:spPr>
+        <p:txBody>
+          <a:bodyPr/>
+          <a:lstStyle/>
+          <a:p>
+            <a:endParaRPr lang="en-GB"/>
+          </a:p>
+        </p:txBody>
       </p:sp>
       <p:sp>
         <p:nvSpPr>
@@ -9142,6 +7197,13 @@
           </a:solidFill>
           <a:ln/>
         </p:spPr>
+        <p:txBody>
+          <a:bodyPr/>
+          <a:lstStyle/>
+          <a:p>
+            <a:endParaRPr lang="en-GB"/>
+          </a:p>
+        </p:txBody>
       </p:sp>
       <p:sp>
         <p:nvSpPr>
@@ -9162,6 +7224,13 @@
           </a:solidFill>
           <a:ln/>
         </p:spPr>
+        <p:txBody>
+          <a:bodyPr/>
+          <a:lstStyle/>
+          <a:p>
+            <a:endParaRPr lang="en-GB"/>
+          </a:p>
+        </p:txBody>
       </p:sp>
       <p:sp>
         <p:nvSpPr>
@@ -9182,6 +7251,13 @@
           </a:solidFill>
           <a:ln/>
         </p:spPr>
+        <p:txBody>
+          <a:bodyPr/>
+          <a:lstStyle/>
+          <a:p>
+            <a:endParaRPr lang="en-GB"/>
+          </a:p>
+        </p:txBody>
       </p:sp>
       <p:sp>
         <p:nvSpPr>
@@ -9202,6 +7278,13 @@
           </a:solidFill>
           <a:ln/>
         </p:spPr>
+        <p:txBody>
+          <a:bodyPr/>
+          <a:lstStyle/>
+          <a:p>
+            <a:endParaRPr lang="en-GB"/>
+          </a:p>
+        </p:txBody>
       </p:sp>
       <p:sp>
         <p:nvSpPr>
@@ -9222,6 +7305,13 @@
           </a:solidFill>
           <a:ln/>
         </p:spPr>
+        <p:txBody>
+          <a:bodyPr/>
+          <a:lstStyle/>
+          <a:p>
+            <a:endParaRPr lang="en-GB"/>
+          </a:p>
+        </p:txBody>
       </p:sp>
       <p:sp>
         <p:nvSpPr>
@@ -9242,6 +7332,13 @@
           </a:solidFill>
           <a:ln/>
         </p:spPr>
+        <p:txBody>
+          <a:bodyPr/>
+          <a:lstStyle/>
+          <a:p>
+            <a:endParaRPr lang="en-GB"/>
+          </a:p>
+        </p:txBody>
       </p:sp>
       <p:sp>
         <p:nvSpPr>
@@ -9302,7 +7399,7 @@
           </a:prstGeom>
           <a:extLst>
             <a:ext uri="{C572A759-6A51-4108-AA02-DFA0A04FC94B}">
-              <ma14:wrappingTextBoxFlag xmlns:ma14="http://schemas.microsoft.com/office/mac/drawingml/2011/main" xmlns="" val="0"/>
+              <ma14:wrappingTextBoxFlag xmlns="" xmlns:ma14="http://schemas.microsoft.com/office/mac/drawingml/2011/main" val="0"/>
             </a:ext>
           </a:extLst>
         </p:spPr>
@@ -9339,1166 +7436,6 @@
 </file>
 
 <file path=ppt/slides/slide4.xml><?xml version="1.0" encoding="utf-8"?>
-<p:sld xmlns:a="http://schemas.openxmlformats.org/drawingml/2006/main" xmlns:r="http://schemas.openxmlformats.org/officeDocument/2006/relationships" xmlns:p="http://schemas.openxmlformats.org/presentationml/2006/main">
-  <p:cSld name="Slide 4">
-    <p:spTree>
-      <p:nvGrpSpPr>
-        <p:cNvPr id="1" name=""/>
-        <p:cNvGrpSpPr/>
-        <p:nvPr/>
-      </p:nvGrpSpPr>
-      <p:grpSpPr>
-        <a:xfrm>
-          <a:off x="0" y="0"/>
-          <a:ext cx="0" cy="0"/>
-          <a:chOff x="0" y="0"/>
-          <a:chExt cx="0" cy="0"/>
-        </a:xfrm>
-      </p:grpSpPr>
-      <p:sp>
-        <p:nvSpPr>
-          <p:cNvPr id="2" name="Text 5"/>
-          <p:cNvSpPr>
-            <a:spLocks noGrp="1"/>
-          </p:cNvSpPr>
-          <p:nvPr>
-            <p:ph type="body" idx="106" hasCustomPrompt="1"/>
-          </p:nvPr>
-        </p:nvSpPr>
-        <p:spPr>
-          <a:xfrm>
-            <a:off x="2881191" y="219456"/>
-            <a:ext cx="3200400" cy="274320"/>
-          </a:xfrm>
-          <a:prstGeom prst="rect">
-            <a:avLst/>
-          </a:prstGeom>
-          <a:noFill/>
-          <a:ln/>
-        </p:spPr>
-        <p:txBody>
-          <a:bodyPr wrap="square" lIns="0" tIns="0" rIns="0" bIns="0" rtlCol="0" anchor="ctr"/>
-          <a:lstStyle/>
-          <a:p>
-            <a:pPr marL="0" indent="0">
-              <a:buNone/>
-            </a:pPr>
-            <a:r>
-              <a:rPr lang="en-US" sz="1100" dirty="0">
-                <a:solidFill>
-                  <a:srgbClr val="16181D"/>
-                </a:solidFill>
-                <a:latin typeface="Inter Medium" pitchFamily="34" charset="0"/>
-                <a:ea typeface="Inter Medium" pitchFamily="34" charset="-122"/>
-                <a:cs typeface="Inter Medium" pitchFamily="34" charset="-120"/>
-              </a:rPr>
-              <a:t>Answer quality</a:t>
-            </a:r>
-            <a:endParaRPr lang="en-US" sz="1100" dirty="0"/>
-          </a:p>
-        </p:txBody>
-      </p:sp>
-      <p:sp>
-        <p:nvSpPr>
-          <p:cNvPr id="3" name="Text 5"/>
-          <p:cNvSpPr>
-            <a:spLocks noGrp="1"/>
-          </p:cNvSpPr>
-          <p:nvPr>
-            <p:ph type="title" idx="107" hasCustomPrompt="1"/>
-          </p:nvPr>
-        </p:nvSpPr>
-        <p:spPr>
-          <a:xfrm>
-            <a:off x="731520" y="969264"/>
-            <a:ext cx="10728655" cy="566928"/>
-          </a:xfrm>
-          <a:prstGeom prst="rect">
-            <a:avLst/>
-          </a:prstGeom>
-          <a:noFill/>
-          <a:ln/>
-        </p:spPr>
-        <p:txBody>
-          <a:bodyPr wrap="square" lIns="0" tIns="0" rIns="0" bIns="0" rtlCol="0" anchor="t"/>
-          <a:lstStyle/>
-          <a:p>
-            <a:pPr marL="0" indent="0" algn="l">
-              <a:buNone/>
-            </a:pPr>
-            <a:r>
-              <a:rPr lang="en-US" sz="2800" kern="0" spc="-70" dirty="0">
-                <a:solidFill>
-                  <a:srgbClr val="16181D"/>
-                </a:solidFill>
-                <a:latin typeface="Inter Medium" pitchFamily="34" charset="0"/>
-                <a:ea typeface="Inter Medium" pitchFamily="34" charset="-122"/>
-                <a:cs typeface="Inter Medium" pitchFamily="34" charset="-120"/>
-              </a:rPr>
-              <a:t>Quality improved every week, and adoption is still rising</a:t>
-            </a:r>
-            <a:endParaRPr lang="en-US" sz="2800" dirty="0"/>
-          </a:p>
-        </p:txBody>
-      </p:sp>
-      <p:sp>
-        <p:nvSpPr>
-          <p:cNvPr id="4" name="Text 5"/>
-          <p:cNvSpPr>
-            <a:spLocks noGrp="1"/>
-          </p:cNvSpPr>
-          <p:nvPr>
-            <p:ph type="body" idx="108" hasCustomPrompt="1"/>
-          </p:nvPr>
-        </p:nvSpPr>
-        <p:spPr>
-          <a:xfrm>
-            <a:off x="731520" y="1517904"/>
-            <a:ext cx="10728655" cy="457200"/>
-          </a:xfrm>
-          <a:prstGeom prst="rect">
-            <a:avLst/>
-          </a:prstGeom>
-          <a:noFill/>
-          <a:ln/>
-        </p:spPr>
-        <p:txBody>
-          <a:bodyPr wrap="square" lIns="0" tIns="0" rIns="0" bIns="0" rtlCol="0" anchor="t"/>
-          <a:lstStyle/>
-          <a:p>
-            <a:pPr marL="0" indent="0">
-              <a:buNone/>
-            </a:pPr>
-            <a:r>
-              <a:rPr lang="en-US" sz="1300" dirty="0">
-                <a:solidFill>
-                  <a:srgbClr val="5A5E63"/>
-                </a:solidFill>
-                <a:latin typeface="Inter" pitchFamily="34" charset="0"/>
-                <a:ea typeface="Inter" pitchFamily="34" charset="-122"/>
-                <a:cs typeface="Inter" pitchFamily="34" charset="-120"/>
-              </a:rPr>
-              <a:t>Daily values for August, with the operational events marked as on your dashboard.</a:t>
-            </a:r>
-            <a:endParaRPr lang="en-US" sz="1300" dirty="0"/>
-          </a:p>
-        </p:txBody>
-      </p:sp>
-      <p:sp>
-        <p:nvSpPr>
-          <p:cNvPr id="5" name="chart-automation"/>
-          <p:cNvSpPr/>
-          <p:nvPr/>
-        </p:nvSpPr>
-        <p:spPr>
-          <a:xfrm>
-            <a:off x="731520" y="2103120"/>
-            <a:ext cx="5227168" cy="3246120"/>
-          </a:xfrm>
-          <a:prstGeom prst="roundRect">
-            <a:avLst>
-              <a:gd name="adj" fmla="val 3380"/>
-            </a:avLst>
-          </a:prstGeom>
-          <a:solidFill>
-            <a:srgbClr val="FFFFFF"/>
-          </a:solidFill>
-          <a:ln w="9525">
-            <a:solidFill>
-              <a:srgbClr val="E6EAF4"/>
-            </a:solidFill>
-            <a:prstDash val="solid"/>
-          </a:ln>
-        </p:spPr>
-      </p:sp>
-      <p:sp>
-        <p:nvSpPr>
-          <p:cNvPr id="6" name="Text 4"/>
-          <p:cNvSpPr txBox="1"/>
-          <p:nvPr/>
-        </p:nvSpPr>
-        <p:spPr>
-          <a:xfrm>
-            <a:off x="960120" y="2304288"/>
-            <a:ext cx="4769968" cy="274320"/>
-          </a:xfrm>
-          <a:prstGeom prst="rect">
-            <a:avLst/>
-          </a:prstGeom>
-          <a:noFill/>
-          <a:ln/>
-        </p:spPr>
-        <p:txBody>
-          <a:bodyPr wrap="square" lIns="0" tIns="0" rIns="0" bIns="0" rtlCol="0" anchor="t"/>
-          <a:lstStyle/>
-          <a:p>
-            <a:pPr marL="0" indent="0">
-              <a:buNone/>
-            </a:pPr>
-            <a:r>
-              <a:rPr lang="en-US" sz="1400" dirty="0">
-                <a:solidFill>
-                  <a:srgbClr val="16181D"/>
-                </a:solidFill>
-                <a:latin typeface="Inter Medium" pitchFamily="34" charset="0"/>
-                <a:ea typeface="Inter Medium" pitchFamily="34" charset="-122"/>
-                <a:cs typeface="Inter Medium" pitchFamily="34" charset="-120"/>
-              </a:rPr>
-              <a:t>Tier-1 automation rate</a:t>
-            </a:r>
-            <a:endParaRPr lang="en-US" sz="1400" dirty="0"/>
-          </a:p>
-        </p:txBody>
-      </p:sp>
-      <p:sp>
-        <p:nvSpPr>
-          <p:cNvPr id="7" name="Text 5"/>
-          <p:cNvSpPr txBox="1"/>
-          <p:nvPr/>
-        </p:nvSpPr>
-        <p:spPr>
-          <a:xfrm>
-            <a:off x="960120" y="2596896"/>
-            <a:ext cx="4769968" cy="457200"/>
-          </a:xfrm>
-          <a:prstGeom prst="rect">
-            <a:avLst/>
-          </a:prstGeom>
-          <a:noFill/>
-          <a:ln/>
-        </p:spPr>
-        <p:txBody>
-          <a:bodyPr wrap="square" lIns="0" tIns="0" rIns="0" bIns="0" rtlCol="0" anchor="t"/>
-          <a:lstStyle/>
-          <a:p>
-            <a:pPr marL="0" indent="0">
-              <a:buNone/>
-            </a:pPr>
-            <a:r>
-              <a:rPr lang="en-US" sz="1050" dirty="0">
-                <a:solidFill>
-                  <a:srgbClr val="5A5E63"/>
-                </a:solidFill>
-                <a:latin typeface="Inter" pitchFamily="34" charset="0"/>
-                <a:ea typeface="Inter" pitchFamily="34" charset="-122"/>
-                <a:cs typeface="Inter" pitchFamily="34" charset="-120"/>
-              </a:rPr>
-              <a:t>Rose from 65.8% in week 1 to 70.1% in the final week, while automated tickets grew +15% against total tickets +8%.</a:t>
-            </a:r>
-            <a:endParaRPr lang="en-US" sz="1050" dirty="0"/>
-          </a:p>
-        </p:txBody>
-      </p:sp>
-      <p:graphicFrame>
-        <p:nvGraphicFramePr>
-          <p:cNvPr id="8" name="Chart 0"/>
-          <p:cNvGraphicFramePr/>
-          <p:nvPr/>
-        </p:nvGraphicFramePr>
-        <p:xfrm>
-          <a:off x="841248" y="3090672"/>
-          <a:ext cx="4952848" cy="1801368"/>
-        </p:xfrm>
-        <a:graphic>
-          <a:graphicData uri="http://schemas.openxmlformats.org/drawingml/2006/chart">
-            <c:chart xmlns:c="http://schemas.openxmlformats.org/drawingml/2006/chart" xmlns:r="http://schemas.openxmlformats.org/officeDocument/2006/relationships" r:id="rId3"/>
-          </a:graphicData>
-        </a:graphic>
-      </p:graphicFrame>
-      <p:sp>
-        <p:nvSpPr>
-          <p:cNvPr id="9" name="Text 6"/>
-          <p:cNvSpPr txBox="1"/>
-          <p:nvPr/>
-        </p:nvSpPr>
-        <p:spPr>
-          <a:xfrm>
-            <a:off x="1317104" y="3501969"/>
-            <a:ext cx="2194560" cy="182880"/>
-          </a:xfrm>
-          <a:prstGeom prst="rect">
-            <a:avLst/>
-          </a:prstGeom>
-          <a:noFill/>
-          <a:ln/>
-        </p:spPr>
-        <p:txBody>
-          <a:bodyPr wrap="square" lIns="0" tIns="0" rIns="0" bIns="0" rtlCol="0" anchor="t"/>
-          <a:lstStyle/>
-          <a:p>
-            <a:pPr marL="0" indent="0">
-              <a:buNone/>
-            </a:pPr>
-            <a:r>
-              <a:rPr lang="en-US" sz="850" dirty="0">
-                <a:solidFill>
-                  <a:srgbClr val="5A5E63"/>
-                </a:solidFill>
-                <a:latin typeface="Inter" pitchFamily="34" charset="0"/>
-                <a:ea typeface="Inter" pitchFamily="34" charset="-122"/>
-                <a:cs typeface="Inter" pitchFamily="34" charset="-120"/>
-              </a:rPr>
-              <a:t>70%</a:t>
-            </a:r>
-            <a:endParaRPr lang="en-US" sz="850" dirty="0"/>
-          </a:p>
-        </p:txBody>
-      </p:sp>
-      <p:sp>
-        <p:nvSpPr>
-          <p:cNvPr id="10" name="Shape 7"/>
-          <p:cNvSpPr/>
-          <p:nvPr/>
-        </p:nvSpPr>
-        <p:spPr>
-          <a:xfrm>
-            <a:off x="2477685" y="3162727"/>
-            <a:ext cx="0" cy="1441094"/>
-          </a:xfrm>
-          <a:prstGeom prst="line">
-            <a:avLst/>
-          </a:prstGeom>
-          <a:noFill/>
-          <a:ln w="12700">
-            <a:solidFill>
-              <a:srgbClr val="F14539"/>
-            </a:solidFill>
-            <a:prstDash val="dash"/>
-          </a:ln>
-        </p:spPr>
-      </p:sp>
-      <p:sp>
-        <p:nvSpPr>
-          <p:cNvPr id="11" name="Shape 8"/>
-          <p:cNvSpPr/>
-          <p:nvPr/>
-        </p:nvSpPr>
-        <p:spPr>
-          <a:xfrm>
-            <a:off x="4193607" y="3162727"/>
-            <a:ext cx="0" cy="1441094"/>
-          </a:xfrm>
-          <a:prstGeom prst="line">
-            <a:avLst/>
-          </a:prstGeom>
-          <a:noFill/>
-          <a:ln w="12700">
-            <a:solidFill>
-              <a:srgbClr val="F14539"/>
-            </a:solidFill>
-            <a:prstDash val="dash"/>
-          </a:ln>
-        </p:spPr>
-      </p:sp>
-      <p:sp>
-        <p:nvSpPr>
-          <p:cNvPr id="12" name="Shape 9"/>
-          <p:cNvSpPr/>
-          <p:nvPr/>
-        </p:nvSpPr>
-        <p:spPr>
-          <a:xfrm>
-            <a:off x="4622587" y="3162727"/>
-            <a:ext cx="0" cy="1441094"/>
-          </a:xfrm>
-          <a:prstGeom prst="line">
-            <a:avLst/>
-          </a:prstGeom>
-          <a:noFill/>
-          <a:ln w="12700">
-            <a:solidFill>
-              <a:srgbClr val="9D72FE"/>
-            </a:solidFill>
-            <a:prstDash val="dash"/>
-          </a:ln>
-        </p:spPr>
-      </p:sp>
-      <p:sp>
-        <p:nvSpPr>
-          <p:cNvPr id="13" name="Shape 10"/>
-          <p:cNvSpPr/>
-          <p:nvPr/>
-        </p:nvSpPr>
-        <p:spPr>
-          <a:xfrm>
-            <a:off x="960120" y="5111496"/>
-            <a:ext cx="182880" cy="0"/>
-          </a:xfrm>
-          <a:prstGeom prst="line">
-            <a:avLst/>
-          </a:prstGeom>
-          <a:noFill/>
-          <a:ln w="25400">
-            <a:solidFill>
-              <a:srgbClr val="6720FF"/>
-            </a:solidFill>
-            <a:prstDash val="solid"/>
-          </a:ln>
-        </p:spPr>
-      </p:sp>
-      <p:sp>
-        <p:nvSpPr>
-          <p:cNvPr id="14" name="Text 11"/>
-          <p:cNvSpPr txBox="1"/>
-          <p:nvPr/>
-        </p:nvSpPr>
-        <p:spPr>
-          <a:xfrm>
-            <a:off x="1207008" y="5020056"/>
-            <a:ext cx="1024128" cy="182880"/>
-          </a:xfrm>
-          <a:prstGeom prst="rect">
-            <a:avLst/>
-          </a:prstGeom>
-          <a:noFill/>
-          <a:ln/>
-        </p:spPr>
-        <p:txBody>
-          <a:bodyPr wrap="square" lIns="0" tIns="0" rIns="0" bIns="0" rtlCol="0" anchor="t"/>
-          <a:lstStyle/>
-          <a:p>
-            <a:pPr marL="0" indent="0">
-              <a:buNone/>
-            </a:pPr>
-            <a:r>
-              <a:rPr lang="en-US" sz="950" dirty="0">
-                <a:solidFill>
-                  <a:srgbClr val="28282E"/>
-                </a:solidFill>
-                <a:latin typeface="Inter" pitchFamily="34" charset="0"/>
-                <a:ea typeface="Inter" pitchFamily="34" charset="-122"/>
-                <a:cs typeface="Inter" pitchFamily="34" charset="-120"/>
-              </a:rPr>
-              <a:t>Automation rate</a:t>
-            </a:r>
-            <a:endParaRPr lang="en-US" sz="950" dirty="0"/>
-          </a:p>
-        </p:txBody>
-      </p:sp>
-      <p:sp>
-        <p:nvSpPr>
-          <p:cNvPr id="15" name="Shape 12"/>
-          <p:cNvSpPr/>
-          <p:nvPr/>
-        </p:nvSpPr>
-        <p:spPr>
-          <a:xfrm>
-            <a:off x="2395728" y="5111496"/>
-            <a:ext cx="182880" cy="0"/>
-          </a:xfrm>
-          <a:prstGeom prst="line">
-            <a:avLst/>
-          </a:prstGeom>
-          <a:noFill/>
-          <a:ln w="25400">
-            <a:solidFill>
-              <a:srgbClr val="F14539"/>
-            </a:solidFill>
-            <a:prstDash val="dash"/>
-          </a:ln>
-        </p:spPr>
-      </p:sp>
-      <p:sp>
-        <p:nvSpPr>
-          <p:cNvPr id="16" name="Text 13"/>
-          <p:cNvSpPr txBox="1"/>
-          <p:nvPr/>
-        </p:nvSpPr>
-        <p:spPr>
-          <a:xfrm>
-            <a:off x="2642616" y="5020056"/>
-            <a:ext cx="588874" cy="182880"/>
-          </a:xfrm>
-          <a:prstGeom prst="rect">
-            <a:avLst/>
-          </a:prstGeom>
-          <a:noFill/>
-          <a:ln/>
-        </p:spPr>
-        <p:txBody>
-          <a:bodyPr wrap="square" lIns="0" tIns="0" rIns="0" bIns="0" rtlCol="0" anchor="t"/>
-          <a:lstStyle/>
-          <a:p>
-            <a:pPr marL="0" indent="0">
-              <a:buNone/>
-            </a:pPr>
-            <a:r>
-              <a:rPr lang="en-US" sz="950" dirty="0">
-                <a:solidFill>
-                  <a:srgbClr val="28282E"/>
-                </a:solidFill>
-                <a:latin typeface="Inter" pitchFamily="34" charset="0"/>
-                <a:ea typeface="Inter" pitchFamily="34" charset="-122"/>
-                <a:cs typeface="Inter" pitchFamily="34" charset="-120"/>
-              </a:rPr>
-              <a:t>Incident</a:t>
-            </a:r>
-            <a:endParaRPr lang="en-US" sz="950" dirty="0"/>
-          </a:p>
-        </p:txBody>
-      </p:sp>
-      <p:sp>
-        <p:nvSpPr>
-          <p:cNvPr id="17" name="Shape 14"/>
-          <p:cNvSpPr/>
-          <p:nvPr/>
-        </p:nvSpPr>
-        <p:spPr>
-          <a:xfrm>
-            <a:off x="3396082" y="5111496"/>
-            <a:ext cx="182880" cy="0"/>
-          </a:xfrm>
-          <a:prstGeom prst="line">
-            <a:avLst/>
-          </a:prstGeom>
-          <a:noFill/>
-          <a:ln w="25400">
-            <a:solidFill>
-              <a:srgbClr val="9D72FE"/>
-            </a:solidFill>
-            <a:prstDash val="dash"/>
-          </a:ln>
-        </p:spPr>
-      </p:sp>
-      <p:sp>
-        <p:nvSpPr>
-          <p:cNvPr id="18" name="Text 15"/>
-          <p:cNvSpPr txBox="1"/>
-          <p:nvPr/>
-        </p:nvSpPr>
-        <p:spPr>
-          <a:xfrm>
-            <a:off x="3642970" y="5020056"/>
-            <a:ext cx="464515" cy="182880"/>
-          </a:xfrm>
-          <a:prstGeom prst="rect">
-            <a:avLst/>
-          </a:prstGeom>
-          <a:noFill/>
-          <a:ln/>
-        </p:spPr>
-        <p:txBody>
-          <a:bodyPr wrap="square" lIns="0" tIns="0" rIns="0" bIns="0" rtlCol="0" anchor="t"/>
-          <a:lstStyle/>
-          <a:p>
-            <a:pPr marL="0" indent="0">
-              <a:buNone/>
-            </a:pPr>
-            <a:r>
-              <a:rPr lang="en-US" sz="950" dirty="0">
-                <a:solidFill>
-                  <a:srgbClr val="28282E"/>
-                </a:solidFill>
-                <a:latin typeface="Inter" pitchFamily="34" charset="0"/>
-                <a:ea typeface="Inter" pitchFamily="34" charset="-122"/>
-                <a:cs typeface="Inter" pitchFamily="34" charset="-120"/>
-              </a:rPr>
-              <a:t>Change</a:t>
-            </a:r>
-            <a:endParaRPr lang="en-US" sz="950" dirty="0"/>
-          </a:p>
-        </p:txBody>
-      </p:sp>
-      <p:sp>
-        <p:nvSpPr>
-          <p:cNvPr id="19" name="chart-quality"/>
-          <p:cNvSpPr/>
-          <p:nvPr/>
-        </p:nvSpPr>
-        <p:spPr>
-          <a:xfrm>
-            <a:off x="6233008" y="2103120"/>
-            <a:ext cx="5227168" cy="3246120"/>
-          </a:xfrm>
-          <a:prstGeom prst="roundRect">
-            <a:avLst>
-              <a:gd name="adj" fmla="val 3380"/>
-            </a:avLst>
-          </a:prstGeom>
-          <a:solidFill>
-            <a:srgbClr val="FFFFFF"/>
-          </a:solidFill>
-          <a:ln w="9525">
-            <a:solidFill>
-              <a:srgbClr val="E6EAF4"/>
-            </a:solidFill>
-            <a:prstDash val="solid"/>
-          </a:ln>
-        </p:spPr>
-      </p:sp>
-      <p:sp>
-        <p:nvSpPr>
-          <p:cNvPr id="20" name="Text 17"/>
-          <p:cNvSpPr txBox="1"/>
-          <p:nvPr/>
-        </p:nvSpPr>
-        <p:spPr>
-          <a:xfrm>
-            <a:off x="6461608" y="2304288"/>
-            <a:ext cx="4769968" cy="274320"/>
-          </a:xfrm>
-          <a:prstGeom prst="rect">
-            <a:avLst/>
-          </a:prstGeom>
-          <a:noFill/>
-          <a:ln/>
-        </p:spPr>
-        <p:txBody>
-          <a:bodyPr wrap="square" lIns="0" tIns="0" rIns="0" bIns="0" rtlCol="0" anchor="t"/>
-          <a:lstStyle/>
-          <a:p>
-            <a:pPr marL="0" indent="0">
-              <a:buNone/>
-            </a:pPr>
-            <a:r>
-              <a:rPr lang="en-US" sz="1400" dirty="0">
-                <a:solidFill>
-                  <a:srgbClr val="16181D"/>
-                </a:solidFill>
-                <a:latin typeface="Inter Medium" pitchFamily="34" charset="0"/>
-                <a:ea typeface="Inter Medium" pitchFamily="34" charset="-122"/>
-                <a:cs typeface="Inter Medium" pitchFamily="34" charset="-120"/>
-              </a:rPr>
-              <a:t>Grounding and eval pass</a:t>
-            </a:r>
-            <a:endParaRPr lang="en-US" sz="1400" dirty="0"/>
-          </a:p>
-        </p:txBody>
-      </p:sp>
-      <p:sp>
-        <p:nvSpPr>
-          <p:cNvPr id="21" name="Text 18"/>
-          <p:cNvSpPr txBox="1"/>
-          <p:nvPr/>
-        </p:nvSpPr>
-        <p:spPr>
-          <a:xfrm>
-            <a:off x="6461608" y="2596896"/>
-            <a:ext cx="4769968" cy="457200"/>
-          </a:xfrm>
-          <a:prstGeom prst="rect">
-            <a:avLst/>
-          </a:prstGeom>
-          <a:noFill/>
-          <a:ln/>
-        </p:spPr>
-        <p:txBody>
-          <a:bodyPr wrap="square" lIns="0" tIns="0" rIns="0" bIns="0" rtlCol="0" anchor="t"/>
-          <a:lstStyle/>
-          <a:p>
-            <a:pPr marL="0" indent="0">
-              <a:buNone/>
-            </a:pPr>
-            <a:r>
-              <a:rPr lang="en-US" sz="1050" dirty="0">
-                <a:solidFill>
-                  <a:srgbClr val="5A5E63"/>
-                </a:solidFill>
-                <a:latin typeface="Inter" pitchFamily="34" charset="0"/>
-                <a:ea typeface="Inter" pitchFamily="34" charset="-122"/>
-                <a:cs typeface="Inter" pitchFamily="34" charset="-120"/>
-              </a:rPr>
-              <a:t>Grounded answers 92.2% → 96.0%, eval pass 91.4% → 94.8%, escalations −2.7 pts (week 1 → week 4).</a:t>
-            </a:r>
-            <a:endParaRPr lang="en-US" sz="1050" dirty="0"/>
-          </a:p>
-        </p:txBody>
-      </p:sp>
-      <p:graphicFrame>
-        <p:nvGraphicFramePr>
-          <p:cNvPr id="22" name="Chart 1"/>
-          <p:cNvGraphicFramePr/>
-          <p:nvPr/>
-        </p:nvGraphicFramePr>
-        <p:xfrm>
-          <a:off x="6342736" y="3090672"/>
-          <a:ext cx="4952848" cy="1801368"/>
-        </p:xfrm>
-        <a:graphic>
-          <a:graphicData uri="http://schemas.openxmlformats.org/drawingml/2006/chart">
-            <c:chart xmlns:c="http://schemas.openxmlformats.org/drawingml/2006/chart" xmlns:r="http://schemas.openxmlformats.org/officeDocument/2006/relationships" r:id="rId4"/>
-          </a:graphicData>
-        </a:graphic>
-      </p:graphicFrame>
-      <p:sp>
-        <p:nvSpPr>
-          <p:cNvPr id="23" name="Shape 19"/>
-          <p:cNvSpPr/>
-          <p:nvPr/>
-        </p:nvSpPr>
-        <p:spPr>
-          <a:xfrm>
-            <a:off x="7979172" y="3162727"/>
-            <a:ext cx="0" cy="1441094"/>
-          </a:xfrm>
-          <a:prstGeom prst="line">
-            <a:avLst/>
-          </a:prstGeom>
-          <a:noFill/>
-          <a:ln w="12700">
-            <a:solidFill>
-              <a:srgbClr val="F14539"/>
-            </a:solidFill>
-            <a:prstDash val="dash"/>
-          </a:ln>
-        </p:spPr>
-      </p:sp>
-      <p:sp>
-        <p:nvSpPr>
-          <p:cNvPr id="24" name="Shape 20"/>
-          <p:cNvSpPr/>
-          <p:nvPr/>
-        </p:nvSpPr>
-        <p:spPr>
-          <a:xfrm>
-            <a:off x="9695094" y="3162727"/>
-            <a:ext cx="0" cy="1441094"/>
-          </a:xfrm>
-          <a:prstGeom prst="line">
-            <a:avLst/>
-          </a:prstGeom>
-          <a:noFill/>
-          <a:ln w="12700">
-            <a:solidFill>
-              <a:srgbClr val="F14539"/>
-            </a:solidFill>
-            <a:prstDash val="dash"/>
-          </a:ln>
-        </p:spPr>
-      </p:sp>
-      <p:sp>
-        <p:nvSpPr>
-          <p:cNvPr id="25" name="Shape 21"/>
-          <p:cNvSpPr/>
-          <p:nvPr/>
-        </p:nvSpPr>
-        <p:spPr>
-          <a:xfrm>
-            <a:off x="10124075" y="3162727"/>
-            <a:ext cx="0" cy="1441094"/>
-          </a:xfrm>
-          <a:prstGeom prst="line">
-            <a:avLst/>
-          </a:prstGeom>
-          <a:noFill/>
-          <a:ln w="12700">
-            <a:solidFill>
-              <a:srgbClr val="9D72FE"/>
-            </a:solidFill>
-            <a:prstDash val="dash"/>
-          </a:ln>
-        </p:spPr>
-      </p:sp>
-      <p:sp>
-        <p:nvSpPr>
-          <p:cNvPr id="26" name="Shape 22"/>
-          <p:cNvSpPr/>
-          <p:nvPr/>
-        </p:nvSpPr>
-        <p:spPr>
-          <a:xfrm>
-            <a:off x="6461608" y="5111496"/>
-            <a:ext cx="182880" cy="0"/>
-          </a:xfrm>
-          <a:prstGeom prst="line">
-            <a:avLst/>
-          </a:prstGeom>
-          <a:noFill/>
-          <a:ln w="25400">
-            <a:solidFill>
-              <a:srgbClr val="6720FF"/>
-            </a:solidFill>
-            <a:prstDash val="solid"/>
-          </a:ln>
-        </p:spPr>
-      </p:sp>
-      <p:sp>
-        <p:nvSpPr>
-          <p:cNvPr id="27" name="Text 23"/>
-          <p:cNvSpPr txBox="1"/>
-          <p:nvPr/>
-        </p:nvSpPr>
-        <p:spPr>
-          <a:xfrm>
-            <a:off x="6708496" y="5020056"/>
-            <a:ext cx="1086307" cy="182880"/>
-          </a:xfrm>
-          <a:prstGeom prst="rect">
-            <a:avLst/>
-          </a:prstGeom>
-          <a:noFill/>
-          <a:ln/>
-        </p:spPr>
-        <p:txBody>
-          <a:bodyPr wrap="square" lIns="0" tIns="0" rIns="0" bIns="0" rtlCol="0" anchor="t"/>
-          <a:lstStyle/>
-          <a:p>
-            <a:pPr marL="0" indent="0">
-              <a:buNone/>
-            </a:pPr>
-            <a:r>
-              <a:rPr lang="en-US" sz="950" dirty="0">
-                <a:solidFill>
-                  <a:srgbClr val="28282E"/>
-                </a:solidFill>
-                <a:latin typeface="Inter" pitchFamily="34" charset="0"/>
-                <a:ea typeface="Inter" pitchFamily="34" charset="-122"/>
-                <a:cs typeface="Inter" pitchFamily="34" charset="-120"/>
-              </a:rPr>
-              <a:t>Grounded answers</a:t>
-            </a:r>
-            <a:endParaRPr lang="en-US" sz="950" dirty="0"/>
-          </a:p>
-        </p:txBody>
-      </p:sp>
-      <p:sp>
-        <p:nvSpPr>
-          <p:cNvPr id="28" name="Shape 24"/>
-          <p:cNvSpPr/>
-          <p:nvPr/>
-        </p:nvSpPr>
-        <p:spPr>
-          <a:xfrm>
-            <a:off x="7959395" y="5111496"/>
-            <a:ext cx="182880" cy="0"/>
-          </a:xfrm>
-          <a:prstGeom prst="line">
-            <a:avLst/>
-          </a:prstGeom>
-          <a:noFill/>
-          <a:ln w="25400">
-            <a:solidFill>
-              <a:srgbClr val="1756FF"/>
-            </a:solidFill>
-            <a:prstDash val="solid"/>
-          </a:ln>
-        </p:spPr>
-      </p:sp>
-      <p:sp>
-        <p:nvSpPr>
-          <p:cNvPr id="29" name="Text 25"/>
-          <p:cNvSpPr txBox="1"/>
-          <p:nvPr/>
-        </p:nvSpPr>
-        <p:spPr>
-          <a:xfrm>
-            <a:off x="8206283" y="5020056"/>
-            <a:ext cx="651053" cy="182880"/>
-          </a:xfrm>
-          <a:prstGeom prst="rect">
-            <a:avLst/>
-          </a:prstGeom>
-          <a:noFill/>
-          <a:ln/>
-        </p:spPr>
-        <p:txBody>
-          <a:bodyPr wrap="square" lIns="0" tIns="0" rIns="0" bIns="0" rtlCol="0" anchor="t"/>
-          <a:lstStyle/>
-          <a:p>
-            <a:pPr marL="0" indent="0">
-              <a:buNone/>
-            </a:pPr>
-            <a:r>
-              <a:rPr lang="en-US" sz="950" dirty="0">
-                <a:solidFill>
-                  <a:srgbClr val="28282E"/>
-                </a:solidFill>
-                <a:latin typeface="Inter" pitchFamily="34" charset="0"/>
-                <a:ea typeface="Inter" pitchFamily="34" charset="-122"/>
-                <a:cs typeface="Inter" pitchFamily="34" charset="-120"/>
-              </a:rPr>
-              <a:t>Eval pass</a:t>
-            </a:r>
-            <a:endParaRPr lang="en-US" sz="950" dirty="0"/>
-          </a:p>
-        </p:txBody>
-      </p:sp>
-      <p:sp>
-        <p:nvSpPr>
-          <p:cNvPr id="30" name="Shape 26"/>
-          <p:cNvSpPr/>
-          <p:nvPr/>
-        </p:nvSpPr>
-        <p:spPr>
-          <a:xfrm>
-            <a:off x="9021928" y="5111496"/>
-            <a:ext cx="182880" cy="0"/>
-          </a:xfrm>
-          <a:prstGeom prst="line">
-            <a:avLst/>
-          </a:prstGeom>
-          <a:noFill/>
-          <a:ln w="25400">
-            <a:solidFill>
-              <a:srgbClr val="F14539"/>
-            </a:solidFill>
-            <a:prstDash val="dash"/>
-          </a:ln>
-        </p:spPr>
-      </p:sp>
-      <p:sp>
-        <p:nvSpPr>
-          <p:cNvPr id="31" name="Text 27"/>
-          <p:cNvSpPr txBox="1"/>
-          <p:nvPr/>
-        </p:nvSpPr>
-        <p:spPr>
-          <a:xfrm>
-            <a:off x="9268816" y="5020056"/>
-            <a:ext cx="588874" cy="182880"/>
-          </a:xfrm>
-          <a:prstGeom prst="rect">
-            <a:avLst/>
-          </a:prstGeom>
-          <a:noFill/>
-          <a:ln/>
-        </p:spPr>
-        <p:txBody>
-          <a:bodyPr wrap="square" lIns="0" tIns="0" rIns="0" bIns="0" rtlCol="0" anchor="t"/>
-          <a:lstStyle/>
-          <a:p>
-            <a:pPr marL="0" indent="0">
-              <a:buNone/>
-            </a:pPr>
-            <a:r>
-              <a:rPr lang="en-US" sz="950" dirty="0">
-                <a:solidFill>
-                  <a:srgbClr val="28282E"/>
-                </a:solidFill>
-                <a:latin typeface="Inter" pitchFamily="34" charset="0"/>
-                <a:ea typeface="Inter" pitchFamily="34" charset="-122"/>
-                <a:cs typeface="Inter" pitchFamily="34" charset="-120"/>
-              </a:rPr>
-              <a:t>Incident</a:t>
-            </a:r>
-            <a:endParaRPr lang="en-US" sz="950" dirty="0"/>
-          </a:p>
-        </p:txBody>
-      </p:sp>
-      <p:sp>
-        <p:nvSpPr>
-          <p:cNvPr id="32" name="Shape 28"/>
-          <p:cNvSpPr/>
-          <p:nvPr/>
-        </p:nvSpPr>
-        <p:spPr>
-          <a:xfrm>
-            <a:off x="10022281" y="5111496"/>
-            <a:ext cx="182880" cy="0"/>
-          </a:xfrm>
-          <a:prstGeom prst="line">
-            <a:avLst/>
-          </a:prstGeom>
-          <a:noFill/>
-          <a:ln w="25400">
-            <a:solidFill>
-              <a:srgbClr val="9D72FE"/>
-            </a:solidFill>
-            <a:prstDash val="dash"/>
-          </a:ln>
-        </p:spPr>
-      </p:sp>
-      <p:sp>
-        <p:nvSpPr>
-          <p:cNvPr id="33" name="Text 29"/>
-          <p:cNvSpPr txBox="1"/>
-          <p:nvPr/>
-        </p:nvSpPr>
-        <p:spPr>
-          <a:xfrm>
-            <a:off x="10269169" y="5020056"/>
-            <a:ext cx="464515" cy="182880"/>
-          </a:xfrm>
-          <a:prstGeom prst="rect">
-            <a:avLst/>
-          </a:prstGeom>
-          <a:noFill/>
-          <a:ln/>
-        </p:spPr>
-        <p:txBody>
-          <a:bodyPr wrap="square" lIns="0" tIns="0" rIns="0" bIns="0" rtlCol="0" anchor="t"/>
-          <a:lstStyle/>
-          <a:p>
-            <a:pPr marL="0" indent="0">
-              <a:buNone/>
-            </a:pPr>
-            <a:r>
-              <a:rPr lang="en-US" sz="950" dirty="0">
-                <a:solidFill>
-                  <a:srgbClr val="28282E"/>
-                </a:solidFill>
-                <a:latin typeface="Inter" pitchFamily="34" charset="0"/>
-                <a:ea typeface="Inter" pitchFamily="34" charset="-122"/>
-                <a:cs typeface="Inter" pitchFamily="34" charset="-120"/>
-              </a:rPr>
-              <a:t>Change</a:t>
-            </a:r>
-            <a:endParaRPr lang="en-US" sz="950" dirty="0"/>
-          </a:p>
-        </p:txBody>
-      </p:sp>
-      <p:sp>
-        <p:nvSpPr>
-          <p:cNvPr id="34" name="Shape 30"/>
-          <p:cNvSpPr/>
-          <p:nvPr/>
-        </p:nvSpPr>
-        <p:spPr>
-          <a:xfrm>
-            <a:off x="731520" y="5550408"/>
-            <a:ext cx="10728655" cy="768096"/>
-          </a:xfrm>
-          <a:prstGeom prst="roundRect">
-            <a:avLst>
-              <a:gd name="adj" fmla="val 14286"/>
-            </a:avLst>
-          </a:prstGeom>
-          <a:solidFill>
-            <a:srgbClr val="FAF7FF"/>
-          </a:solidFill>
-          <a:ln w="9525">
-            <a:solidFill>
-              <a:srgbClr val="E6EAF4"/>
-            </a:solidFill>
-            <a:prstDash val="solid"/>
-          </a:ln>
-        </p:spPr>
-      </p:sp>
-      <p:sp>
-        <p:nvSpPr>
-          <p:cNvPr id="35" name="Text 31"/>
-          <p:cNvSpPr txBox="1"/>
-          <p:nvPr/>
-        </p:nvSpPr>
-        <p:spPr>
-          <a:xfrm>
-            <a:off x="960120" y="5678424"/>
-            <a:ext cx="2743200" cy="182880"/>
-          </a:xfrm>
-          <a:prstGeom prst="rect">
-            <a:avLst/>
-          </a:prstGeom>
-          <a:noFill/>
-          <a:ln/>
-        </p:spPr>
-        <p:txBody>
-          <a:bodyPr wrap="square" lIns="0" tIns="0" rIns="0" bIns="0" rtlCol="0" anchor="t"/>
-          <a:lstStyle/>
-          <a:p>
-            <a:pPr marL="0" indent="0">
-              <a:buNone/>
-            </a:pPr>
-            <a:r>
-              <a:rPr lang="en-US" sz="950" dirty="0">
-                <a:solidFill>
-                  <a:srgbClr val="5A5E63"/>
-                </a:solidFill>
-                <a:latin typeface="Inter Medium" pitchFamily="34" charset="0"/>
-                <a:ea typeface="Inter Medium" pitchFamily="34" charset="-122"/>
-                <a:cs typeface="Inter Medium" pitchFamily="34" charset="-120"/>
-              </a:rPr>
-              <a:t>Worth reviewing together</a:t>
-            </a:r>
-            <a:endParaRPr lang="en-US" sz="950" dirty="0"/>
-          </a:p>
-        </p:txBody>
-      </p:sp>
-      <p:sp>
-        <p:nvSpPr>
-          <p:cNvPr id="36" name="Text 32"/>
-          <p:cNvSpPr txBox="1"/>
-          <p:nvPr/>
-        </p:nvSpPr>
-        <p:spPr>
-          <a:xfrm>
-            <a:off x="960120" y="5897880"/>
-            <a:ext cx="10271455" cy="365760"/>
-          </a:xfrm>
-          <a:prstGeom prst="rect">
-            <a:avLst/>
-          </a:prstGeom>
-          <a:noFill/>
-          <a:ln/>
-        </p:spPr>
-        <p:txBody>
-          <a:bodyPr wrap="square" lIns="0" tIns="0" rIns="0" bIns="0" rtlCol="0" anchor="t"/>
-          <a:lstStyle/>
-          <a:p>
-            <a:pPr marL="0" indent="0">
-              <a:buNone/>
-            </a:pPr>
-            <a:r>
-              <a:rPr lang="en-US" sz="1050" dirty="0">
-                <a:solidFill>
-                  <a:srgbClr val="28282E"/>
-                </a:solidFill>
-                <a:latin typeface="Inter" pitchFamily="34" charset="0"/>
-                <a:ea typeface="Inter" pitchFamily="34" charset="-122"/>
-                <a:cs typeface="Inter" pitchFamily="34" charset="-120"/>
-              </a:rPr>
-              <a:t>Requests per Tier-1 ticket rose from 4.6 to 6.2 over the month (7-day averages). It may be longer conversations, repeat contacts or non-ticket traffic; we’d like to look at it with your team.</a:t>
-            </a:r>
-            <a:endParaRPr lang="en-US" sz="1050" dirty="0"/>
-          </a:p>
-        </p:txBody>
-      </p:sp>
-      <p:sp>
-        <p:nvSpPr>
-          <p:cNvPr id="37" name="Slide Number Placeholder 0"/>
-          <p:cNvSpPr>
-            <a:spLocks noGrp="1"/>
-          </p:cNvSpPr>
-          <p:nvPr>
-            <p:ph type="sldNum" sz="quarter" idx="4294967295"/>
-          </p:nvPr>
-        </p:nvSpPr>
-        <p:spPr>
-          <a:xfrm>
-            <a:off x="11094415" y="219456"/>
-            <a:ext cx="365760" cy="274320"/>
-          </a:xfrm>
-          <a:prstGeom prst="rect">
-            <a:avLst/>
-          </a:prstGeom>
-          <a:extLst>
-            <a:ext uri="{C572A759-6A51-4108-AA02-DFA0A04FC94B}">
-              <ma14:wrappingTextBoxFlag xmlns:ma14="http://schemas.microsoft.com/office/mac/drawingml/2011/main" xmlns="" val="0"/>
-            </a:ext>
-          </a:extLst>
-        </p:spPr>
-        <p:txBody>
-          <a:bodyPr/>
-          <a:lstStyle>
-            <a:lvl1pPr>
-              <a:defRPr sz="950">
-                <a:solidFill>
-                  <a:srgbClr val="16181D"/>
-                </a:solidFill>
-                <a:latin typeface="Inter"/>
-                <a:ea typeface="Inter"/>
-                <a:cs typeface="Inter"/>
-              </a:defRPr>
-            </a:lvl1pPr>
-          </a:lstStyle>
-          <a:p>
-            <a:pPr algn="r"/>
-            <a:fld id="{F7021451-1387-4CA6-816F-3879F97B5CBC}" type="slidenum">
-              <a:rPr lang="en-US" b="0"/>
-              <a:t>4</a:t>
-            </a:fld>
-            <a:endParaRPr lang="en-US"/>
-          </a:p>
-        </p:txBody>
-      </p:sp>
-    </p:spTree>
-  </p:cSld>
-  <p:clrMapOvr>
-    <a:masterClrMapping/>
-  </p:clrMapOvr>
-</p:sld>
-</file>
-
-<file path=ppt/slides/slide5.xml><?xml version="1.0" encoding="utf-8"?>
 <p:sld xmlns:a="http://schemas.openxmlformats.org/drawingml/2006/main" xmlns:r="http://schemas.openxmlformats.org/officeDocument/2006/relationships" xmlns:p="http://schemas.openxmlformats.org/presentationml/2006/main">
   <p:cSld name="Slide 5">
     <p:spTree>
@@ -10670,6 +7607,13 @@
             <a:prstDash val="solid"/>
           </a:ln>
         </p:spPr>
+        <p:txBody>
+          <a:bodyPr/>
+          <a:lstStyle/>
+          <a:p>
+            <a:endParaRPr lang="en-GB"/>
+          </a:p>
+        </p:txBody>
       </p:sp>
       <p:sp>
         <p:nvSpPr>
@@ -10826,6 +7770,13 @@
             <a:prstDash val="dash"/>
           </a:ln>
         </p:spPr>
+        <p:txBody>
+          <a:bodyPr/>
+          <a:lstStyle/>
+          <a:p>
+            <a:endParaRPr lang="en-GB"/>
+          </a:p>
+        </p:txBody>
       </p:sp>
       <p:sp>
         <p:nvSpPr>
@@ -10849,6 +7800,13 @@
             <a:prstDash val="dash"/>
           </a:ln>
         </p:spPr>
+        <p:txBody>
+          <a:bodyPr/>
+          <a:lstStyle/>
+          <a:p>
+            <a:endParaRPr lang="en-GB"/>
+          </a:p>
+        </p:txBody>
       </p:sp>
       <p:sp>
         <p:nvSpPr>
@@ -10872,6 +7830,13 @@
             <a:prstDash val="dash"/>
           </a:ln>
         </p:spPr>
+        <p:txBody>
+          <a:bodyPr/>
+          <a:lstStyle/>
+          <a:p>
+            <a:endParaRPr lang="en-GB"/>
+          </a:p>
+        </p:txBody>
       </p:sp>
       <p:sp>
         <p:nvSpPr>
@@ -10895,6 +7860,13 @@
             <a:prstDash val="solid"/>
           </a:ln>
         </p:spPr>
+        <p:txBody>
+          <a:bodyPr/>
+          <a:lstStyle/>
+          <a:p>
+            <a:endParaRPr lang="en-GB"/>
+          </a:p>
+        </p:txBody>
       </p:sp>
       <p:sp>
         <p:nvSpPr>
@@ -10957,6 +7929,13 @@
             <a:prstDash val="dash"/>
           </a:ln>
         </p:spPr>
+        <p:txBody>
+          <a:bodyPr/>
+          <a:lstStyle/>
+          <a:p>
+            <a:endParaRPr lang="en-GB"/>
+          </a:p>
+        </p:txBody>
       </p:sp>
       <p:sp>
         <p:nvSpPr>
@@ -11019,6 +7998,13 @@
             <a:prstDash val="dash"/>
           </a:ln>
         </p:spPr>
+        <p:txBody>
+          <a:bodyPr/>
+          <a:lstStyle/>
+          <a:p>
+            <a:endParaRPr lang="en-GB"/>
+          </a:p>
+        </p:txBody>
       </p:sp>
       <p:sp>
         <p:nvSpPr>
@@ -11085,6 +8071,13 @@
             <a:prstDash val="solid"/>
           </a:ln>
         </p:spPr>
+        <p:txBody>
+          <a:bodyPr/>
+          <a:lstStyle/>
+          <a:p>
+            <a:endParaRPr lang="en-GB"/>
+          </a:p>
+        </p:txBody>
       </p:sp>
       <p:sp>
         <p:nvSpPr>
@@ -11105,6 +8098,13 @@
           </a:solidFill>
           <a:ln/>
         </p:spPr>
+        <p:txBody>
+          <a:bodyPr/>
+          <a:lstStyle/>
+          <a:p>
+            <a:endParaRPr lang="en-GB"/>
+          </a:p>
+        </p:txBody>
       </p:sp>
       <p:sp>
         <p:nvSpPr>
@@ -11266,6 +8266,13 @@
             <a:prstDash val="solid"/>
           </a:ln>
         </p:spPr>
+        <p:txBody>
+          <a:bodyPr/>
+          <a:lstStyle/>
+          <a:p>
+            <a:endParaRPr lang="en-GB"/>
+          </a:p>
+        </p:txBody>
       </p:sp>
       <p:sp>
         <p:nvSpPr>
@@ -11286,6 +8293,13 @@
           </a:solidFill>
           <a:ln/>
         </p:spPr>
+        <p:txBody>
+          <a:bodyPr/>
+          <a:lstStyle/>
+          <a:p>
+            <a:endParaRPr lang="en-GB"/>
+          </a:p>
+        </p:txBody>
       </p:sp>
       <p:sp>
         <p:nvSpPr>
@@ -11447,6 +8461,13 @@
             <a:prstDash val="solid"/>
           </a:ln>
         </p:spPr>
+        <p:txBody>
+          <a:bodyPr/>
+          <a:lstStyle/>
+          <a:p>
+            <a:endParaRPr lang="en-GB"/>
+          </a:p>
+        </p:txBody>
       </p:sp>
       <p:sp>
         <p:nvSpPr>
@@ -11467,6 +8488,13 @@
           </a:solidFill>
           <a:ln/>
         </p:spPr>
+        <p:txBody>
+          <a:bodyPr/>
+          <a:lstStyle/>
+          <a:p>
+            <a:endParaRPr lang="en-GB"/>
+          </a:p>
+        </p:txBody>
       </p:sp>
       <p:sp>
         <p:nvSpPr>
@@ -11661,7 +8689,7 @@
           </a:prstGeom>
           <a:extLst>
             <a:ext uri="{C572A759-6A51-4108-AA02-DFA0A04FC94B}">
-              <ma14:wrappingTextBoxFlag xmlns:ma14="http://schemas.microsoft.com/office/mac/drawingml/2011/main" xmlns="" val="0"/>
+              <ma14:wrappingTextBoxFlag xmlns="" xmlns:ma14="http://schemas.microsoft.com/office/mac/drawingml/2011/main" val="0"/>
             </a:ext>
           </a:extLst>
         </p:spPr>
@@ -11683,7 +8711,7 @@
             <a:pPr algn="r"/>
             <a:fld id="{F7021451-1387-4CA6-816F-3879F97B5CBC}" type="slidenum">
               <a:rPr lang="en-US" b="0"/>
-              <a:t>5</a:t>
+              <a:t>4</a:t>
             </a:fld>
             <a:endParaRPr lang="en-US"/>
           </a:p>
@@ -11697,7 +8725,7 @@
 </p:sld>
 </file>
 
-<file path=ppt/slides/slide6.xml><?xml version="1.0" encoding="utf-8"?>
+<file path=ppt/slides/slide5.xml><?xml version="1.0" encoding="utf-8"?>
 <p:sld xmlns:a="http://schemas.openxmlformats.org/drawingml/2006/main" xmlns:r="http://schemas.openxmlformats.org/officeDocument/2006/relationships" xmlns:p="http://schemas.openxmlformats.org/presentationml/2006/main">
   <p:cSld name="Slide 6">
     <p:spTree>
@@ -11869,6 +8897,13 @@
             <a:prstDash val="solid"/>
           </a:ln>
         </p:spPr>
+        <p:txBody>
+          <a:bodyPr/>
+          <a:lstStyle/>
+          <a:p>
+            <a:endParaRPr lang="en-GB"/>
+          </a:p>
+        </p:txBody>
       </p:sp>
       <p:sp>
         <p:nvSpPr>
@@ -11928,6 +8963,13 @@
           </a:solidFill>
           <a:ln/>
         </p:spPr>
+        <p:txBody>
+          <a:bodyPr/>
+          <a:lstStyle/>
+          <a:p>
+            <a:endParaRPr lang="en-GB"/>
+          </a:p>
+        </p:txBody>
       </p:sp>
       <p:sp>
         <p:nvSpPr>
@@ -11994,6 +9036,13 @@
             <a:prstDash val="solid"/>
           </a:ln>
         </p:spPr>
+        <p:txBody>
+          <a:bodyPr/>
+          <a:lstStyle/>
+          <a:p>
+            <a:endParaRPr lang="en-GB"/>
+          </a:p>
+        </p:txBody>
       </p:sp>
       <p:sp>
         <p:nvSpPr>
@@ -12053,6 +9102,13 @@
           </a:solidFill>
           <a:ln/>
         </p:spPr>
+        <p:txBody>
+          <a:bodyPr/>
+          <a:lstStyle/>
+          <a:p>
+            <a:endParaRPr lang="en-GB"/>
+          </a:p>
+        </p:txBody>
       </p:sp>
       <p:sp>
         <p:nvSpPr>
@@ -12156,6 +9212,13 @@
             <a:prstDash val="solid"/>
           </a:ln>
         </p:spPr>
+        <p:txBody>
+          <a:bodyPr/>
+          <a:lstStyle/>
+          <a:p>
+            <a:endParaRPr lang="en-GB"/>
+          </a:p>
+        </p:txBody>
       </p:sp>
       <p:sp>
         <p:nvSpPr>
@@ -12220,6 +9283,13 @@
             <a:prstDash val="solid"/>
           </a:ln>
         </p:spPr>
+        <p:txBody>
+          <a:bodyPr/>
+          <a:lstStyle/>
+          <a:p>
+            <a:endParaRPr lang="en-GB"/>
+          </a:p>
+        </p:txBody>
       </p:sp>
       <p:sp>
         <p:nvSpPr>
@@ -12284,6 +9354,13 @@
             <a:prstDash val="solid"/>
           </a:ln>
         </p:spPr>
+        <p:txBody>
+          <a:bodyPr/>
+          <a:lstStyle/>
+          <a:p>
+            <a:endParaRPr lang="en-GB"/>
+          </a:p>
+        </p:txBody>
       </p:sp>
       <p:sp>
         <p:nvSpPr>
@@ -12350,6 +9427,13 @@
             <a:prstDash val="solid"/>
           </a:ln>
         </p:spPr>
+        <p:txBody>
+          <a:bodyPr/>
+          <a:lstStyle/>
+          <a:p>
+            <a:endParaRPr lang="en-GB"/>
+          </a:p>
+        </p:txBody>
       </p:sp>
       <p:sp>
         <p:nvSpPr>
@@ -12409,6 +9493,13 @@
           </a:solidFill>
           <a:ln/>
         </p:spPr>
+        <p:txBody>
+          <a:bodyPr/>
+          <a:lstStyle/>
+          <a:p>
+            <a:endParaRPr lang="en-GB"/>
+          </a:p>
+        </p:txBody>
       </p:sp>
       <p:sp>
         <p:nvSpPr>
@@ -12512,6 +9603,13 @@
             <a:prstDash val="solid"/>
           </a:ln>
         </p:spPr>
+        <p:txBody>
+          <a:bodyPr/>
+          <a:lstStyle/>
+          <a:p>
+            <a:endParaRPr lang="en-GB"/>
+          </a:p>
+        </p:txBody>
       </p:sp>
       <p:sp>
         <p:nvSpPr>
@@ -12576,6 +9674,13 @@
             <a:prstDash val="solid"/>
           </a:ln>
         </p:spPr>
+        <p:txBody>
+          <a:bodyPr/>
+          <a:lstStyle/>
+          <a:p>
+            <a:endParaRPr lang="en-GB"/>
+          </a:p>
+        </p:txBody>
       </p:sp>
       <p:sp>
         <p:nvSpPr>
@@ -12640,6 +9745,13 @@
             <a:prstDash val="solid"/>
           </a:ln>
         </p:spPr>
+        <p:txBody>
+          <a:bodyPr/>
+          <a:lstStyle/>
+          <a:p>
+            <a:endParaRPr lang="en-GB"/>
+          </a:p>
+        </p:txBody>
       </p:sp>
       <p:sp>
         <p:nvSpPr>
@@ -12706,6 +9818,13 @@
             <a:prstDash val="solid"/>
           </a:ln>
         </p:spPr>
+        <p:txBody>
+          <a:bodyPr/>
+          <a:lstStyle/>
+          <a:p>
+            <a:endParaRPr lang="en-GB"/>
+          </a:p>
+        </p:txBody>
       </p:sp>
       <p:sp>
         <p:nvSpPr>
@@ -12765,6 +9884,13 @@
           </a:solidFill>
           <a:ln/>
         </p:spPr>
+        <p:txBody>
+          <a:bodyPr/>
+          <a:lstStyle/>
+          <a:p>
+            <a:endParaRPr lang="en-GB"/>
+          </a:p>
+        </p:txBody>
       </p:sp>
       <p:sp>
         <p:nvSpPr>
@@ -12868,6 +9994,13 @@
             <a:prstDash val="solid"/>
           </a:ln>
         </p:spPr>
+        <p:txBody>
+          <a:bodyPr/>
+          <a:lstStyle/>
+          <a:p>
+            <a:endParaRPr lang="en-GB"/>
+          </a:p>
+        </p:txBody>
       </p:sp>
       <p:sp>
         <p:nvSpPr>
@@ -12932,6 +10065,13 @@
             <a:prstDash val="solid"/>
           </a:ln>
         </p:spPr>
+        <p:txBody>
+          <a:bodyPr/>
+          <a:lstStyle/>
+          <a:p>
+            <a:endParaRPr lang="en-GB"/>
+          </a:p>
+        </p:txBody>
       </p:sp>
       <p:sp>
         <p:nvSpPr>
@@ -12996,6 +10136,13 @@
             <a:prstDash val="solid"/>
           </a:ln>
         </p:spPr>
+        <p:txBody>
+          <a:bodyPr/>
+          <a:lstStyle/>
+          <a:p>
+            <a:endParaRPr lang="en-GB"/>
+          </a:p>
+        </p:txBody>
       </p:sp>
       <p:sp>
         <p:nvSpPr>
@@ -13062,6 +10209,13 @@
             <a:prstDash val="solid"/>
           </a:ln>
         </p:spPr>
+        <p:txBody>
+          <a:bodyPr/>
+          <a:lstStyle/>
+          <a:p>
+            <a:endParaRPr lang="en-GB"/>
+          </a:p>
+        </p:txBody>
       </p:sp>
       <p:sp>
         <p:nvSpPr>
@@ -13121,6 +10275,13 @@
           </a:solidFill>
           <a:ln/>
         </p:spPr>
+        <p:txBody>
+          <a:bodyPr/>
+          <a:lstStyle/>
+          <a:p>
+            <a:endParaRPr lang="en-GB"/>
+          </a:p>
+        </p:txBody>
       </p:sp>
       <p:sp>
         <p:nvSpPr>
@@ -13224,6 +10385,13 @@
             <a:prstDash val="solid"/>
           </a:ln>
         </p:spPr>
+        <p:txBody>
+          <a:bodyPr/>
+          <a:lstStyle/>
+          <a:p>
+            <a:endParaRPr lang="en-GB"/>
+          </a:p>
+        </p:txBody>
       </p:sp>
       <p:sp>
         <p:nvSpPr>
@@ -13288,6 +10456,13 @@
             <a:prstDash val="solid"/>
           </a:ln>
         </p:spPr>
+        <p:txBody>
+          <a:bodyPr/>
+          <a:lstStyle/>
+          <a:p>
+            <a:endParaRPr lang="en-GB"/>
+          </a:p>
+        </p:txBody>
       </p:sp>
       <p:sp>
         <p:nvSpPr>
@@ -13352,6 +10527,13 @@
             <a:prstDash val="solid"/>
           </a:ln>
         </p:spPr>
+        <p:txBody>
+          <a:bodyPr/>
+          <a:lstStyle/>
+          <a:p>
+            <a:endParaRPr lang="en-GB"/>
+          </a:p>
+        </p:txBody>
       </p:sp>
       <p:sp>
         <p:nvSpPr>
@@ -13418,6 +10600,13 @@
             <a:prstDash val="solid"/>
           </a:ln>
         </p:spPr>
+        <p:txBody>
+          <a:bodyPr/>
+          <a:lstStyle/>
+          <a:p>
+            <a:endParaRPr lang="en-GB"/>
+          </a:p>
+        </p:txBody>
       </p:sp>
       <p:sp>
         <p:nvSpPr>
@@ -13477,6 +10666,13 @@
           </a:solidFill>
           <a:ln/>
         </p:spPr>
+        <p:txBody>
+          <a:bodyPr/>
+          <a:lstStyle/>
+          <a:p>
+            <a:endParaRPr lang="en-GB"/>
+          </a:p>
+        </p:txBody>
       </p:sp>
       <p:sp>
         <p:nvSpPr>
@@ -13580,6 +10776,13 @@
             <a:prstDash val="solid"/>
           </a:ln>
         </p:spPr>
+        <p:txBody>
+          <a:bodyPr/>
+          <a:lstStyle/>
+          <a:p>
+            <a:endParaRPr lang="en-GB"/>
+          </a:p>
+        </p:txBody>
       </p:sp>
       <p:sp>
         <p:nvSpPr>
@@ -13644,6 +10847,13 @@
             <a:prstDash val="solid"/>
           </a:ln>
         </p:spPr>
+        <p:txBody>
+          <a:bodyPr/>
+          <a:lstStyle/>
+          <a:p>
+            <a:endParaRPr lang="en-GB"/>
+          </a:p>
+        </p:txBody>
       </p:sp>
       <p:sp>
         <p:nvSpPr>
@@ -13708,6 +10918,13 @@
             <a:prstDash val="solid"/>
           </a:ln>
         </p:spPr>
+        <p:txBody>
+          <a:bodyPr/>
+          <a:lstStyle/>
+          <a:p>
+            <a:endParaRPr lang="en-GB"/>
+          </a:p>
+        </p:txBody>
       </p:sp>
       <p:sp>
         <p:nvSpPr>
@@ -13767,6 +10984,13 @@
           </a:solidFill>
           <a:ln/>
         </p:spPr>
+        <p:txBody>
+          <a:bodyPr/>
+          <a:lstStyle/>
+          <a:p>
+            <a:endParaRPr lang="en-GB"/>
+          </a:p>
+        </p:txBody>
       </p:sp>
       <p:sp>
         <p:nvSpPr>
@@ -13849,6 +11073,13 @@
           </a:solidFill>
           <a:ln/>
         </p:spPr>
+        <p:txBody>
+          <a:bodyPr/>
+          <a:lstStyle/>
+          <a:p>
+            <a:endParaRPr lang="en-GB"/>
+          </a:p>
+        </p:txBody>
       </p:sp>
       <p:sp>
         <p:nvSpPr>
@@ -13931,6 +11162,13 @@
           </a:solidFill>
           <a:ln/>
         </p:spPr>
+        <p:txBody>
+          <a:bodyPr/>
+          <a:lstStyle/>
+          <a:p>
+            <a:endParaRPr lang="en-GB"/>
+          </a:p>
+        </p:txBody>
       </p:sp>
       <p:sp>
         <p:nvSpPr>
@@ -14014,7 +11252,7 @@
           </a:prstGeom>
           <a:extLst>
             <a:ext uri="{C572A759-6A51-4108-AA02-DFA0A04FC94B}">
-              <ma14:wrappingTextBoxFlag xmlns:ma14="http://schemas.microsoft.com/office/mac/drawingml/2011/main" xmlns="" val="0"/>
+              <ma14:wrappingTextBoxFlag xmlns="" xmlns:ma14="http://schemas.microsoft.com/office/mac/drawingml/2011/main" val="0"/>
             </a:ext>
           </a:extLst>
         </p:spPr>
@@ -14036,7 +11274,7 @@
             <a:pPr algn="r"/>
             <a:fld id="{F7021451-1387-4CA6-816F-3879F97B5CBC}" type="slidenum">
               <a:rPr lang="en-US" b="0"/>
-              <a:t>6</a:t>
+              <a:t>5</a:t>
             </a:fld>
             <a:endParaRPr lang="en-US"/>
           </a:p>
@@ -14050,7 +11288,7 @@
 </p:sld>
 </file>
 
-<file path=ppt/slides/slide7.xml><?xml version="1.0" encoding="utf-8"?>
+<file path=ppt/slides/slide6.xml><?xml version="1.0" encoding="utf-8"?>
 <p:sld xmlns:a="http://schemas.openxmlformats.org/drawingml/2006/main" xmlns:r="http://schemas.openxmlformats.org/officeDocument/2006/relationships" xmlns:p="http://schemas.openxmlformats.org/presentationml/2006/main">
   <p:cSld name="Slide 7">
     <p:spTree>
@@ -14222,6 +11460,13 @@
             <a:prstDash val="solid"/>
           </a:ln>
         </p:spPr>
+        <p:txBody>
+          <a:bodyPr/>
+          <a:lstStyle/>
+          <a:p>
+            <a:endParaRPr lang="en-GB"/>
+          </a:p>
+        </p:txBody>
       </p:sp>
       <p:sp>
         <p:nvSpPr>
@@ -14242,6 +11487,13 @@
           </a:solidFill>
           <a:ln/>
         </p:spPr>
+        <p:txBody>
+          <a:bodyPr/>
+          <a:lstStyle/>
+          <a:p>
+            <a:endParaRPr lang="en-GB"/>
+          </a:p>
+        </p:txBody>
       </p:sp>
       <p:sp>
         <p:nvSpPr>
@@ -14386,6 +11638,13 @@
             <a:prstDash val="solid"/>
           </a:ln>
         </p:spPr>
+        <p:txBody>
+          <a:bodyPr/>
+          <a:lstStyle/>
+          <a:p>
+            <a:endParaRPr lang="en-GB"/>
+          </a:p>
+        </p:txBody>
       </p:sp>
       <p:sp>
         <p:nvSpPr>
@@ -14406,6 +11665,13 @@
           </a:solidFill>
           <a:ln/>
         </p:spPr>
+        <p:txBody>
+          <a:bodyPr/>
+          <a:lstStyle/>
+          <a:p>
+            <a:endParaRPr lang="en-GB"/>
+          </a:p>
+        </p:txBody>
       </p:sp>
       <p:sp>
         <p:nvSpPr>
@@ -14545,6 +11811,13 @@
           </a:solidFill>
           <a:ln/>
         </p:spPr>
+        <p:txBody>
+          <a:bodyPr/>
+          <a:lstStyle/>
+          <a:p>
+            <a:endParaRPr lang="en-GB"/>
+          </a:p>
+        </p:txBody>
       </p:sp>
       <p:sp>
         <p:nvSpPr>
@@ -14565,6 +11838,13 @@
           </a:solidFill>
           <a:ln/>
         </p:spPr>
+        <p:txBody>
+          <a:bodyPr/>
+          <a:lstStyle/>
+          <a:p>
+            <a:endParaRPr lang="en-GB"/>
+          </a:p>
+        </p:txBody>
       </p:sp>
       <p:sp>
         <p:nvSpPr>
@@ -14588,6 +11868,13 @@
             <a:prstDash val="solid"/>
           </a:ln>
         </p:spPr>
+        <p:txBody>
+          <a:bodyPr/>
+          <a:lstStyle/>
+          <a:p>
+            <a:endParaRPr lang="en-GB"/>
+          </a:p>
+        </p:txBody>
       </p:sp>
       <p:sp>
         <p:nvSpPr>
@@ -14767,6 +12054,13 @@
             <a:prstDash val="solid"/>
           </a:ln>
         </p:spPr>
+        <p:txBody>
+          <a:bodyPr/>
+          <a:lstStyle/>
+          <a:p>
+            <a:endParaRPr lang="en-GB"/>
+          </a:p>
+        </p:txBody>
       </p:sp>
       <p:sp>
         <p:nvSpPr>
@@ -14868,6 +12162,13 @@
             <a:prstDash val="solid"/>
           </a:ln>
         </p:spPr>
+        <p:txBody>
+          <a:bodyPr/>
+          <a:lstStyle/>
+          <a:p>
+            <a:endParaRPr lang="en-GB"/>
+          </a:p>
+        </p:txBody>
       </p:sp>
       <p:sp>
         <p:nvSpPr>
@@ -14969,6 +12270,13 @@
             <a:prstDash val="solid"/>
           </a:ln>
         </p:spPr>
+        <p:txBody>
+          <a:bodyPr/>
+          <a:lstStyle/>
+          <a:p>
+            <a:endParaRPr lang="en-GB"/>
+          </a:p>
+        </p:txBody>
       </p:sp>
       <p:sp>
         <p:nvSpPr>
@@ -15070,6 +12378,13 @@
             <a:prstDash val="solid"/>
           </a:ln>
         </p:spPr>
+        <p:txBody>
+          <a:bodyPr/>
+          <a:lstStyle/>
+          <a:p>
+            <a:endParaRPr lang="en-GB"/>
+          </a:p>
+        </p:txBody>
       </p:sp>
       <p:sp>
         <p:nvSpPr>
@@ -15172,6 +12487,13 @@
             <a:prstDash val="solid"/>
           </a:ln>
         </p:spPr>
+        <p:txBody>
+          <a:bodyPr/>
+          <a:lstStyle/>
+          <a:p>
+            <a:endParaRPr lang="en-GB"/>
+          </a:p>
+        </p:txBody>
       </p:sp>
       <p:sp>
         <p:nvSpPr>
@@ -15232,7 +12554,7 @@
           </a:prstGeom>
           <a:extLst>
             <a:ext uri="{C572A759-6A51-4108-AA02-DFA0A04FC94B}">
-              <ma14:wrappingTextBoxFlag xmlns:ma14="http://schemas.microsoft.com/office/mac/drawingml/2011/main" xmlns="" val="0"/>
+              <ma14:wrappingTextBoxFlag xmlns="" xmlns:ma14="http://schemas.microsoft.com/office/mac/drawingml/2011/main" val="0"/>
             </a:ext>
           </a:extLst>
         </p:spPr>
@@ -15254,7 +12576,7 @@
             <a:pPr algn="r"/>
             <a:fld id="{F7021451-1387-4CA6-816F-3879F97B5CBC}" type="slidenum">
               <a:rPr lang="en-US" b="0"/>
-              <a:t>7</a:t>
+              <a:t>6</a:t>
             </a:fld>
             <a:endParaRPr lang="en-US"/>
           </a:p>
@@ -15268,7 +12590,7 @@
 </p:sld>
 </file>
 
-<file path=ppt/slides/slide8.xml><?xml version="1.0" encoding="utf-8"?>
+<file path=ppt/slides/slide7.xml><?xml version="1.0" encoding="utf-8"?>
 <p:sld xmlns:a="http://schemas.openxmlformats.org/drawingml/2006/main" xmlns:r="http://schemas.openxmlformats.org/officeDocument/2006/relationships" xmlns:p="http://schemas.openxmlformats.org/presentationml/2006/main">
   <p:cSld name="Slide 8">
     <p:spTree>
@@ -15436,6 +12758,13 @@
             <a:prstDash val="solid"/>
           </a:ln>
         </p:spPr>
+        <p:txBody>
+          <a:bodyPr/>
+          <a:lstStyle/>
+          <a:p>
+            <a:endParaRPr lang="en-GB"/>
+          </a:p>
+        </p:txBody>
       </p:sp>
       <p:sp>
         <p:nvSpPr>
@@ -15456,6 +12785,13 @@
           </a:solidFill>
           <a:ln/>
         </p:spPr>
+        <p:txBody>
+          <a:bodyPr/>
+          <a:lstStyle/>
+          <a:p>
+            <a:endParaRPr lang="en-GB"/>
+          </a:p>
+        </p:txBody>
       </p:sp>
       <p:sp>
         <p:nvSpPr>
@@ -15554,6 +12890,13 @@
           </a:solidFill>
           <a:ln/>
         </p:spPr>
+        <p:txBody>
+          <a:bodyPr/>
+          <a:lstStyle/>
+          <a:p>
+            <a:endParaRPr lang="en-GB"/>
+          </a:p>
+        </p:txBody>
       </p:sp>
       <p:sp>
         <p:nvSpPr>
@@ -15652,6 +12995,13 @@
           </a:solidFill>
           <a:ln/>
         </p:spPr>
+        <p:txBody>
+          <a:bodyPr/>
+          <a:lstStyle/>
+          <a:p>
+            <a:endParaRPr lang="en-GB"/>
+          </a:p>
+        </p:txBody>
       </p:sp>
       <p:sp>
         <p:nvSpPr>
@@ -15750,6 +13100,13 @@
           </a:solidFill>
           <a:ln/>
         </p:spPr>
+        <p:txBody>
+          <a:bodyPr/>
+          <a:lstStyle/>
+          <a:p>
+            <a:endParaRPr lang="en-GB"/>
+          </a:p>
+        </p:txBody>
       </p:sp>
       <p:sp>
         <p:nvSpPr>
@@ -15848,6 +13205,13 @@
           </a:solidFill>
           <a:ln/>
         </p:spPr>
+        <p:txBody>
+          <a:bodyPr/>
+          <a:lstStyle/>
+          <a:p>
+            <a:endParaRPr lang="en-GB"/>
+          </a:p>
+        </p:txBody>
       </p:sp>
       <p:sp>
         <p:nvSpPr>
@@ -15946,6 +13310,13 @@
           </a:solidFill>
           <a:ln/>
         </p:spPr>
+        <p:txBody>
+          <a:bodyPr/>
+          <a:lstStyle/>
+          <a:p>
+            <a:endParaRPr lang="en-GB"/>
+          </a:p>
+        </p:txBody>
       </p:sp>
       <p:sp>
         <p:nvSpPr>
@@ -16051,6 +13422,13 @@
             <a:prstDash val="solid"/>
           </a:ln>
         </p:spPr>
+        <p:txBody>
+          <a:bodyPr/>
+          <a:lstStyle/>
+          <a:p>
+            <a:endParaRPr lang="en-GB"/>
+          </a:p>
+        </p:txBody>
       </p:sp>
       <p:sp>
         <p:nvSpPr>
@@ -16156,6 +13534,13 @@
             <a:prstDash val="solid"/>
           </a:ln>
         </p:spPr>
+        <p:txBody>
+          <a:bodyPr/>
+          <a:lstStyle/>
+          <a:p>
+            <a:endParaRPr lang="en-GB"/>
+          </a:p>
+        </p:txBody>
       </p:sp>
       <p:sp>
         <p:nvSpPr>
@@ -16261,6 +13646,13 @@
             <a:prstDash val="solid"/>
           </a:ln>
         </p:spPr>
+        <p:txBody>
+          <a:bodyPr/>
+          <a:lstStyle/>
+          <a:p>
+            <a:endParaRPr lang="en-GB"/>
+          </a:p>
+        </p:txBody>
       </p:sp>
       <p:sp>
         <p:nvSpPr>
@@ -16399,7 +13791,7 @@
           </a:prstGeom>
           <a:extLst>
             <a:ext uri="{C572A759-6A51-4108-AA02-DFA0A04FC94B}">
-              <ma14:wrappingTextBoxFlag xmlns:ma14="http://schemas.microsoft.com/office/mac/drawingml/2011/main" xmlns="" val="0"/>
+              <ma14:wrappingTextBoxFlag xmlns="" xmlns:ma14="http://schemas.microsoft.com/office/mac/drawingml/2011/main" val="0"/>
             </a:ext>
           </a:extLst>
         </p:spPr>
@@ -16421,7 +13813,7 @@
             <a:pPr algn="r"/>
             <a:fld id="{F7021451-1387-4CA6-816F-3879F97B5CBC}" type="slidenum">
               <a:rPr lang="en-US" b="0"/>
-              <a:t>8</a:t>
+              <a:t>7</a:t>
             </a:fld>
             <a:endParaRPr lang="en-US"/>
           </a:p>
@@ -16435,7 +13827,7 @@
 </p:sld>
 </file>
 
-<file path=ppt/slides/slide9.xml><?xml version="1.0" encoding="utf-8"?>
+<file path=ppt/slides/slide8.xml><?xml version="1.0" encoding="utf-8"?>
 <p:sld xmlns:a="http://schemas.openxmlformats.org/drawingml/2006/main" xmlns:r="http://schemas.openxmlformats.org/officeDocument/2006/relationships" xmlns:p="http://schemas.openxmlformats.org/presentationml/2006/main">
   <p:cSld name="Slide 9">
     <p:spTree>
@@ -16589,7 +13981,7 @@
         </p:nvSpPr>
         <p:spPr>
           <a:xfrm>
-            <a:off x="731520" y="2103120"/>
+            <a:off x="731520" y="2080116"/>
             <a:ext cx="5120640" cy="3977640"/>
           </a:xfrm>
           <a:prstGeom prst="roundRect">
@@ -16607,76 +13999,63 @@
             <a:prstDash val="solid"/>
           </a:ln>
         </p:spPr>
-      </p:sp>
-      <p:sp>
-        <p:nvSpPr>
-          <p:cNvPr id="6" name="Shape 4"/>
-          <p:cNvSpPr/>
-          <p:nvPr/>
-        </p:nvSpPr>
-        <p:spPr>
-          <a:xfrm>
-            <a:off x="987552" y="2359152"/>
-            <a:ext cx="1014252" cy="237744"/>
-          </a:xfrm>
-          <a:prstGeom prst="rect">
-            <a:avLst/>
-          </a:prstGeom>
-          <a:solidFill>
-            <a:srgbClr val="FFE4E2"/>
-          </a:solidFill>
-          <a:ln/>
-        </p:spPr>
-      </p:sp>
-      <p:sp>
-        <p:nvSpPr>
-          <p:cNvPr id="7" name="Text 5"/>
-          <p:cNvSpPr txBox="1"/>
-          <p:nvPr/>
-        </p:nvSpPr>
-        <p:spPr>
-          <a:xfrm>
-            <a:off x="987552" y="2359152"/>
-            <a:ext cx="1014252" cy="237744"/>
-          </a:xfrm>
-          <a:prstGeom prst="rect">
-            <a:avLst/>
-          </a:prstGeom>
-          <a:noFill/>
-          <a:ln/>
-        </p:spPr>
-        <p:txBody>
-          <a:bodyPr wrap="square" lIns="0" tIns="0" rIns="0" bIns="0" rtlCol="0" anchor="ctr"/>
-          <a:lstStyle/>
-          <a:p>
-            <a:pPr marL="0" indent="0" algn="ctr">
-              <a:buNone/>
-            </a:pPr>
-            <a:r>
-              <a:rPr lang="en-US" sz="950" dirty="0">
-                <a:solidFill>
-                  <a:srgbClr val="B32519"/>
+        <p:txBody>
+          <a:bodyPr/>
+          <a:lstStyle/>
+          <a:p>
+            <a:endParaRPr lang="en-GB"/>
+          </a:p>
+        </p:txBody>
+      </p:sp>
+      <p:sp>
+        <p:nvSpPr>
+          <p:cNvPr id="8" name="Text 6"/>
+          <p:cNvSpPr txBox="1"/>
+          <p:nvPr/>
+        </p:nvSpPr>
+        <p:spPr>
+          <a:xfrm>
+            <a:off x="987552" y="2304288"/>
+            <a:ext cx="4608576" cy="1188720"/>
+          </a:xfrm>
+          <a:prstGeom prst="rect">
+            <a:avLst/>
+          </a:prstGeom>
+          <a:noFill/>
+          <a:ln/>
+        </p:spPr>
+        <p:txBody>
+          <a:bodyPr wrap="square" lIns="0" tIns="0" rIns="0" bIns="0" rtlCol="0" anchor="t"/>
+          <a:lstStyle/>
+          <a:p>
+            <a:pPr marL="0" indent="0">
+              <a:buNone/>
+            </a:pPr>
+            <a:r>
+              <a:rPr lang="en-US" sz="1600" dirty="0">
+                <a:solidFill>
+                  <a:srgbClr val="16181D"/>
                 </a:solidFill>
                 <a:latin typeface="Inter Medium" pitchFamily="34" charset="0"/>
                 <a:ea typeface="Inter Medium" pitchFamily="34" charset="-122"/>
                 <a:cs typeface="Inter Medium" pitchFamily="34" charset="-120"/>
               </a:rPr>
-              <a:t>Biggest risk</a:t>
-            </a:r>
-            <a:endParaRPr lang="en-US" sz="950" dirty="0"/>
-          </a:p>
-        </p:txBody>
-      </p:sp>
-      <p:sp>
-        <p:nvSpPr>
-          <p:cNvPr id="8" name="Text 6"/>
-          <p:cNvSpPr txBox="1"/>
-          <p:nvPr/>
-        </p:nvSpPr>
-        <p:spPr>
-          <a:xfrm>
-            <a:off x="987552" y="2743200"/>
-            <a:ext cx="4608576" cy="1188720"/>
+              <a:t>Without group-level sponsorship the rollout stays with Atlas, and shared capacity never carries enough volume to make per-brand cost efficient.</a:t>
+            </a:r>
+            <a:endParaRPr lang="en-US" sz="1600" dirty="0"/>
+          </a:p>
+        </p:txBody>
+      </p:sp>
+      <p:sp>
+        <p:nvSpPr>
+          <p:cNvPr id="9" name="Text 7"/>
+          <p:cNvSpPr txBox="1"/>
+          <p:nvPr/>
+        </p:nvSpPr>
+        <p:spPr>
+          <a:xfrm>
+            <a:off x="987552" y="3582093"/>
+            <a:ext cx="2743200" cy="201168"/>
           </a:xfrm>
           <a:prstGeom prst="rect">
             <a:avLst/>
@@ -16692,53 +14071,14 @@
               <a:buNone/>
             </a:pPr>
             <a:r>
-              <a:rPr lang="en-US" sz="1600" dirty="0">
-                <a:solidFill>
-                  <a:srgbClr val="16181D"/>
+              <a:rPr lang="en-US" sz="1050" dirty="0">
+                <a:solidFill>
+                  <a:srgbClr val="5A5E63"/>
                 </a:solidFill>
                 <a:latin typeface="Inter Medium" pitchFamily="34" charset="0"/>
                 <a:ea typeface="Inter Medium" pitchFamily="34" charset="-122"/>
                 <a:cs typeface="Inter Medium" pitchFamily="34" charset="-120"/>
               </a:rPr>
-              <a:t>Without group-level sponsorship the rollout stays with Atlas, and shared capacity never carries enough volume to make per-brand cost efficient.</a:t>
-            </a:r>
-            <a:endParaRPr lang="en-US" sz="1600" dirty="0"/>
-          </a:p>
-        </p:txBody>
-      </p:sp>
-      <p:sp>
-        <p:nvSpPr>
-          <p:cNvPr id="9" name="Text 7"/>
-          <p:cNvSpPr txBox="1"/>
-          <p:nvPr/>
-        </p:nvSpPr>
-        <p:spPr>
-          <a:xfrm>
-            <a:off x="987552" y="4114800"/>
-            <a:ext cx="2743200" cy="201168"/>
-          </a:xfrm>
-          <a:prstGeom prst="rect">
-            <a:avLst/>
-          </a:prstGeom>
-          <a:noFill/>
-          <a:ln/>
-        </p:spPr>
-        <p:txBody>
-          <a:bodyPr wrap="square" lIns="0" tIns="0" rIns="0" bIns="0" rtlCol="0" anchor="t"/>
-          <a:lstStyle/>
-          <a:p>
-            <a:pPr marL="0" indent="0">
-              <a:buNone/>
-            </a:pPr>
-            <a:r>
-              <a:rPr lang="en-US" sz="1050" dirty="0">
-                <a:solidFill>
-                  <a:srgbClr val="5A5E63"/>
-                </a:solidFill>
-                <a:latin typeface="Inter Medium" pitchFamily="34" charset="0"/>
-                <a:ea typeface="Inter Medium" pitchFamily="34" charset="-122"/>
-                <a:cs typeface="Inter Medium" pitchFamily="34" charset="-120"/>
-              </a:rPr>
               <a:t>Why it matters</a:t>
             </a:r>
             <a:endParaRPr lang="en-US" sz="1050" dirty="0"/>
@@ -16753,17 +14093,24 @@
         </p:nvSpPr>
         <p:spPr>
           <a:xfrm>
-            <a:off x="1005840" y="4498848"/>
+            <a:off x="1005840" y="3989145"/>
             <a:ext cx="100584" cy="100584"/>
           </a:xfrm>
           <a:prstGeom prst="rect">
             <a:avLst/>
           </a:prstGeom>
           <a:solidFill>
-            <a:srgbClr val="F14539"/>
+            <a:schemeClr val="tx1"/>
           </a:solidFill>
           <a:ln/>
         </p:spPr>
+        <p:txBody>
+          <a:bodyPr/>
+          <a:lstStyle/>
+          <a:p>
+            <a:endParaRPr lang="en-GB"/>
+          </a:p>
+        </p:txBody>
       </p:sp>
       <p:sp>
         <p:nvSpPr>
@@ -16773,7 +14120,7 @@
         </p:nvSpPr>
         <p:spPr>
           <a:xfrm>
-            <a:off x="1261872" y="4434840"/>
+            <a:off x="1261872" y="3902133"/>
             <a:ext cx="4297680" cy="457200"/>
           </a:xfrm>
           <a:prstGeom prst="rect">
@@ -16812,17 +14159,24 @@
         </p:nvSpPr>
         <p:spPr>
           <a:xfrm>
-            <a:off x="1005840" y="5047488"/>
+            <a:off x="1005840" y="4537785"/>
             <a:ext cx="100584" cy="100584"/>
           </a:xfrm>
           <a:prstGeom prst="rect">
             <a:avLst/>
           </a:prstGeom>
           <a:solidFill>
-            <a:srgbClr val="F14539"/>
+            <a:schemeClr val="tx1"/>
           </a:solidFill>
           <a:ln/>
         </p:spPr>
+        <p:txBody>
+          <a:bodyPr/>
+          <a:lstStyle/>
+          <a:p>
+            <a:endParaRPr lang="en-GB"/>
+          </a:p>
+        </p:txBody>
       </p:sp>
       <p:sp>
         <p:nvSpPr>
@@ -16832,7 +14186,7 @@
         </p:nvSpPr>
         <p:spPr>
           <a:xfrm>
-            <a:off x="1261872" y="4983480"/>
+            <a:off x="1261872" y="4450773"/>
             <a:ext cx="4297680" cy="457200"/>
           </a:xfrm>
           <a:prstGeom prst="rect">
@@ -16871,17 +14225,24 @@
         </p:nvSpPr>
         <p:spPr>
           <a:xfrm>
-            <a:off x="1005840" y="5596128"/>
+            <a:off x="1005840" y="5086425"/>
             <a:ext cx="100584" cy="100584"/>
           </a:xfrm>
           <a:prstGeom prst="rect">
             <a:avLst/>
           </a:prstGeom>
           <a:solidFill>
-            <a:srgbClr val="F14539"/>
+            <a:schemeClr val="tx1"/>
           </a:solidFill>
           <a:ln/>
         </p:spPr>
+        <p:txBody>
+          <a:bodyPr/>
+          <a:lstStyle/>
+          <a:p>
+            <a:endParaRPr lang="en-GB"/>
+          </a:p>
+        </p:txBody>
       </p:sp>
       <p:sp>
         <p:nvSpPr>
@@ -16891,7 +14252,7 @@
         </p:nvSpPr>
         <p:spPr>
           <a:xfrm>
-            <a:off x="1261872" y="5532120"/>
+            <a:off x="1261872" y="4999413"/>
             <a:ext cx="4297680" cy="457200"/>
           </a:xfrm>
           <a:prstGeom prst="rect">
@@ -16916,7 +14277,7 @@
                 <a:ea typeface="Inter" pitchFamily="34" charset="-122"/>
                 <a:cs typeface="Inter" pitchFamily="34" charset="-120"/>
               </a:rPr>
-              <a:t>Each brand would make its own platform decision, so the group ends up with several tools to run.</a:t>
+              <a:t>Each brand would make its own platform decision, so the group ends up with several tools to run at a meaningfully higher cost.</a:t>
             </a:r>
             <a:endParaRPr lang="en-US" sz="1100" dirty="0"/>
           </a:p>
@@ -16948,6 +14309,13 @@
             <a:prstDash val="solid"/>
           </a:ln>
         </p:spPr>
+        <p:txBody>
+          <a:bodyPr/>
+          <a:lstStyle/>
+          <a:p>
+            <a:endParaRPr lang="en-GB"/>
+          </a:p>
+        </p:txBody>
       </p:sp>
       <p:sp>
         <p:nvSpPr>
@@ -17007,6 +14375,13 @@
           </a:solidFill>
           <a:ln/>
         </p:spPr>
+        <p:txBody>
+          <a:bodyPr/>
+          <a:lstStyle/>
+          <a:p>
+            <a:endParaRPr lang="en-GB"/>
+          </a:p>
+        </p:txBody>
       </p:sp>
       <p:sp>
         <p:nvSpPr>
@@ -17147,6 +14522,13 @@
             <a:prstDash val="solid"/>
           </a:ln>
         </p:spPr>
+        <p:txBody>
+          <a:bodyPr/>
+          <a:lstStyle/>
+          <a:p>
+            <a:endParaRPr lang="en-GB"/>
+          </a:p>
+        </p:txBody>
       </p:sp>
       <p:sp>
         <p:nvSpPr>
@@ -17167,6 +14549,13 @@
           </a:solidFill>
           <a:ln/>
         </p:spPr>
+        <p:txBody>
+          <a:bodyPr/>
+          <a:lstStyle/>
+          <a:p>
+            <a:endParaRPr lang="en-GB"/>
+          </a:p>
+        </p:txBody>
       </p:sp>
       <p:sp>
         <p:nvSpPr>
@@ -17307,6 +14696,13 @@
             <a:prstDash val="solid"/>
           </a:ln>
         </p:spPr>
+        <p:txBody>
+          <a:bodyPr/>
+          <a:lstStyle/>
+          <a:p>
+            <a:endParaRPr lang="en-GB"/>
+          </a:p>
+        </p:txBody>
       </p:sp>
       <p:sp>
         <p:nvSpPr>
@@ -17327,6 +14723,13 @@
           </a:solidFill>
           <a:ln/>
         </p:spPr>
+        <p:txBody>
+          <a:bodyPr/>
+          <a:lstStyle/>
+          <a:p>
+            <a:endParaRPr lang="en-GB"/>
+          </a:p>
+        </p:txBody>
       </p:sp>
       <p:sp>
         <p:nvSpPr>
@@ -17465,7 +14868,7 @@
           </a:prstGeom>
           <a:extLst>
             <a:ext uri="{C572A759-6A51-4108-AA02-DFA0A04FC94B}">
-              <ma14:wrappingTextBoxFlag xmlns:ma14="http://schemas.microsoft.com/office/mac/drawingml/2011/main" xmlns="" val="0"/>
+              <ma14:wrappingTextBoxFlag xmlns="" xmlns:ma14="http://schemas.microsoft.com/office/mac/drawingml/2011/main" val="0"/>
             </a:ext>
           </a:extLst>
         </p:spPr>
@@ -17487,9 +14890,1681 @@
             <a:pPr algn="r"/>
             <a:fld id="{F7021451-1387-4CA6-816F-3879F97B5CBC}" type="slidenum">
               <a:rPr lang="en-US" b="0"/>
-              <a:t>9</a:t>
+              <a:t>8</a:t>
             </a:fld>
             <a:endParaRPr lang="en-US"/>
+          </a:p>
+        </p:txBody>
+      </p:sp>
+    </p:spTree>
+  </p:cSld>
+  <p:clrMapOvr>
+    <a:masterClrMapping/>
+  </p:clrMapOvr>
+</p:sld>
+</file>
+
+<file path=ppt/slides/slide9.xml><?xml version="1.0" encoding="utf-8"?>
+<p:sld xmlns:a="http://schemas.openxmlformats.org/drawingml/2006/main" xmlns:r="http://schemas.openxmlformats.org/officeDocument/2006/relationships" xmlns:p="http://schemas.openxmlformats.org/presentationml/2006/main">
+  <p:cSld name="Slide 10">
+    <p:spTree>
+      <p:nvGrpSpPr>
+        <p:cNvPr id="1" name=""/>
+        <p:cNvGrpSpPr/>
+        <p:nvPr/>
+      </p:nvGrpSpPr>
+      <p:grpSpPr>
+        <a:xfrm>
+          <a:off x="0" y="0"/>
+          <a:ext cx="0" cy="0"/>
+          <a:chOff x="0" y="0"/>
+          <a:chExt cx="0" cy="0"/>
+        </a:xfrm>
+      </p:grpSpPr>
+      <p:sp>
+        <p:nvSpPr>
+          <p:cNvPr id="2" name="Text 0"/>
+          <p:cNvSpPr txBox="1"/>
+          <p:nvPr/>
+        </p:nvSpPr>
+        <p:spPr>
+          <a:xfrm>
+            <a:off x="2881191" y="219456"/>
+            <a:ext cx="3200400" cy="274320"/>
+          </a:xfrm>
+          <a:prstGeom prst="rect">
+            <a:avLst/>
+          </a:prstGeom>
+          <a:noFill/>
+          <a:ln/>
+        </p:spPr>
+        <p:txBody>
+          <a:bodyPr wrap="square" lIns="0" tIns="0" rIns="0" bIns="0" rtlCol="0" anchor="ctr"/>
+          <a:lstStyle/>
+          <a:p>
+            <a:pPr marL="0" indent="0">
+              <a:buNone/>
+            </a:pPr>
+            <a:r>
+              <a:rPr lang="en-US" sz="1100" dirty="0">
+                <a:solidFill>
+                  <a:srgbClr val="16181D"/>
+                </a:solidFill>
+                <a:latin typeface="Inter Medium" pitchFamily="34" charset="0"/>
+                <a:ea typeface="Inter Medium" pitchFamily="34" charset="-122"/>
+                <a:cs typeface="Inter Medium" pitchFamily="34" charset="-120"/>
+              </a:rPr>
+              <a:t>Next steps</a:t>
+            </a:r>
+            <a:endParaRPr lang="en-US" sz="1100" dirty="0"/>
+          </a:p>
+        </p:txBody>
+      </p:sp>
+      <p:sp>
+        <p:nvSpPr>
+          <p:cNvPr id="3" name="Text 1"/>
+          <p:cNvSpPr txBox="1"/>
+          <p:nvPr/>
+        </p:nvSpPr>
+        <p:spPr>
+          <a:xfrm>
+            <a:off x="731520" y="1371600"/>
+            <a:ext cx="5486400" cy="914400"/>
+          </a:xfrm>
+          <a:prstGeom prst="rect">
+            <a:avLst/>
+          </a:prstGeom>
+          <a:noFill/>
+          <a:ln/>
+        </p:spPr>
+        <p:txBody>
+          <a:bodyPr wrap="square" lIns="0" tIns="0" rIns="0" bIns="0" rtlCol="0" anchor="t"/>
+          <a:lstStyle/>
+          <a:p>
+            <a:pPr marL="0" indent="0">
+              <a:buNone/>
+            </a:pPr>
+            <a:r>
+              <a:rPr lang="en-US" sz="5400" kern="0" spc="-220" dirty="0">
+                <a:solidFill>
+                  <a:srgbClr val="16181D"/>
+                </a:solidFill>
+                <a:latin typeface="Inter Medium" pitchFamily="34" charset="0"/>
+                <a:ea typeface="Inter Medium" pitchFamily="34" charset="-122"/>
+                <a:cs typeface="Inter Medium" pitchFamily="34" charset="-120"/>
+              </a:rPr>
+              <a:t>Thank you</a:t>
+            </a:r>
+            <a:endParaRPr lang="en-US" sz="5400" dirty="0"/>
+          </a:p>
+        </p:txBody>
+      </p:sp>
+      <p:sp>
+        <p:nvSpPr>
+          <p:cNvPr id="4" name="Text 2"/>
+          <p:cNvSpPr txBox="1"/>
+          <p:nvPr/>
+        </p:nvSpPr>
+        <p:spPr>
+          <a:xfrm>
+            <a:off x="731520" y="2331720"/>
+            <a:ext cx="5486400" cy="411480"/>
+          </a:xfrm>
+          <a:prstGeom prst="rect">
+            <a:avLst/>
+          </a:prstGeom>
+          <a:noFill/>
+          <a:ln/>
+        </p:spPr>
+        <p:txBody>
+          <a:bodyPr wrap="square" lIns="0" tIns="0" rIns="0" bIns="0" rtlCol="0" anchor="t"/>
+          <a:lstStyle/>
+          <a:p>
+            <a:pPr marL="0" indent="0">
+              <a:buNone/>
+            </a:pPr>
+            <a:r>
+              <a:rPr lang="en-US" sz="2000" dirty="0">
+                <a:solidFill>
+                  <a:srgbClr val="5A5E63"/>
+                </a:solidFill>
+                <a:latin typeface="Inter" pitchFamily="34" charset="0"/>
+                <a:ea typeface="Inter" pitchFamily="34" charset="-122"/>
+                <a:cs typeface="Inter" pitchFamily="34" charset="-120"/>
+              </a:rPr>
+              <a:t>Q&amp;A</a:t>
+            </a:r>
+            <a:endParaRPr lang="en-US" sz="2000" dirty="0"/>
+          </a:p>
+        </p:txBody>
+      </p:sp>
+      <p:sp>
+        <p:nvSpPr>
+          <p:cNvPr id="5" name="Shape 3"/>
+          <p:cNvSpPr/>
+          <p:nvPr/>
+        </p:nvSpPr>
+        <p:spPr>
+          <a:xfrm>
+            <a:off x="1865376" y="3785616"/>
+            <a:ext cx="219456" cy="219456"/>
+          </a:xfrm>
+          <a:prstGeom prst="rect">
+            <a:avLst/>
+          </a:prstGeom>
+          <a:solidFill>
+            <a:srgbClr val="6720FF"/>
+          </a:solidFill>
+          <a:ln/>
+        </p:spPr>
+        <p:txBody>
+          <a:bodyPr/>
+          <a:lstStyle/>
+          <a:p>
+            <a:endParaRPr lang="en-GB"/>
+          </a:p>
+        </p:txBody>
+      </p:sp>
+      <p:sp>
+        <p:nvSpPr>
+          <p:cNvPr id="6" name="Shape 4"/>
+          <p:cNvSpPr/>
+          <p:nvPr/>
+        </p:nvSpPr>
+        <p:spPr>
+          <a:xfrm>
+            <a:off x="2148840" y="3785616"/>
+            <a:ext cx="219456" cy="219456"/>
+          </a:xfrm>
+          <a:prstGeom prst="rect">
+            <a:avLst/>
+          </a:prstGeom>
+          <a:solidFill>
+            <a:srgbClr val="6720FF"/>
+          </a:solidFill>
+          <a:ln/>
+        </p:spPr>
+        <p:txBody>
+          <a:bodyPr/>
+          <a:lstStyle/>
+          <a:p>
+            <a:endParaRPr lang="en-GB"/>
+          </a:p>
+        </p:txBody>
+      </p:sp>
+      <p:sp>
+        <p:nvSpPr>
+          <p:cNvPr id="7" name="Shape 5"/>
+          <p:cNvSpPr/>
+          <p:nvPr/>
+        </p:nvSpPr>
+        <p:spPr>
+          <a:xfrm>
+            <a:off x="1581912" y="4069080"/>
+            <a:ext cx="219456" cy="219456"/>
+          </a:xfrm>
+          <a:prstGeom prst="rect">
+            <a:avLst/>
+          </a:prstGeom>
+          <a:solidFill>
+            <a:srgbClr val="6720FF"/>
+          </a:solidFill>
+          <a:ln/>
+        </p:spPr>
+        <p:txBody>
+          <a:bodyPr/>
+          <a:lstStyle/>
+          <a:p>
+            <a:endParaRPr lang="en-GB"/>
+          </a:p>
+        </p:txBody>
+      </p:sp>
+      <p:sp>
+        <p:nvSpPr>
+          <p:cNvPr id="8" name="Shape 6"/>
+          <p:cNvSpPr/>
+          <p:nvPr/>
+        </p:nvSpPr>
+        <p:spPr>
+          <a:xfrm>
+            <a:off x="1865376" y="4069080"/>
+            <a:ext cx="219456" cy="219456"/>
+          </a:xfrm>
+          <a:prstGeom prst="rect">
+            <a:avLst/>
+          </a:prstGeom>
+          <a:solidFill>
+            <a:srgbClr val="CEB4FF"/>
+          </a:solidFill>
+          <a:ln/>
+        </p:spPr>
+        <p:txBody>
+          <a:bodyPr/>
+          <a:lstStyle/>
+          <a:p>
+            <a:endParaRPr lang="en-GB"/>
+          </a:p>
+        </p:txBody>
+      </p:sp>
+      <p:sp>
+        <p:nvSpPr>
+          <p:cNvPr id="9" name="Shape 7"/>
+          <p:cNvSpPr/>
+          <p:nvPr/>
+        </p:nvSpPr>
+        <p:spPr>
+          <a:xfrm>
+            <a:off x="2148840" y="4069080"/>
+            <a:ext cx="219456" cy="219456"/>
+          </a:xfrm>
+          <a:prstGeom prst="rect">
+            <a:avLst/>
+          </a:prstGeom>
+          <a:solidFill>
+            <a:srgbClr val="6720FF"/>
+          </a:solidFill>
+          <a:ln/>
+        </p:spPr>
+        <p:txBody>
+          <a:bodyPr/>
+          <a:lstStyle/>
+          <a:p>
+            <a:endParaRPr lang="en-GB"/>
+          </a:p>
+        </p:txBody>
+      </p:sp>
+      <p:sp>
+        <p:nvSpPr>
+          <p:cNvPr id="10" name="Shape 8"/>
+          <p:cNvSpPr/>
+          <p:nvPr/>
+        </p:nvSpPr>
+        <p:spPr>
+          <a:xfrm>
+            <a:off x="1298448" y="4352544"/>
+            <a:ext cx="219456" cy="219456"/>
+          </a:xfrm>
+          <a:prstGeom prst="rect">
+            <a:avLst/>
+          </a:prstGeom>
+          <a:solidFill>
+            <a:srgbClr val="6720FF"/>
+          </a:solidFill>
+          <a:ln/>
+        </p:spPr>
+        <p:txBody>
+          <a:bodyPr/>
+          <a:lstStyle/>
+          <a:p>
+            <a:endParaRPr lang="en-GB"/>
+          </a:p>
+        </p:txBody>
+      </p:sp>
+      <p:sp>
+        <p:nvSpPr>
+          <p:cNvPr id="11" name="Shape 9"/>
+          <p:cNvSpPr/>
+          <p:nvPr/>
+        </p:nvSpPr>
+        <p:spPr>
+          <a:xfrm>
+            <a:off x="1581912" y="4352544"/>
+            <a:ext cx="219456" cy="219456"/>
+          </a:xfrm>
+          <a:prstGeom prst="rect">
+            <a:avLst/>
+          </a:prstGeom>
+          <a:solidFill>
+            <a:srgbClr val="CEB4FF"/>
+          </a:solidFill>
+          <a:ln/>
+        </p:spPr>
+        <p:txBody>
+          <a:bodyPr/>
+          <a:lstStyle/>
+          <a:p>
+            <a:endParaRPr lang="en-GB"/>
+          </a:p>
+        </p:txBody>
+      </p:sp>
+      <p:sp>
+        <p:nvSpPr>
+          <p:cNvPr id="12" name="Shape 10"/>
+          <p:cNvSpPr/>
+          <p:nvPr/>
+        </p:nvSpPr>
+        <p:spPr>
+          <a:xfrm>
+            <a:off x="1865376" y="4352544"/>
+            <a:ext cx="219456" cy="219456"/>
+          </a:xfrm>
+          <a:prstGeom prst="rect">
+            <a:avLst/>
+          </a:prstGeom>
+          <a:solidFill>
+            <a:srgbClr val="E0D2FD"/>
+          </a:solidFill>
+          <a:ln/>
+        </p:spPr>
+        <p:txBody>
+          <a:bodyPr/>
+          <a:lstStyle/>
+          <a:p>
+            <a:endParaRPr lang="en-GB"/>
+          </a:p>
+        </p:txBody>
+      </p:sp>
+      <p:sp>
+        <p:nvSpPr>
+          <p:cNvPr id="13" name="Shape 11"/>
+          <p:cNvSpPr/>
+          <p:nvPr/>
+        </p:nvSpPr>
+        <p:spPr>
+          <a:xfrm>
+            <a:off x="2148840" y="4352544"/>
+            <a:ext cx="219456" cy="219456"/>
+          </a:xfrm>
+          <a:prstGeom prst="rect">
+            <a:avLst/>
+          </a:prstGeom>
+          <a:solidFill>
+            <a:srgbClr val="CEB4FF"/>
+          </a:solidFill>
+          <a:ln/>
+        </p:spPr>
+        <p:txBody>
+          <a:bodyPr/>
+          <a:lstStyle/>
+          <a:p>
+            <a:endParaRPr lang="en-GB"/>
+          </a:p>
+        </p:txBody>
+      </p:sp>
+      <p:sp>
+        <p:nvSpPr>
+          <p:cNvPr id="14" name="Shape 12"/>
+          <p:cNvSpPr/>
+          <p:nvPr/>
+        </p:nvSpPr>
+        <p:spPr>
+          <a:xfrm>
+            <a:off x="1014984" y="4636008"/>
+            <a:ext cx="219456" cy="219456"/>
+          </a:xfrm>
+          <a:prstGeom prst="rect">
+            <a:avLst/>
+          </a:prstGeom>
+          <a:solidFill>
+            <a:srgbClr val="6720FF"/>
+          </a:solidFill>
+          <a:ln/>
+        </p:spPr>
+        <p:txBody>
+          <a:bodyPr/>
+          <a:lstStyle/>
+          <a:p>
+            <a:endParaRPr lang="en-GB"/>
+          </a:p>
+        </p:txBody>
+      </p:sp>
+      <p:sp>
+        <p:nvSpPr>
+          <p:cNvPr id="15" name="Shape 13"/>
+          <p:cNvSpPr/>
+          <p:nvPr/>
+        </p:nvSpPr>
+        <p:spPr>
+          <a:xfrm>
+            <a:off x="1298448" y="4636008"/>
+            <a:ext cx="219456" cy="219456"/>
+          </a:xfrm>
+          <a:prstGeom prst="rect">
+            <a:avLst/>
+          </a:prstGeom>
+          <a:solidFill>
+            <a:srgbClr val="CEB4FF"/>
+          </a:solidFill>
+          <a:ln/>
+        </p:spPr>
+        <p:txBody>
+          <a:bodyPr/>
+          <a:lstStyle/>
+          <a:p>
+            <a:endParaRPr lang="en-GB"/>
+          </a:p>
+        </p:txBody>
+      </p:sp>
+      <p:sp>
+        <p:nvSpPr>
+          <p:cNvPr id="16" name="Shape 14"/>
+          <p:cNvSpPr/>
+          <p:nvPr/>
+        </p:nvSpPr>
+        <p:spPr>
+          <a:xfrm>
+            <a:off x="1581912" y="4636008"/>
+            <a:ext cx="219456" cy="219456"/>
+          </a:xfrm>
+          <a:prstGeom prst="rect">
+            <a:avLst/>
+          </a:prstGeom>
+          <a:solidFill>
+            <a:srgbClr val="E0D2FD"/>
+          </a:solidFill>
+          <a:ln/>
+        </p:spPr>
+        <p:txBody>
+          <a:bodyPr/>
+          <a:lstStyle/>
+          <a:p>
+            <a:endParaRPr lang="en-GB"/>
+          </a:p>
+        </p:txBody>
+      </p:sp>
+      <p:sp>
+        <p:nvSpPr>
+          <p:cNvPr id="17" name="Shape 15"/>
+          <p:cNvSpPr/>
+          <p:nvPr/>
+        </p:nvSpPr>
+        <p:spPr>
+          <a:xfrm>
+            <a:off x="731520" y="4919472"/>
+            <a:ext cx="219456" cy="219456"/>
+          </a:xfrm>
+          <a:prstGeom prst="rect">
+            <a:avLst/>
+          </a:prstGeom>
+          <a:solidFill>
+            <a:srgbClr val="6720FF"/>
+          </a:solidFill>
+          <a:ln/>
+        </p:spPr>
+        <p:txBody>
+          <a:bodyPr/>
+          <a:lstStyle/>
+          <a:p>
+            <a:endParaRPr lang="en-GB"/>
+          </a:p>
+        </p:txBody>
+      </p:sp>
+      <p:sp>
+        <p:nvSpPr>
+          <p:cNvPr id="18" name="Shape 16"/>
+          <p:cNvSpPr/>
+          <p:nvPr/>
+        </p:nvSpPr>
+        <p:spPr>
+          <a:xfrm>
+            <a:off x="1014984" y="4919472"/>
+            <a:ext cx="219456" cy="219456"/>
+          </a:xfrm>
+          <a:prstGeom prst="rect">
+            <a:avLst/>
+          </a:prstGeom>
+          <a:solidFill>
+            <a:srgbClr val="CEB4FF"/>
+          </a:solidFill>
+          <a:ln/>
+        </p:spPr>
+        <p:txBody>
+          <a:bodyPr/>
+          <a:lstStyle/>
+          <a:p>
+            <a:endParaRPr lang="en-GB"/>
+          </a:p>
+        </p:txBody>
+      </p:sp>
+      <p:sp>
+        <p:nvSpPr>
+          <p:cNvPr id="19" name="Shape 17"/>
+          <p:cNvSpPr/>
+          <p:nvPr/>
+        </p:nvSpPr>
+        <p:spPr>
+          <a:xfrm>
+            <a:off x="1298448" y="4919472"/>
+            <a:ext cx="219456" cy="219456"/>
+          </a:xfrm>
+          <a:prstGeom prst="rect">
+            <a:avLst/>
+          </a:prstGeom>
+          <a:solidFill>
+            <a:srgbClr val="E0D2FD"/>
+          </a:solidFill>
+          <a:ln/>
+        </p:spPr>
+        <p:txBody>
+          <a:bodyPr/>
+          <a:lstStyle/>
+          <a:p>
+            <a:endParaRPr lang="en-GB"/>
+          </a:p>
+        </p:txBody>
+      </p:sp>
+      <p:sp>
+        <p:nvSpPr>
+          <p:cNvPr id="20" name="Text 18"/>
+          <p:cNvSpPr txBox="1"/>
+          <p:nvPr/>
+        </p:nvSpPr>
+        <p:spPr>
+          <a:xfrm>
+            <a:off x="5303520" y="1005840"/>
+            <a:ext cx="3657600" cy="219456"/>
+          </a:xfrm>
+          <a:prstGeom prst="rect">
+            <a:avLst/>
+          </a:prstGeom>
+          <a:noFill/>
+          <a:ln/>
+        </p:spPr>
+        <p:txBody>
+          <a:bodyPr wrap="square" lIns="0" tIns="0" rIns="0" bIns="0" rtlCol="0" anchor="t"/>
+          <a:lstStyle/>
+          <a:p>
+            <a:pPr marL="0" indent="0">
+              <a:buNone/>
+            </a:pPr>
+            <a:r>
+              <a:rPr lang="en-US" sz="1100" dirty="0">
+                <a:solidFill>
+                  <a:srgbClr val="501BC4"/>
+                </a:solidFill>
+                <a:latin typeface="Inter Medium" pitchFamily="34" charset="0"/>
+                <a:ea typeface="Inter Medium" pitchFamily="34" charset="-122"/>
+                <a:cs typeface="Inter Medium" pitchFamily="34" charset="-120"/>
+              </a:rPr>
+              <a:t>Joint next actions</a:t>
+            </a:r>
+            <a:endParaRPr lang="en-US" sz="1100" dirty="0"/>
+          </a:p>
+        </p:txBody>
+      </p:sp>
+      <p:sp>
+        <p:nvSpPr>
+          <p:cNvPr id="21" name="Shape 19"/>
+          <p:cNvSpPr/>
+          <p:nvPr/>
+        </p:nvSpPr>
+        <p:spPr>
+          <a:xfrm>
+            <a:off x="5303520" y="1371600"/>
+            <a:ext cx="6156655" cy="3767328"/>
+          </a:xfrm>
+          <a:prstGeom prst="roundRect">
+            <a:avLst>
+              <a:gd name="adj" fmla="val 2913"/>
+            </a:avLst>
+          </a:prstGeom>
+          <a:solidFill>
+            <a:srgbClr val="FFFFFF"/>
+          </a:solidFill>
+          <a:ln/>
+        </p:spPr>
+        <p:txBody>
+          <a:bodyPr/>
+          <a:lstStyle/>
+          <a:p>
+            <a:endParaRPr lang="en-GB"/>
+          </a:p>
+        </p:txBody>
+      </p:sp>
+      <p:sp>
+        <p:nvSpPr>
+          <p:cNvPr id="22" name="Shape 20"/>
+          <p:cNvSpPr/>
+          <p:nvPr/>
+        </p:nvSpPr>
+        <p:spPr>
+          <a:xfrm>
+            <a:off x="5303520" y="1371600"/>
+            <a:ext cx="6156655" cy="365760"/>
+          </a:xfrm>
+          <a:prstGeom prst="round2SameRect">
+            <a:avLst/>
+          </a:prstGeom>
+          <a:solidFill>
+            <a:srgbClr val="FAF7FF"/>
+          </a:solidFill>
+          <a:ln/>
+        </p:spPr>
+        <p:txBody>
+          <a:bodyPr/>
+          <a:lstStyle/>
+          <a:p>
+            <a:endParaRPr lang="en-GB"/>
+          </a:p>
+        </p:txBody>
+      </p:sp>
+      <p:sp>
+        <p:nvSpPr>
+          <p:cNvPr id="23" name="Shape 21"/>
+          <p:cNvSpPr/>
+          <p:nvPr/>
+        </p:nvSpPr>
+        <p:spPr>
+          <a:xfrm>
+            <a:off x="5303520" y="1737360"/>
+            <a:ext cx="6156655" cy="0"/>
+          </a:xfrm>
+          <a:prstGeom prst="line">
+            <a:avLst/>
+          </a:prstGeom>
+          <a:noFill/>
+          <a:ln w="9525">
+            <a:solidFill>
+              <a:srgbClr val="E6EAF4"/>
+            </a:solidFill>
+            <a:prstDash val="solid"/>
+          </a:ln>
+        </p:spPr>
+        <p:txBody>
+          <a:bodyPr/>
+          <a:lstStyle/>
+          <a:p>
+            <a:endParaRPr lang="en-GB"/>
+          </a:p>
+        </p:txBody>
+      </p:sp>
+      <p:sp>
+        <p:nvSpPr>
+          <p:cNvPr id="24" name="Text 22"/>
+          <p:cNvSpPr txBox="1"/>
+          <p:nvPr/>
+        </p:nvSpPr>
+        <p:spPr>
+          <a:xfrm>
+            <a:off x="5486400" y="1371600"/>
+            <a:ext cx="3200400" cy="365760"/>
+          </a:xfrm>
+          <a:prstGeom prst="rect">
+            <a:avLst/>
+          </a:prstGeom>
+          <a:noFill/>
+          <a:ln/>
+        </p:spPr>
+        <p:txBody>
+          <a:bodyPr wrap="square" lIns="0" tIns="0" rIns="0" bIns="0" rtlCol="0" anchor="ctr"/>
+          <a:lstStyle/>
+          <a:p>
+            <a:pPr marL="0" indent="0">
+              <a:buNone/>
+            </a:pPr>
+            <a:r>
+              <a:rPr lang="en-US" sz="950" dirty="0">
+                <a:solidFill>
+                  <a:srgbClr val="5A5E63"/>
+                </a:solidFill>
+                <a:latin typeface="Inter Medium" pitchFamily="34" charset="0"/>
+                <a:ea typeface="Inter Medium" pitchFamily="34" charset="-122"/>
+                <a:cs typeface="Inter Medium" pitchFamily="34" charset="-120"/>
+              </a:rPr>
+              <a:t>Action</a:t>
+            </a:r>
+            <a:endParaRPr lang="en-US" sz="950" dirty="0"/>
+          </a:p>
+        </p:txBody>
+      </p:sp>
+      <p:sp>
+        <p:nvSpPr>
+          <p:cNvPr id="25" name="Text 23"/>
+          <p:cNvSpPr txBox="1"/>
+          <p:nvPr/>
+        </p:nvSpPr>
+        <p:spPr>
+          <a:xfrm>
+            <a:off x="8823960" y="1371600"/>
+            <a:ext cx="1783080" cy="365760"/>
+          </a:xfrm>
+          <a:prstGeom prst="rect">
+            <a:avLst/>
+          </a:prstGeom>
+          <a:noFill/>
+          <a:ln/>
+        </p:spPr>
+        <p:txBody>
+          <a:bodyPr wrap="square" lIns="0" tIns="0" rIns="0" bIns="0" rtlCol="0" anchor="ctr"/>
+          <a:lstStyle/>
+          <a:p>
+            <a:pPr marL="0" indent="0">
+              <a:buNone/>
+            </a:pPr>
+            <a:r>
+              <a:rPr lang="en-US" sz="950" dirty="0">
+                <a:solidFill>
+                  <a:srgbClr val="5A5E63"/>
+                </a:solidFill>
+                <a:latin typeface="Inter Medium" pitchFamily="34" charset="0"/>
+                <a:ea typeface="Inter Medium" pitchFamily="34" charset="-122"/>
+                <a:cs typeface="Inter Medium" pitchFamily="34" charset="-120"/>
+              </a:rPr>
+              <a:t>Owner</a:t>
+            </a:r>
+            <a:endParaRPr lang="en-US" sz="950" dirty="0"/>
+          </a:p>
+        </p:txBody>
+      </p:sp>
+      <p:sp>
+        <p:nvSpPr>
+          <p:cNvPr id="26" name="Text 24"/>
+          <p:cNvSpPr txBox="1"/>
+          <p:nvPr/>
+        </p:nvSpPr>
+        <p:spPr>
+          <a:xfrm>
+            <a:off x="10618927" y="1371600"/>
+            <a:ext cx="731520" cy="365760"/>
+          </a:xfrm>
+          <a:prstGeom prst="rect">
+            <a:avLst/>
+          </a:prstGeom>
+          <a:noFill/>
+          <a:ln/>
+        </p:spPr>
+        <p:txBody>
+          <a:bodyPr wrap="square" lIns="0" tIns="0" rIns="0" bIns="0" rtlCol="0" anchor="ctr"/>
+          <a:lstStyle/>
+          <a:p>
+            <a:pPr marL="0" indent="0">
+              <a:buNone/>
+            </a:pPr>
+            <a:r>
+              <a:rPr lang="en-US" sz="950" dirty="0">
+                <a:solidFill>
+                  <a:srgbClr val="5A5E63"/>
+                </a:solidFill>
+                <a:latin typeface="Inter Medium" pitchFamily="34" charset="0"/>
+                <a:ea typeface="Inter Medium" pitchFamily="34" charset="-122"/>
+                <a:cs typeface="Inter Medium" pitchFamily="34" charset="-120"/>
+              </a:rPr>
+              <a:t>Due</a:t>
+            </a:r>
+            <a:endParaRPr lang="en-US" sz="950" dirty="0"/>
+          </a:p>
+        </p:txBody>
+      </p:sp>
+      <p:sp>
+        <p:nvSpPr>
+          <p:cNvPr id="27" name="Text 25"/>
+          <p:cNvSpPr txBox="1"/>
+          <p:nvPr/>
+        </p:nvSpPr>
+        <p:spPr>
+          <a:xfrm>
+            <a:off x="5486400" y="1737360"/>
+            <a:ext cx="3200400" cy="566928"/>
+          </a:xfrm>
+          <a:prstGeom prst="rect">
+            <a:avLst/>
+          </a:prstGeom>
+          <a:noFill/>
+          <a:ln/>
+        </p:spPr>
+        <p:txBody>
+          <a:bodyPr wrap="square" lIns="0" tIns="0" rIns="0" bIns="0" rtlCol="0" anchor="ctr"/>
+          <a:lstStyle/>
+          <a:p>
+            <a:pPr marL="0" indent="0">
+              <a:buNone/>
+            </a:pPr>
+            <a:r>
+              <a:rPr lang="en-US" sz="1050" dirty="0">
+                <a:solidFill>
+                  <a:srgbClr val="16181D"/>
+                </a:solidFill>
+                <a:latin typeface="Inter" pitchFamily="34" charset="0"/>
+                <a:ea typeface="Inter" pitchFamily="34" charset="-122"/>
+                <a:cs typeface="Inter" pitchFamily="34" charset="-120"/>
+              </a:rPr>
+              <a:t>Retune scale-up thresholds and agree a pre-warm runbook for planned promotions</a:t>
+            </a:r>
+            <a:endParaRPr lang="en-US" sz="1050" dirty="0"/>
+          </a:p>
+        </p:txBody>
+      </p:sp>
+      <p:sp>
+        <p:nvSpPr>
+          <p:cNvPr id="28" name="Text 26"/>
+          <p:cNvSpPr txBox="1"/>
+          <p:nvPr/>
+        </p:nvSpPr>
+        <p:spPr>
+          <a:xfrm>
+            <a:off x="8823960" y="1737360"/>
+            <a:ext cx="1783080" cy="566928"/>
+          </a:xfrm>
+          <a:prstGeom prst="rect">
+            <a:avLst/>
+          </a:prstGeom>
+          <a:noFill/>
+          <a:ln/>
+        </p:spPr>
+        <p:txBody>
+          <a:bodyPr wrap="square" lIns="0" tIns="0" rIns="0" bIns="0" rtlCol="0" anchor="ctr"/>
+          <a:lstStyle/>
+          <a:p>
+            <a:pPr marL="0" indent="0">
+              <a:buNone/>
+            </a:pPr>
+            <a:r>
+              <a:rPr lang="en-US" sz="900" dirty="0">
+                <a:solidFill>
+                  <a:srgbClr val="5A5E63"/>
+                </a:solidFill>
+                <a:latin typeface="Inter" pitchFamily="34" charset="0"/>
+                <a:ea typeface="Inter" pitchFamily="34" charset="-122"/>
+                <a:cs typeface="Inter" pitchFamily="34" charset="-120"/>
+              </a:rPr>
+              <a:t>Fireworks Engineering + Northstar CX operations</a:t>
+            </a:r>
+            <a:endParaRPr lang="en-US" sz="900" dirty="0"/>
+          </a:p>
+        </p:txBody>
+      </p:sp>
+      <p:sp>
+        <p:nvSpPr>
+          <p:cNvPr id="29" name="Text 27"/>
+          <p:cNvSpPr txBox="1"/>
+          <p:nvPr/>
+        </p:nvSpPr>
+        <p:spPr>
+          <a:xfrm>
+            <a:off x="10618927" y="1737360"/>
+            <a:ext cx="731520" cy="566928"/>
+          </a:xfrm>
+          <a:prstGeom prst="rect">
+            <a:avLst/>
+          </a:prstGeom>
+          <a:noFill/>
+          <a:ln/>
+        </p:spPr>
+        <p:txBody>
+          <a:bodyPr wrap="square" lIns="0" tIns="0" rIns="0" bIns="0" rtlCol="0" anchor="ctr"/>
+          <a:lstStyle/>
+          <a:p>
+            <a:pPr marL="0" indent="0">
+              <a:buNone/>
+            </a:pPr>
+            <a:r>
+              <a:rPr lang="en-US" sz="1050" dirty="0">
+                <a:solidFill>
+                  <a:srgbClr val="16181D"/>
+                </a:solidFill>
+                <a:latin typeface="Inter Medium" pitchFamily="34" charset="0"/>
+                <a:ea typeface="Inter Medium" pitchFamily="34" charset="-122"/>
+                <a:cs typeface="Inter Medium" pitchFamily="34" charset="-120"/>
+              </a:rPr>
+              <a:t>16 Oct</a:t>
+            </a:r>
+            <a:endParaRPr lang="en-US" sz="1050" dirty="0"/>
+          </a:p>
+        </p:txBody>
+      </p:sp>
+      <p:sp>
+        <p:nvSpPr>
+          <p:cNvPr id="30" name="Shape 28"/>
+          <p:cNvSpPr/>
+          <p:nvPr/>
+        </p:nvSpPr>
+        <p:spPr>
+          <a:xfrm>
+            <a:off x="5303520" y="2304288"/>
+            <a:ext cx="6156655" cy="0"/>
+          </a:xfrm>
+          <a:prstGeom prst="line">
+            <a:avLst/>
+          </a:prstGeom>
+          <a:noFill/>
+          <a:ln w="9525">
+            <a:solidFill>
+              <a:srgbClr val="E6EAF4"/>
+            </a:solidFill>
+            <a:prstDash val="solid"/>
+          </a:ln>
+        </p:spPr>
+        <p:txBody>
+          <a:bodyPr/>
+          <a:lstStyle/>
+          <a:p>
+            <a:endParaRPr lang="en-GB"/>
+          </a:p>
+        </p:txBody>
+      </p:sp>
+      <p:sp>
+        <p:nvSpPr>
+          <p:cNvPr id="31" name="Text 29"/>
+          <p:cNvSpPr txBox="1"/>
+          <p:nvPr/>
+        </p:nvSpPr>
+        <p:spPr>
+          <a:xfrm>
+            <a:off x="5486400" y="2304288"/>
+            <a:ext cx="3200400" cy="566928"/>
+          </a:xfrm>
+          <a:prstGeom prst="rect">
+            <a:avLst/>
+          </a:prstGeom>
+          <a:noFill/>
+          <a:ln/>
+        </p:spPr>
+        <p:txBody>
+          <a:bodyPr wrap="square" lIns="0" tIns="0" rIns="0" bIns="0" rtlCol="0" anchor="ctr"/>
+          <a:lstStyle/>
+          <a:p>
+            <a:pPr marL="0" indent="0">
+              <a:buNone/>
+            </a:pPr>
+            <a:r>
+              <a:rPr lang="en-US" sz="1050" dirty="0">
+                <a:solidFill>
+                  <a:srgbClr val="16181D"/>
+                </a:solidFill>
+                <a:latin typeface="Inter" pitchFamily="34" charset="0"/>
+                <a:ea typeface="Inter" pitchFamily="34" charset="-122"/>
+                <a:cs typeface="Inter" pitchFamily="34" charset="-120"/>
+              </a:rPr>
+              <a:t>Share pre-launch handle-time and CSAT baselines for Atlas</a:t>
+            </a:r>
+            <a:endParaRPr lang="en-US" sz="1050" dirty="0"/>
+          </a:p>
+        </p:txBody>
+      </p:sp>
+      <p:sp>
+        <p:nvSpPr>
+          <p:cNvPr id="32" name="Text 30"/>
+          <p:cNvSpPr txBox="1"/>
+          <p:nvPr/>
+        </p:nvSpPr>
+        <p:spPr>
+          <a:xfrm>
+            <a:off x="8823960" y="2304288"/>
+            <a:ext cx="1783080" cy="566928"/>
+          </a:xfrm>
+          <a:prstGeom prst="rect">
+            <a:avLst/>
+          </a:prstGeom>
+          <a:noFill/>
+          <a:ln/>
+        </p:spPr>
+        <p:txBody>
+          <a:bodyPr wrap="square" lIns="0" tIns="0" rIns="0" bIns="0" rtlCol="0" anchor="ctr"/>
+          <a:lstStyle/>
+          <a:p>
+            <a:pPr marL="0" indent="0">
+              <a:buNone/>
+            </a:pPr>
+            <a:r>
+              <a:rPr lang="en-US" sz="900" dirty="0">
+                <a:solidFill>
+                  <a:srgbClr val="5A5E63"/>
+                </a:solidFill>
+                <a:latin typeface="Inter" pitchFamily="34" charset="0"/>
+                <a:ea typeface="Inter" pitchFamily="34" charset="-122"/>
+                <a:cs typeface="Inter" pitchFamily="34" charset="-120"/>
+              </a:rPr>
+              <a:t>Deployment Strategist + Northstar CX</a:t>
+            </a:r>
+            <a:endParaRPr lang="en-US" sz="900" dirty="0"/>
+          </a:p>
+        </p:txBody>
+      </p:sp>
+      <p:sp>
+        <p:nvSpPr>
+          <p:cNvPr id="33" name="Text 31"/>
+          <p:cNvSpPr txBox="1"/>
+          <p:nvPr/>
+        </p:nvSpPr>
+        <p:spPr>
+          <a:xfrm>
+            <a:off x="10618927" y="2304288"/>
+            <a:ext cx="731520" cy="566928"/>
+          </a:xfrm>
+          <a:prstGeom prst="rect">
+            <a:avLst/>
+          </a:prstGeom>
+          <a:noFill/>
+          <a:ln/>
+        </p:spPr>
+        <p:txBody>
+          <a:bodyPr wrap="square" lIns="0" tIns="0" rIns="0" bIns="0" rtlCol="0" anchor="ctr"/>
+          <a:lstStyle/>
+          <a:p>
+            <a:pPr marL="0" indent="0">
+              <a:buNone/>
+            </a:pPr>
+            <a:r>
+              <a:rPr lang="en-US" sz="1050" dirty="0">
+                <a:solidFill>
+                  <a:srgbClr val="16181D"/>
+                </a:solidFill>
+                <a:latin typeface="Inter Medium" pitchFamily="34" charset="0"/>
+                <a:ea typeface="Inter Medium" pitchFamily="34" charset="-122"/>
+                <a:cs typeface="Inter Medium" pitchFamily="34" charset="-120"/>
+              </a:rPr>
+              <a:t>16 Oct</a:t>
+            </a:r>
+            <a:endParaRPr lang="en-US" sz="1050" dirty="0"/>
+          </a:p>
+        </p:txBody>
+      </p:sp>
+      <p:sp>
+        <p:nvSpPr>
+          <p:cNvPr id="34" name="Shape 32"/>
+          <p:cNvSpPr/>
+          <p:nvPr/>
+        </p:nvSpPr>
+        <p:spPr>
+          <a:xfrm>
+            <a:off x="5303520" y="2871216"/>
+            <a:ext cx="6156655" cy="0"/>
+          </a:xfrm>
+          <a:prstGeom prst="line">
+            <a:avLst/>
+          </a:prstGeom>
+          <a:noFill/>
+          <a:ln w="9525">
+            <a:solidFill>
+              <a:srgbClr val="E6EAF4"/>
+            </a:solidFill>
+            <a:prstDash val="solid"/>
+          </a:ln>
+        </p:spPr>
+        <p:txBody>
+          <a:bodyPr/>
+          <a:lstStyle/>
+          <a:p>
+            <a:endParaRPr lang="en-GB"/>
+          </a:p>
+        </p:txBody>
+      </p:sp>
+      <p:sp>
+        <p:nvSpPr>
+          <p:cNvPr id="35" name="Text 33"/>
+          <p:cNvSpPr txBox="1"/>
+          <p:nvPr/>
+        </p:nvSpPr>
+        <p:spPr>
+          <a:xfrm>
+            <a:off x="5486400" y="2871216"/>
+            <a:ext cx="3200400" cy="566928"/>
+          </a:xfrm>
+          <a:prstGeom prst="rect">
+            <a:avLst/>
+          </a:prstGeom>
+          <a:noFill/>
+          <a:ln/>
+        </p:spPr>
+        <p:txBody>
+          <a:bodyPr wrap="square" lIns="0" tIns="0" rIns="0" bIns="0" rtlCol="0" anchor="ctr"/>
+          <a:lstStyle/>
+          <a:p>
+            <a:pPr marL="0" indent="0">
+              <a:buNone/>
+            </a:pPr>
+            <a:r>
+              <a:rPr lang="en-US" sz="1050" dirty="0">
+                <a:solidFill>
+                  <a:srgbClr val="16181D"/>
+                </a:solidFill>
+                <a:latin typeface="Inter" pitchFamily="34" charset="0"/>
+                <a:ea typeface="Inter" pitchFamily="34" charset="-122"/>
+                <a:cs typeface="Inter" pitchFamily="34" charset="-120"/>
+              </a:rPr>
+              <a:t>Executive review: agree a group sponsor, the Ridgeline pilot and its success criteria</a:t>
+            </a:r>
+            <a:endParaRPr lang="en-US" sz="1050" dirty="0"/>
+          </a:p>
+        </p:txBody>
+      </p:sp>
+      <p:sp>
+        <p:nvSpPr>
+          <p:cNvPr id="36" name="Text 34"/>
+          <p:cNvSpPr txBox="1"/>
+          <p:nvPr/>
+        </p:nvSpPr>
+        <p:spPr>
+          <a:xfrm>
+            <a:off x="8823960" y="2871216"/>
+            <a:ext cx="1783080" cy="566928"/>
+          </a:xfrm>
+          <a:prstGeom prst="rect">
+            <a:avLst/>
+          </a:prstGeom>
+          <a:noFill/>
+          <a:ln/>
+        </p:spPr>
+        <p:txBody>
+          <a:bodyPr wrap="square" lIns="0" tIns="0" rIns="0" bIns="0" rtlCol="0" anchor="ctr"/>
+          <a:lstStyle/>
+          <a:p>
+            <a:pPr marL="0" indent="0">
+              <a:buNone/>
+            </a:pPr>
+            <a:r>
+              <a:rPr lang="en-US" sz="900" dirty="0">
+                <a:solidFill>
+                  <a:srgbClr val="5A5E63"/>
+                </a:solidFill>
+                <a:latin typeface="Inter" pitchFamily="34" charset="0"/>
+                <a:ea typeface="Inter" pitchFamily="34" charset="-122"/>
+                <a:cs typeface="Inter" pitchFamily="34" charset="-120"/>
+              </a:rPr>
+              <a:t>Deployment Strategist + Account Executive</a:t>
+            </a:r>
+            <a:endParaRPr lang="en-US" sz="900" dirty="0"/>
+          </a:p>
+        </p:txBody>
+      </p:sp>
+      <p:sp>
+        <p:nvSpPr>
+          <p:cNvPr id="37" name="Text 35"/>
+          <p:cNvSpPr txBox="1"/>
+          <p:nvPr/>
+        </p:nvSpPr>
+        <p:spPr>
+          <a:xfrm>
+            <a:off x="10618927" y="2871216"/>
+            <a:ext cx="731520" cy="566928"/>
+          </a:xfrm>
+          <a:prstGeom prst="rect">
+            <a:avLst/>
+          </a:prstGeom>
+          <a:noFill/>
+          <a:ln/>
+        </p:spPr>
+        <p:txBody>
+          <a:bodyPr wrap="square" lIns="0" tIns="0" rIns="0" bIns="0" rtlCol="0" anchor="ctr"/>
+          <a:lstStyle/>
+          <a:p>
+            <a:pPr marL="0" indent="0">
+              <a:buNone/>
+            </a:pPr>
+            <a:r>
+              <a:rPr lang="en-US" sz="1050" dirty="0">
+                <a:solidFill>
+                  <a:srgbClr val="16181D"/>
+                </a:solidFill>
+                <a:latin typeface="Inter Medium" pitchFamily="34" charset="0"/>
+                <a:ea typeface="Inter Medium" pitchFamily="34" charset="-122"/>
+                <a:cs typeface="Inter Medium" pitchFamily="34" charset="-120"/>
+              </a:rPr>
+              <a:t>22 Oct</a:t>
+            </a:r>
+            <a:endParaRPr lang="en-US" sz="1050" dirty="0"/>
+          </a:p>
+        </p:txBody>
+      </p:sp>
+      <p:sp>
+        <p:nvSpPr>
+          <p:cNvPr id="38" name="Shape 36"/>
+          <p:cNvSpPr/>
+          <p:nvPr/>
+        </p:nvSpPr>
+        <p:spPr>
+          <a:xfrm>
+            <a:off x="5303520" y="3438144"/>
+            <a:ext cx="6156655" cy="0"/>
+          </a:xfrm>
+          <a:prstGeom prst="line">
+            <a:avLst/>
+          </a:prstGeom>
+          <a:noFill/>
+          <a:ln w="9525">
+            <a:solidFill>
+              <a:srgbClr val="E6EAF4"/>
+            </a:solidFill>
+            <a:prstDash val="solid"/>
+          </a:ln>
+        </p:spPr>
+        <p:txBody>
+          <a:bodyPr/>
+          <a:lstStyle/>
+          <a:p>
+            <a:endParaRPr lang="en-GB"/>
+          </a:p>
+        </p:txBody>
+      </p:sp>
+      <p:sp>
+        <p:nvSpPr>
+          <p:cNvPr id="39" name="Text 37"/>
+          <p:cNvSpPr txBox="1"/>
+          <p:nvPr/>
+        </p:nvSpPr>
+        <p:spPr>
+          <a:xfrm>
+            <a:off x="5486400" y="3438144"/>
+            <a:ext cx="3200400" cy="566928"/>
+          </a:xfrm>
+          <a:prstGeom prst="rect">
+            <a:avLst/>
+          </a:prstGeom>
+          <a:noFill/>
+          <a:ln/>
+        </p:spPr>
+        <p:txBody>
+          <a:bodyPr wrap="square" lIns="0" tIns="0" rIns="0" bIns="0" rtlCol="0" anchor="ctr"/>
+          <a:lstStyle/>
+          <a:p>
+            <a:pPr marL="0" indent="0">
+              <a:buNone/>
+            </a:pPr>
+            <a:r>
+              <a:rPr lang="en-US" sz="1050" dirty="0">
+                <a:solidFill>
+                  <a:srgbClr val="16181D"/>
+                </a:solidFill>
+                <a:latin typeface="Inter" pitchFamily="34" charset="0"/>
+                <a:ea typeface="Inter" pitchFamily="34" charset="-122"/>
+                <a:cs typeface="Inter" pitchFamily="34" charset="-120"/>
+              </a:rPr>
+              <a:t>Joint review of rising requests per ticket (4.6 → 6.2)</a:t>
+            </a:r>
+            <a:endParaRPr lang="en-US" sz="1050" dirty="0"/>
+          </a:p>
+        </p:txBody>
+      </p:sp>
+      <p:sp>
+        <p:nvSpPr>
+          <p:cNvPr id="40" name="Text 38"/>
+          <p:cNvSpPr txBox="1"/>
+          <p:nvPr/>
+        </p:nvSpPr>
+        <p:spPr>
+          <a:xfrm>
+            <a:off x="8823960" y="3438144"/>
+            <a:ext cx="1783080" cy="566928"/>
+          </a:xfrm>
+          <a:prstGeom prst="rect">
+            <a:avLst/>
+          </a:prstGeom>
+          <a:noFill/>
+          <a:ln/>
+        </p:spPr>
+        <p:txBody>
+          <a:bodyPr wrap="square" lIns="0" tIns="0" rIns="0" bIns="0" rtlCol="0" anchor="ctr"/>
+          <a:lstStyle/>
+          <a:p>
+            <a:pPr marL="0" indent="0">
+              <a:buNone/>
+            </a:pPr>
+            <a:r>
+              <a:rPr lang="en-US" sz="900" dirty="0">
+                <a:solidFill>
+                  <a:srgbClr val="5A5E63"/>
+                </a:solidFill>
+                <a:latin typeface="Inter" pitchFamily="34" charset="0"/>
+                <a:ea typeface="Inter" pitchFamily="34" charset="-122"/>
+                <a:cs typeface="Inter" pitchFamily="34" charset="-120"/>
+              </a:rPr>
+              <a:t>Deployment Strategist + Northstar Engineering</a:t>
+            </a:r>
+            <a:endParaRPr lang="en-US" sz="900" dirty="0"/>
+          </a:p>
+        </p:txBody>
+      </p:sp>
+      <p:sp>
+        <p:nvSpPr>
+          <p:cNvPr id="41" name="Text 39"/>
+          <p:cNvSpPr txBox="1"/>
+          <p:nvPr/>
+        </p:nvSpPr>
+        <p:spPr>
+          <a:xfrm>
+            <a:off x="10618927" y="3438144"/>
+            <a:ext cx="731520" cy="566928"/>
+          </a:xfrm>
+          <a:prstGeom prst="rect">
+            <a:avLst/>
+          </a:prstGeom>
+          <a:noFill/>
+          <a:ln/>
+        </p:spPr>
+        <p:txBody>
+          <a:bodyPr wrap="square" lIns="0" tIns="0" rIns="0" bIns="0" rtlCol="0" anchor="ctr"/>
+          <a:lstStyle/>
+          <a:p>
+            <a:pPr marL="0" indent="0">
+              <a:buNone/>
+            </a:pPr>
+            <a:r>
+              <a:rPr lang="en-US" sz="1050" dirty="0">
+                <a:solidFill>
+                  <a:srgbClr val="16181D"/>
+                </a:solidFill>
+                <a:latin typeface="Inter Medium" pitchFamily="34" charset="0"/>
+                <a:ea typeface="Inter Medium" pitchFamily="34" charset="-122"/>
+                <a:cs typeface="Inter Medium" pitchFamily="34" charset="-120"/>
+              </a:rPr>
+              <a:t>23 Oct</a:t>
+            </a:r>
+            <a:endParaRPr lang="en-US" sz="1050" dirty="0"/>
+          </a:p>
+        </p:txBody>
+      </p:sp>
+      <p:sp>
+        <p:nvSpPr>
+          <p:cNvPr id="42" name="Shape 40"/>
+          <p:cNvSpPr/>
+          <p:nvPr/>
+        </p:nvSpPr>
+        <p:spPr>
+          <a:xfrm>
+            <a:off x="5303520" y="4005072"/>
+            <a:ext cx="6156655" cy="0"/>
+          </a:xfrm>
+          <a:prstGeom prst="line">
+            <a:avLst/>
+          </a:prstGeom>
+          <a:noFill/>
+          <a:ln w="9525">
+            <a:solidFill>
+              <a:srgbClr val="E6EAF4"/>
+            </a:solidFill>
+            <a:prstDash val="solid"/>
+          </a:ln>
+        </p:spPr>
+        <p:txBody>
+          <a:bodyPr/>
+          <a:lstStyle/>
+          <a:p>
+            <a:endParaRPr lang="en-GB"/>
+          </a:p>
+        </p:txBody>
+      </p:sp>
+      <p:sp>
+        <p:nvSpPr>
+          <p:cNvPr id="43" name="Text 41"/>
+          <p:cNvSpPr txBox="1"/>
+          <p:nvPr/>
+        </p:nvSpPr>
+        <p:spPr>
+          <a:xfrm>
+            <a:off x="5486400" y="4005072"/>
+            <a:ext cx="3200400" cy="566928"/>
+          </a:xfrm>
+          <a:prstGeom prst="rect">
+            <a:avLst/>
+          </a:prstGeom>
+          <a:noFill/>
+          <a:ln/>
+        </p:spPr>
+        <p:txBody>
+          <a:bodyPr wrap="square" lIns="0" tIns="0" rIns="0" bIns="0" rtlCol="0" anchor="ctr"/>
+          <a:lstStyle/>
+          <a:p>
+            <a:pPr marL="0" indent="0">
+              <a:buNone/>
+            </a:pPr>
+            <a:r>
+              <a:rPr lang="en-US" sz="1050" dirty="0">
+                <a:solidFill>
+                  <a:srgbClr val="16181D"/>
+                </a:solidFill>
+                <a:latin typeface="Inter" pitchFamily="34" charset="0"/>
+                <a:ea typeface="Inter" pitchFamily="34" charset="-122"/>
+                <a:cs typeface="Inter" pitchFamily="34" charset="-120"/>
+              </a:rPr>
+              <a:t>Train the Ridgeline adapter and run the two-arm pilot</a:t>
+            </a:r>
+            <a:endParaRPr lang="en-US" sz="1050" dirty="0"/>
+          </a:p>
+        </p:txBody>
+      </p:sp>
+      <p:sp>
+        <p:nvSpPr>
+          <p:cNvPr id="44" name="Text 42"/>
+          <p:cNvSpPr txBox="1"/>
+          <p:nvPr/>
+        </p:nvSpPr>
+        <p:spPr>
+          <a:xfrm>
+            <a:off x="8823960" y="4005072"/>
+            <a:ext cx="1783080" cy="566928"/>
+          </a:xfrm>
+          <a:prstGeom prst="rect">
+            <a:avLst/>
+          </a:prstGeom>
+          <a:noFill/>
+          <a:ln/>
+        </p:spPr>
+        <p:txBody>
+          <a:bodyPr wrap="square" lIns="0" tIns="0" rIns="0" bIns="0" rtlCol="0" anchor="ctr"/>
+          <a:lstStyle/>
+          <a:p>
+            <a:pPr marL="0" indent="0">
+              <a:buNone/>
+            </a:pPr>
+            <a:r>
+              <a:rPr lang="en-US" sz="900" dirty="0">
+                <a:solidFill>
+                  <a:srgbClr val="5A5E63"/>
+                </a:solidFill>
+                <a:latin typeface="Inter" pitchFamily="34" charset="0"/>
+                <a:ea typeface="Inter" pitchFamily="34" charset="-122"/>
+                <a:cs typeface="Inter" pitchFamily="34" charset="-120"/>
+              </a:rPr>
+              <a:t>Fireworks Applied ML + Northstar Engineering</a:t>
+            </a:r>
+            <a:endParaRPr lang="en-US" sz="900" dirty="0"/>
+          </a:p>
+        </p:txBody>
+      </p:sp>
+      <p:sp>
+        <p:nvSpPr>
+          <p:cNvPr id="45" name="Text 43"/>
+          <p:cNvSpPr txBox="1"/>
+          <p:nvPr/>
+        </p:nvSpPr>
+        <p:spPr>
+          <a:xfrm>
+            <a:off x="10618927" y="4005072"/>
+            <a:ext cx="731520" cy="566928"/>
+          </a:xfrm>
+          <a:prstGeom prst="rect">
+            <a:avLst/>
+          </a:prstGeom>
+          <a:noFill/>
+          <a:ln/>
+        </p:spPr>
+        <p:txBody>
+          <a:bodyPr wrap="square" lIns="0" tIns="0" rIns="0" bIns="0" rtlCol="0" anchor="ctr"/>
+          <a:lstStyle/>
+          <a:p>
+            <a:pPr marL="0" indent="0">
+              <a:buNone/>
+            </a:pPr>
+            <a:r>
+              <a:rPr lang="en-US" sz="1050" dirty="0">
+                <a:solidFill>
+                  <a:srgbClr val="16181D"/>
+                </a:solidFill>
+                <a:latin typeface="Inter Medium" pitchFamily="34" charset="0"/>
+                <a:ea typeface="Inter Medium" pitchFamily="34" charset="-122"/>
+                <a:cs typeface="Inter Medium" pitchFamily="34" charset="-120"/>
+              </a:rPr>
+              <a:t>18 Dec</a:t>
+            </a:r>
+            <a:endParaRPr lang="en-US" sz="1050" dirty="0"/>
+          </a:p>
+        </p:txBody>
+      </p:sp>
+      <p:sp>
+        <p:nvSpPr>
+          <p:cNvPr id="46" name="Shape 44"/>
+          <p:cNvSpPr/>
+          <p:nvPr/>
+        </p:nvSpPr>
+        <p:spPr>
+          <a:xfrm>
+            <a:off x="5303520" y="4572000"/>
+            <a:ext cx="6156655" cy="0"/>
+          </a:xfrm>
+          <a:prstGeom prst="line">
+            <a:avLst/>
+          </a:prstGeom>
+          <a:noFill/>
+          <a:ln w="9525">
+            <a:solidFill>
+              <a:srgbClr val="E6EAF4"/>
+            </a:solidFill>
+            <a:prstDash val="solid"/>
+          </a:ln>
+        </p:spPr>
+        <p:txBody>
+          <a:bodyPr/>
+          <a:lstStyle/>
+          <a:p>
+            <a:endParaRPr lang="en-GB"/>
+          </a:p>
+        </p:txBody>
+      </p:sp>
+      <p:sp>
+        <p:nvSpPr>
+          <p:cNvPr id="47" name="Text 45"/>
+          <p:cNvSpPr txBox="1"/>
+          <p:nvPr/>
+        </p:nvSpPr>
+        <p:spPr>
+          <a:xfrm>
+            <a:off x="5486400" y="4572000"/>
+            <a:ext cx="3200400" cy="566928"/>
+          </a:xfrm>
+          <a:prstGeom prst="rect">
+            <a:avLst/>
+          </a:prstGeom>
+          <a:noFill/>
+          <a:ln/>
+        </p:spPr>
+        <p:txBody>
+          <a:bodyPr wrap="square" lIns="0" tIns="0" rIns="0" bIns="0" rtlCol="0" anchor="ctr"/>
+          <a:lstStyle/>
+          <a:p>
+            <a:pPr marL="0" indent="0">
+              <a:buNone/>
+            </a:pPr>
+            <a:r>
+              <a:rPr lang="en-US" sz="1050" dirty="0">
+                <a:solidFill>
+                  <a:srgbClr val="16181D"/>
+                </a:solidFill>
+                <a:latin typeface="Inter" pitchFamily="34" charset="0"/>
+                <a:ea typeface="Inter" pitchFamily="34" charset="-122"/>
+                <a:cs typeface="Inter" pitchFamily="34" charset="-120"/>
+              </a:rPr>
+              <a:t>Pilot readout and wave-2 decision</a:t>
+            </a:r>
+            <a:endParaRPr lang="en-US" sz="1050" dirty="0"/>
+          </a:p>
+        </p:txBody>
+      </p:sp>
+      <p:sp>
+        <p:nvSpPr>
+          <p:cNvPr id="48" name="Text 46"/>
+          <p:cNvSpPr txBox="1"/>
+          <p:nvPr/>
+        </p:nvSpPr>
+        <p:spPr>
+          <a:xfrm>
+            <a:off x="8823960" y="4572000"/>
+            <a:ext cx="1783080" cy="566928"/>
+          </a:xfrm>
+          <a:prstGeom prst="rect">
+            <a:avLst/>
+          </a:prstGeom>
+          <a:noFill/>
+          <a:ln/>
+        </p:spPr>
+        <p:txBody>
+          <a:bodyPr wrap="square" lIns="0" tIns="0" rIns="0" bIns="0" rtlCol="0" anchor="ctr"/>
+          <a:lstStyle/>
+          <a:p>
+            <a:pPr marL="0" indent="0">
+              <a:buNone/>
+            </a:pPr>
+            <a:r>
+              <a:rPr lang="en-US" sz="900" dirty="0">
+                <a:solidFill>
+                  <a:srgbClr val="5A5E63"/>
+                </a:solidFill>
+                <a:latin typeface="Inter" pitchFamily="34" charset="0"/>
+                <a:ea typeface="Inter" pitchFamily="34" charset="-122"/>
+                <a:cs typeface="Inter" pitchFamily="34" charset="-120"/>
+              </a:rPr>
+              <a:t>Deployment Strategist + Northstar sponsor</a:t>
+            </a:r>
+            <a:endParaRPr lang="en-US" sz="900" dirty="0"/>
+          </a:p>
+        </p:txBody>
+      </p:sp>
+      <p:sp>
+        <p:nvSpPr>
+          <p:cNvPr id="49" name="Text 47"/>
+          <p:cNvSpPr txBox="1"/>
+          <p:nvPr/>
+        </p:nvSpPr>
+        <p:spPr>
+          <a:xfrm>
+            <a:off x="10618927" y="4572000"/>
+            <a:ext cx="731520" cy="566928"/>
+          </a:xfrm>
+          <a:prstGeom prst="rect">
+            <a:avLst/>
+          </a:prstGeom>
+          <a:noFill/>
+          <a:ln/>
+        </p:spPr>
+        <p:txBody>
+          <a:bodyPr wrap="square" lIns="0" tIns="0" rIns="0" bIns="0" rtlCol="0" anchor="ctr"/>
+          <a:lstStyle/>
+          <a:p>
+            <a:pPr marL="0" indent="0">
+              <a:buNone/>
+            </a:pPr>
+            <a:r>
+              <a:rPr lang="en-US" sz="1050" dirty="0">
+                <a:solidFill>
+                  <a:srgbClr val="16181D"/>
+                </a:solidFill>
+                <a:latin typeface="Inter Medium" pitchFamily="34" charset="0"/>
+                <a:ea typeface="Inter Medium" pitchFamily="34" charset="-122"/>
+                <a:cs typeface="Inter Medium" pitchFamily="34" charset="-120"/>
+              </a:rPr>
+              <a:t>8 Jan 2027</a:t>
+            </a:r>
+            <a:endParaRPr lang="en-US" sz="1050" dirty="0"/>
+          </a:p>
+        </p:txBody>
+      </p:sp>
+      <p:sp>
+        <p:nvSpPr>
+          <p:cNvPr id="50" name="joint-next-actions"/>
+          <p:cNvSpPr/>
+          <p:nvPr/>
+        </p:nvSpPr>
+        <p:spPr>
+          <a:xfrm>
+            <a:off x="5303520" y="1371600"/>
+            <a:ext cx="6156655" cy="3767328"/>
+          </a:xfrm>
+          <a:prstGeom prst="roundRect">
+            <a:avLst>
+              <a:gd name="adj" fmla="val 2913"/>
+            </a:avLst>
+          </a:prstGeom>
+          <a:ln w="9525">
+            <a:solidFill>
+              <a:srgbClr val="E6EAF4"/>
+            </a:solidFill>
+            <a:prstDash val="solid"/>
+          </a:ln>
+        </p:spPr>
+        <p:txBody>
+          <a:bodyPr/>
+          <a:lstStyle/>
+          <a:p>
+            <a:endParaRPr lang="en-GB"/>
           </a:p>
         </p:txBody>
       </p:sp>
